--- a/ppt/PythonMath11-Pandas.pptx
+++ b/ppt/PythonMath11-Pandas.pptx
@@ -5,24 +5,39 @@
     <p:sldMasterId id="2147483653" r:id="rId1"/>
   </p:sldMasterIdLst>
   <p:notesMasterIdLst>
-    <p:notesMasterId r:id="rId14"/>
+    <p:notesMasterId r:id="rId29"/>
   </p:notesMasterIdLst>
   <p:handoutMasterIdLst>
-    <p:handoutMasterId r:id="rId15"/>
+    <p:handoutMasterId r:id="rId30"/>
   </p:handoutMasterIdLst>
   <p:sldIdLst>
     <p:sldId id="264" r:id="rId2"/>
     <p:sldId id="265" r:id="rId3"/>
     <p:sldId id="266" r:id="rId4"/>
-    <p:sldId id="274" r:id="rId5"/>
-    <p:sldId id="275" r:id="rId6"/>
-    <p:sldId id="280" r:id="rId7"/>
-    <p:sldId id="281" r:id="rId8"/>
-    <p:sldId id="276" r:id="rId9"/>
-    <p:sldId id="282" r:id="rId10"/>
-    <p:sldId id="283" r:id="rId11"/>
-    <p:sldId id="278" r:id="rId12"/>
+    <p:sldId id="294" r:id="rId5"/>
+    <p:sldId id="274" r:id="rId6"/>
+    <p:sldId id="275" r:id="rId7"/>
+    <p:sldId id="285" r:id="rId8"/>
+    <p:sldId id="286" r:id="rId9"/>
+    <p:sldId id="287" r:id="rId10"/>
+    <p:sldId id="288" r:id="rId11"/>
+    <p:sldId id="289" r:id="rId12"/>
     <p:sldId id="279" r:id="rId13"/>
+    <p:sldId id="290" r:id="rId14"/>
+    <p:sldId id="291" r:id="rId15"/>
+    <p:sldId id="292" r:id="rId16"/>
+    <p:sldId id="276" r:id="rId17"/>
+    <p:sldId id="282" r:id="rId18"/>
+    <p:sldId id="283" r:id="rId19"/>
+    <p:sldId id="293" r:id="rId20"/>
+    <p:sldId id="284" r:id="rId21"/>
+    <p:sldId id="295" r:id="rId22"/>
+    <p:sldId id="296" r:id="rId23"/>
+    <p:sldId id="297" r:id="rId24"/>
+    <p:sldId id="298" r:id="rId25"/>
+    <p:sldId id="299" r:id="rId26"/>
+    <p:sldId id="300" r:id="rId27"/>
+    <p:sldId id="301" r:id="rId28"/>
   </p:sldIdLst>
   <p:sldSz cx="9144000" cy="6858000" type="screen4x3"/>
   <p:notesSz cx="6648450" cy="9782175"/>
@@ -615,35 +630,35 @@
           <a:p>
             <a:pPr lvl="0"/>
             <a:r>
-              <a:rPr lang="fr-FR" noProof="0" smtClean="0"/>
+              <a:rPr lang="fr-FR" noProof="0"/>
               <a:t>Cliquez pour modifier les styles du texte du masque</a:t>
             </a:r>
           </a:p>
           <a:p>
             <a:pPr lvl="1"/>
             <a:r>
-              <a:rPr lang="fr-FR" noProof="0" smtClean="0"/>
+              <a:rPr lang="fr-FR" noProof="0"/>
               <a:t>Deuxième niveau</a:t>
             </a:r>
           </a:p>
           <a:p>
             <a:pPr lvl="2"/>
             <a:r>
-              <a:rPr lang="fr-FR" noProof="0" smtClean="0"/>
+              <a:rPr lang="fr-FR" noProof="0"/>
               <a:t>Troisième niveau</a:t>
             </a:r>
           </a:p>
           <a:p>
             <a:pPr lvl="3"/>
             <a:r>
-              <a:rPr lang="fr-FR" noProof="0" smtClean="0"/>
+              <a:rPr lang="fr-FR" noProof="0"/>
               <a:t>Quatrième niveau</a:t>
             </a:r>
           </a:p>
           <a:p>
             <a:pPr lvl="4"/>
             <a:r>
-              <a:rPr lang="fr-FR" noProof="0" smtClean="0"/>
+              <a:rPr lang="fr-FR" noProof="0"/>
               <a:t>Cinquième niveau</a:t>
             </a:r>
           </a:p>
@@ -931,10 +946,9 @@
           <a:lstStyle/>
           <a:p>
             <a:r>
-              <a:rPr lang="fr-FR" smtClean="0"/>
+              <a:rPr lang="fr-FR"/>
               <a:t>Cliquez pour modifier le style du titre</a:t>
             </a:r>
-            <a:endParaRPr lang="fr-FR"/>
           </a:p>
         </p:txBody>
       </p:sp>
@@ -996,10 +1010,9 @@
           </a:lstStyle>
           <a:p>
             <a:r>
-              <a:rPr lang="fr-FR" smtClean="0"/>
+              <a:rPr lang="fr-FR"/>
               <a:t>Cliquez pour modifier le style des sous-titres du masque</a:t>
             </a:r>
-            <a:endParaRPr lang="fr-FR"/>
           </a:p>
         </p:txBody>
       </p:sp>
@@ -1054,10 +1067,9 @@
           <a:lstStyle/>
           <a:p>
             <a:r>
-              <a:rPr lang="fr-FR" smtClean="0"/>
+              <a:rPr lang="fr-FR"/>
               <a:t>Cliquez pour modifier le style du titre</a:t>
             </a:r>
-            <a:endParaRPr lang="fr-FR"/>
           </a:p>
         </p:txBody>
       </p:sp>
@@ -1083,38 +1095,37 @@
           <a:p>
             <a:pPr lvl="0"/>
             <a:r>
-              <a:rPr lang="fr-FR" smtClean="0"/>
+              <a:rPr lang="fr-FR"/>
               <a:t>Cliquez pour modifier les styles du texte du masque</a:t>
             </a:r>
           </a:p>
           <a:p>
             <a:pPr lvl="1"/>
             <a:r>
-              <a:rPr lang="fr-FR" smtClean="0"/>
+              <a:rPr lang="fr-FR"/>
               <a:t>Deuxième niveau</a:t>
             </a:r>
           </a:p>
           <a:p>
             <a:pPr lvl="2"/>
             <a:r>
-              <a:rPr lang="fr-FR" smtClean="0"/>
+              <a:rPr lang="fr-FR"/>
               <a:t>Troisième niveau</a:t>
             </a:r>
           </a:p>
           <a:p>
             <a:pPr lvl="3"/>
             <a:r>
-              <a:rPr lang="fr-FR" smtClean="0"/>
+              <a:rPr lang="fr-FR"/>
               <a:t>Quatrième niveau</a:t>
             </a:r>
           </a:p>
           <a:p>
             <a:pPr lvl="4"/>
             <a:r>
-              <a:rPr lang="fr-FR" smtClean="0"/>
+              <a:rPr lang="fr-FR"/>
               <a:t>Cinquième niveau</a:t>
             </a:r>
-            <a:endParaRPr lang="fr-FR"/>
           </a:p>
         </p:txBody>
       </p:sp>
@@ -1173,10 +1184,9 @@
           </a:lstStyle>
           <a:p>
             <a:r>
-              <a:rPr lang="fr-FR" dirty="0" smtClean="0"/>
+              <a:rPr lang="fr-FR" dirty="0"/>
               <a:t>Cliquez pour modifier le style du titre</a:t>
             </a:r>
-            <a:endParaRPr lang="fr-FR" dirty="0"/>
           </a:p>
         </p:txBody>
       </p:sp>
@@ -1202,38 +1212,37 @@
           <a:p>
             <a:pPr lvl="0"/>
             <a:r>
-              <a:rPr lang="fr-FR" dirty="0" smtClean="0"/>
+              <a:rPr lang="fr-FR" dirty="0"/>
               <a:t>Cliquez pour modifier les styles du texte du masque</a:t>
             </a:r>
           </a:p>
           <a:p>
             <a:pPr lvl="1"/>
             <a:r>
-              <a:rPr lang="fr-FR" dirty="0" smtClean="0"/>
+              <a:rPr lang="fr-FR" dirty="0"/>
               <a:t>Deuxième niveau</a:t>
             </a:r>
           </a:p>
           <a:p>
             <a:pPr lvl="2"/>
             <a:r>
-              <a:rPr lang="fr-FR" dirty="0" smtClean="0"/>
+              <a:rPr lang="fr-FR" dirty="0"/>
               <a:t>Troisième niveau</a:t>
             </a:r>
           </a:p>
           <a:p>
             <a:pPr lvl="3"/>
             <a:r>
-              <a:rPr lang="fr-FR" dirty="0" smtClean="0"/>
+              <a:rPr lang="fr-FR" dirty="0"/>
               <a:t>Quatrième niveau</a:t>
             </a:r>
           </a:p>
           <a:p>
             <a:pPr lvl="4"/>
             <a:r>
-              <a:rPr lang="fr-FR" dirty="0" smtClean="0"/>
+              <a:rPr lang="fr-FR" dirty="0"/>
               <a:t>Cinquième niveau</a:t>
             </a:r>
-            <a:endParaRPr lang="fr-FR" dirty="0"/>
           </a:p>
         </p:txBody>
       </p:sp>
@@ -1283,10 +1292,9 @@
           <a:lstStyle/>
           <a:p>
             <a:r>
-              <a:rPr lang="fr-FR" smtClean="0"/>
+              <a:rPr lang="fr-FR"/>
               <a:t>Cliquez pour modifier le style du titre</a:t>
             </a:r>
-            <a:endParaRPr lang="fr-FR"/>
           </a:p>
         </p:txBody>
       </p:sp>
@@ -1340,38 +1348,37 @@
           <a:p>
             <a:pPr lvl="0"/>
             <a:r>
-              <a:rPr lang="fr-FR" smtClean="0"/>
+              <a:rPr lang="fr-FR"/>
               <a:t>Cliquez pour modifier les styles du texte du masque</a:t>
             </a:r>
           </a:p>
           <a:p>
             <a:pPr lvl="1"/>
             <a:r>
-              <a:rPr lang="fr-FR" smtClean="0"/>
+              <a:rPr lang="fr-FR"/>
               <a:t>Deuxième niveau</a:t>
             </a:r>
           </a:p>
           <a:p>
             <a:pPr lvl="2"/>
             <a:r>
-              <a:rPr lang="fr-FR" smtClean="0"/>
+              <a:rPr lang="fr-FR"/>
               <a:t>Troisième niveau</a:t>
             </a:r>
           </a:p>
           <a:p>
             <a:pPr lvl="3"/>
             <a:r>
-              <a:rPr lang="fr-FR" smtClean="0"/>
+              <a:rPr lang="fr-FR"/>
               <a:t>Quatrième niveau</a:t>
             </a:r>
           </a:p>
           <a:p>
             <a:pPr lvl="4"/>
             <a:r>
-              <a:rPr lang="fr-FR" smtClean="0"/>
+              <a:rPr lang="fr-FR"/>
               <a:t>Cinquième niveau</a:t>
             </a:r>
-            <a:endParaRPr lang="fr-FR"/>
           </a:p>
         </p:txBody>
       </p:sp>
@@ -1425,38 +1432,37 @@
           <a:p>
             <a:pPr lvl="0"/>
             <a:r>
-              <a:rPr lang="fr-FR" smtClean="0"/>
+              <a:rPr lang="fr-FR"/>
               <a:t>Cliquez pour modifier les styles du texte du masque</a:t>
             </a:r>
           </a:p>
           <a:p>
             <a:pPr lvl="1"/>
             <a:r>
-              <a:rPr lang="fr-FR" smtClean="0"/>
+              <a:rPr lang="fr-FR"/>
               <a:t>Deuxième niveau</a:t>
             </a:r>
           </a:p>
           <a:p>
             <a:pPr lvl="2"/>
             <a:r>
-              <a:rPr lang="fr-FR" smtClean="0"/>
+              <a:rPr lang="fr-FR"/>
               <a:t>Troisième niveau</a:t>
             </a:r>
           </a:p>
           <a:p>
             <a:pPr lvl="3"/>
             <a:r>
-              <a:rPr lang="fr-FR" smtClean="0"/>
+              <a:rPr lang="fr-FR"/>
               <a:t>Quatrième niveau</a:t>
             </a:r>
           </a:p>
           <a:p>
             <a:pPr lvl="4"/>
             <a:r>
-              <a:rPr lang="fr-FR" smtClean="0"/>
+              <a:rPr lang="fr-FR"/>
               <a:t>Cinquième niveau</a:t>
             </a:r>
-            <a:endParaRPr lang="fr-FR"/>
           </a:p>
         </p:txBody>
       </p:sp>
@@ -1515,10 +1521,9 @@
           </a:lstStyle>
           <a:p>
             <a:r>
-              <a:rPr lang="fr-FR" smtClean="0"/>
+              <a:rPr lang="fr-FR"/>
               <a:t>Cliquez pour modifier le style du titre</a:t>
             </a:r>
-            <a:endParaRPr lang="fr-FR"/>
           </a:p>
         </p:txBody>
       </p:sp>
@@ -1581,7 +1586,7 @@
           <a:p>
             <a:pPr lvl="0"/>
             <a:r>
-              <a:rPr lang="fr-FR" smtClean="0"/>
+              <a:rPr lang="fr-FR"/>
               <a:t>Cliquez pour modifier les styles du texte du masque</a:t>
             </a:r>
           </a:p>
@@ -1637,38 +1642,37 @@
           <a:p>
             <a:pPr lvl="0"/>
             <a:r>
-              <a:rPr lang="fr-FR" smtClean="0"/>
+              <a:rPr lang="fr-FR"/>
               <a:t>Cliquez pour modifier les styles du texte du masque</a:t>
             </a:r>
           </a:p>
           <a:p>
             <a:pPr lvl="1"/>
             <a:r>
-              <a:rPr lang="fr-FR" smtClean="0"/>
+              <a:rPr lang="fr-FR"/>
               <a:t>Deuxième niveau</a:t>
             </a:r>
           </a:p>
           <a:p>
             <a:pPr lvl="2"/>
             <a:r>
-              <a:rPr lang="fr-FR" smtClean="0"/>
+              <a:rPr lang="fr-FR"/>
               <a:t>Troisième niveau</a:t>
             </a:r>
           </a:p>
           <a:p>
             <a:pPr lvl="3"/>
             <a:r>
-              <a:rPr lang="fr-FR" smtClean="0"/>
+              <a:rPr lang="fr-FR"/>
               <a:t>Quatrième niveau</a:t>
             </a:r>
           </a:p>
           <a:p>
             <a:pPr lvl="4"/>
             <a:r>
-              <a:rPr lang="fr-FR" smtClean="0"/>
+              <a:rPr lang="fr-FR"/>
               <a:t>Cinquième niveau</a:t>
             </a:r>
-            <a:endParaRPr lang="fr-FR"/>
           </a:p>
         </p:txBody>
       </p:sp>
@@ -1731,7 +1735,7 @@
           <a:p>
             <a:pPr lvl="0"/>
             <a:r>
-              <a:rPr lang="fr-FR" smtClean="0"/>
+              <a:rPr lang="fr-FR"/>
               <a:t>Cliquez pour modifier les styles du texte du masque</a:t>
             </a:r>
           </a:p>
@@ -1787,38 +1791,37 @@
           <a:p>
             <a:pPr lvl="0"/>
             <a:r>
-              <a:rPr lang="fr-FR" smtClean="0"/>
+              <a:rPr lang="fr-FR"/>
               <a:t>Cliquez pour modifier les styles du texte du masque</a:t>
             </a:r>
           </a:p>
           <a:p>
             <a:pPr lvl="1"/>
             <a:r>
-              <a:rPr lang="fr-FR" smtClean="0"/>
+              <a:rPr lang="fr-FR"/>
               <a:t>Deuxième niveau</a:t>
             </a:r>
           </a:p>
           <a:p>
             <a:pPr lvl="2"/>
             <a:r>
-              <a:rPr lang="fr-FR" smtClean="0"/>
+              <a:rPr lang="fr-FR"/>
               <a:t>Troisième niveau</a:t>
             </a:r>
           </a:p>
           <a:p>
             <a:pPr lvl="3"/>
             <a:r>
-              <a:rPr lang="fr-FR" smtClean="0"/>
+              <a:rPr lang="fr-FR"/>
               <a:t>Quatrième niveau</a:t>
             </a:r>
           </a:p>
           <a:p>
             <a:pPr lvl="4"/>
             <a:r>
-              <a:rPr lang="fr-FR" smtClean="0"/>
+              <a:rPr lang="fr-FR"/>
               <a:t>Cinquième niveau</a:t>
             </a:r>
-            <a:endParaRPr lang="fr-FR"/>
           </a:p>
         </p:txBody>
       </p:sp>
@@ -1868,10 +1871,9 @@
           <a:lstStyle/>
           <a:p>
             <a:r>
-              <a:rPr lang="fr-FR" smtClean="0"/>
+              <a:rPr lang="fr-FR"/>
               <a:t>Cliquez pour modifier le style du titre</a:t>
             </a:r>
-            <a:endParaRPr lang="fr-FR"/>
           </a:p>
         </p:txBody>
       </p:sp>
@@ -1960,10 +1962,9 @@
           </a:lstStyle>
           <a:p>
             <a:r>
-              <a:rPr lang="fr-FR" smtClean="0"/>
+              <a:rPr lang="fr-FR"/>
               <a:t>Cliquez pour modifier le style du titre</a:t>
             </a:r>
-            <a:endParaRPr lang="fr-FR"/>
           </a:p>
         </p:txBody>
       </p:sp>
@@ -2017,38 +2018,37 @@
           <a:p>
             <a:pPr lvl="0"/>
             <a:r>
-              <a:rPr lang="fr-FR" smtClean="0"/>
+              <a:rPr lang="fr-FR"/>
               <a:t>Cliquez pour modifier les styles du texte du masque</a:t>
             </a:r>
           </a:p>
           <a:p>
             <a:pPr lvl="1"/>
             <a:r>
-              <a:rPr lang="fr-FR" smtClean="0"/>
+              <a:rPr lang="fr-FR"/>
               <a:t>Deuxième niveau</a:t>
             </a:r>
           </a:p>
           <a:p>
             <a:pPr lvl="2"/>
             <a:r>
-              <a:rPr lang="fr-FR" smtClean="0"/>
+              <a:rPr lang="fr-FR"/>
               <a:t>Troisième niveau</a:t>
             </a:r>
           </a:p>
           <a:p>
             <a:pPr lvl="3"/>
             <a:r>
-              <a:rPr lang="fr-FR" smtClean="0"/>
+              <a:rPr lang="fr-FR"/>
               <a:t>Quatrième niveau</a:t>
             </a:r>
           </a:p>
           <a:p>
             <a:pPr lvl="4"/>
             <a:r>
-              <a:rPr lang="fr-FR" smtClean="0"/>
+              <a:rPr lang="fr-FR"/>
               <a:t>Cinquième niveau</a:t>
             </a:r>
-            <a:endParaRPr lang="fr-FR"/>
           </a:p>
         </p:txBody>
       </p:sp>
@@ -2111,7 +2111,7 @@
           <a:p>
             <a:pPr lvl="0"/>
             <a:r>
-              <a:rPr lang="fr-FR" smtClean="0"/>
+              <a:rPr lang="fr-FR"/>
               <a:t>Cliquez pour modifier les styles du texte du masque</a:t>
             </a:r>
           </a:p>
@@ -2172,10 +2172,9 @@
           </a:lstStyle>
           <a:p>
             <a:r>
-              <a:rPr lang="fr-FR" smtClean="0"/>
+              <a:rPr lang="fr-FR"/>
               <a:t>Cliquez pour modifier le style du titre</a:t>
             </a:r>
-            <a:endParaRPr lang="fr-FR"/>
           </a:p>
         </p:txBody>
       </p:sp>
@@ -2237,7 +2236,7 @@
           </a:lstStyle>
           <a:p>
             <a:pPr lvl="0"/>
-            <a:endParaRPr lang="fr-FR" noProof="0" smtClean="0"/>
+            <a:endParaRPr lang="fr-FR" noProof="0"/>
           </a:p>
         </p:txBody>
       </p:sp>
@@ -2300,7 +2299,7 @@
           <a:p>
             <a:pPr lvl="0"/>
             <a:r>
-              <a:rPr lang="fr-FR" smtClean="0"/>
+              <a:rPr lang="fr-FR"/>
               <a:t>Cliquez pour modifier les styles du texte du masque</a:t>
             </a:r>
           </a:p>
@@ -2352,10 +2351,9 @@
           <a:lstStyle/>
           <a:p>
             <a:r>
-              <a:rPr lang="fr-FR" smtClean="0"/>
+              <a:rPr lang="fr-FR"/>
               <a:t>Cliquez pour modifier le style du titre</a:t>
             </a:r>
-            <a:endParaRPr lang="fr-FR"/>
           </a:p>
         </p:txBody>
       </p:sp>
@@ -2376,38 +2374,37 @@
           <a:p>
             <a:pPr lvl="0"/>
             <a:r>
-              <a:rPr lang="fr-FR" smtClean="0"/>
+              <a:rPr lang="fr-FR"/>
               <a:t>Cliquez pour modifier les styles du texte du masque</a:t>
             </a:r>
           </a:p>
           <a:p>
             <a:pPr lvl="1"/>
             <a:r>
-              <a:rPr lang="fr-FR" smtClean="0"/>
+              <a:rPr lang="fr-FR"/>
               <a:t>Deuxième niveau</a:t>
             </a:r>
           </a:p>
           <a:p>
             <a:pPr lvl="2"/>
             <a:r>
-              <a:rPr lang="fr-FR" smtClean="0"/>
+              <a:rPr lang="fr-FR"/>
               <a:t>Troisième niveau</a:t>
             </a:r>
           </a:p>
           <a:p>
             <a:pPr lvl="3"/>
             <a:r>
-              <a:rPr lang="fr-FR" smtClean="0"/>
+              <a:rPr lang="fr-FR"/>
               <a:t>Quatrième niveau</a:t>
             </a:r>
           </a:p>
           <a:p>
             <a:pPr lvl="4"/>
             <a:r>
-              <a:rPr lang="fr-FR" smtClean="0"/>
+              <a:rPr lang="fr-FR"/>
               <a:t>Cinquième niveau</a:t>
             </a:r>
-            <a:endParaRPr lang="fr-FR"/>
           </a:p>
         </p:txBody>
       </p:sp>
@@ -2588,7 +2585,7 @@
             <a:pPr eaLnBrk="1" hangingPunct="1">
               <a:defRPr/>
             </a:pPr>
-            <a:endParaRPr lang="fr-FR" altLang="fr-FR" smtClean="0"/>
+            <a:endParaRPr lang="fr-FR" altLang="fr-FR"/>
           </a:p>
         </p:txBody>
       </p:sp>
@@ -2742,7 +2739,7 @@
               <a:defRPr/>
             </a:pPr>
             <a:r>
-              <a:rPr lang="fr-FR" sz="1200" dirty="0" smtClean="0"/>
+              <a:rPr lang="fr-FR" sz="1200" dirty="0"/>
               <a:t>Page </a:t>
             </a:r>
             <a:fld id="{E218E9B1-FD08-4C80-902E-210BA2967D0D}" type="slidenum">
@@ -2755,7 +2752,7 @@
               </a:pPr>
               <a:t>‹N°›</a:t>
             </a:fld>
-            <a:endParaRPr lang="fr-FR" dirty="0" smtClean="0">
+            <a:endParaRPr lang="fr-FR" dirty="0">
               <a:latin typeface="Times New Roman" pitchFamily="18" charset="0"/>
             </a:endParaRPr>
           </a:p>
@@ -2911,10 +2908,10 @@
               <a:defRPr/>
             </a:pPr>
             <a:r>
-              <a:rPr lang="fr-FR" sz="1600" dirty="0" smtClean="0"/>
+              <a:rPr lang="fr-FR" sz="1600" dirty="0"/>
               <a:t>Python</a:t>
             </a:r>
-            <a:endParaRPr lang="fr-FR" dirty="0" smtClean="0">
+            <a:endParaRPr lang="fr-FR" dirty="0">
               <a:latin typeface="Times New Roman" pitchFamily="18" charset="0"/>
             </a:endParaRPr>
           </a:p>
@@ -2972,7 +2969,7 @@
           <a:p>
             <a:pPr lvl="0"/>
             <a:r>
-              <a:rPr lang="fr-FR" altLang="fr-FR" smtClean="0"/>
+              <a:rPr lang="fr-FR" altLang="fr-FR"/>
               <a:t>Cliquez pour modifier le style du titre du masque</a:t>
             </a:r>
           </a:p>
@@ -3030,35 +3027,35 @@
           <a:p>
             <a:pPr lvl="0"/>
             <a:r>
-              <a:rPr lang="fr-FR" altLang="fr-FR" smtClean="0"/>
+              <a:rPr lang="fr-FR" altLang="fr-FR"/>
               <a:t>Cliquez pour modifier les styles du texte du masque</a:t>
             </a:r>
           </a:p>
           <a:p>
             <a:pPr lvl="1"/>
             <a:r>
-              <a:rPr lang="fr-FR" altLang="fr-FR" smtClean="0"/>
+              <a:rPr lang="fr-FR" altLang="fr-FR"/>
               <a:t>Deuxième niveau</a:t>
             </a:r>
           </a:p>
           <a:p>
             <a:pPr lvl="2"/>
             <a:r>
-              <a:rPr lang="fr-FR" altLang="fr-FR" smtClean="0"/>
+              <a:rPr lang="fr-FR" altLang="fr-FR"/>
               <a:t>Troisième niveau</a:t>
             </a:r>
           </a:p>
           <a:p>
             <a:pPr lvl="3"/>
             <a:r>
-              <a:rPr lang="fr-FR" altLang="fr-FR" smtClean="0"/>
+              <a:rPr lang="fr-FR" altLang="fr-FR"/>
               <a:t>Quatrième niveau</a:t>
             </a:r>
           </a:p>
           <a:p>
             <a:pPr lvl="4"/>
             <a:r>
-              <a:rPr lang="fr-FR" altLang="fr-FR" smtClean="0"/>
+              <a:rPr lang="fr-FR" altLang="fr-FR"/>
               <a:t>Cinquième niveau</a:t>
             </a:r>
           </a:p>
@@ -3214,10 +3211,10 @@
               <a:defRPr/>
             </a:pPr>
             <a:r>
-              <a:rPr lang="fr-FR" sz="1200" smtClean="0"/>
+              <a:rPr lang="fr-FR" sz="1200"/>
               <a:t>© Cyril Vincent Conseil</a:t>
             </a:r>
-            <a:endParaRPr lang="fr-FR" smtClean="0">
+            <a:endParaRPr lang="fr-FR">
               <a:latin typeface="Times New Roman" pitchFamily="18" charset="0"/>
             </a:endParaRPr>
           </a:p>
@@ -3699,15 +3696,15 @@
           <a:p>
             <a:pPr eaLnBrk="1" hangingPunct="1"/>
             <a:r>
-              <a:rPr lang="fr-FR" altLang="fr-FR" smtClean="0"/>
+              <a:rPr lang="fr-FR" altLang="fr-FR"/>
               <a:t>Chapitre 11</a:t>
             </a:r>
-            <a:endParaRPr lang="fr-FR" altLang="fr-FR" dirty="0" smtClean="0"/>
+            <a:endParaRPr lang="fr-FR" altLang="fr-FR" dirty="0"/>
           </a:p>
           <a:p>
             <a:pPr eaLnBrk="1" hangingPunct="1"/>
             <a:r>
-              <a:rPr lang="fr-FR" altLang="fr-FR" dirty="0" smtClean="0"/>
+              <a:rPr lang="fr-FR" altLang="fr-FR" dirty="0"/>
               <a:t>Pandas</a:t>
             </a:r>
           </a:p>
@@ -3760,10 +3757,9 @@
           <a:lstStyle/>
           <a:p>
             <a:r>
-              <a:rPr lang="fr-FR" sz="3600" dirty="0" smtClean="0"/>
+              <a:rPr lang="fr-FR" sz="3600" dirty="0"/>
               <a:t>Data Science</a:t>
             </a:r>
-            <a:endParaRPr lang="fr-FR" sz="3600" dirty="0"/>
           </a:p>
         </p:txBody>
       </p:sp>
@@ -3796,13 +3792,6 @@
   <p:clrMapOvr>
     <a:masterClrMapping/>
   </p:clrMapOvr>
-  <p:timing>
-    <p:tnLst>
-      <p:par>
-        <p:cTn id="1" dur="indefinite" restart="never" nodeType="tmRoot"/>
-      </p:par>
-    </p:tnLst>
-  </p:timing>
 </p:sld>
 </file>
 
@@ -3825,7 +3814,13 @@
       </p:grpSpPr>
       <p:sp>
         <p:nvSpPr>
-          <p:cNvPr id="2" name="Titre 1"/>
+          <p:cNvPr id="2" name="Titre 1">
+            <a:extLst>
+              <a:ext uri="{FF2B5EF4-FFF2-40B4-BE49-F238E27FC236}">
+                <a16:creationId xmlns:a16="http://schemas.microsoft.com/office/drawing/2014/main" id="{AF5DEFC3-595B-2E77-3123-951C2BCF5CD5}"/>
+              </a:ext>
+            </a:extLst>
+          </p:cNvPr>
           <p:cNvSpPr>
             <a:spLocks noGrp="1"/>
           </p:cNvSpPr>
@@ -3839,16 +3834,21 @@
           <a:lstStyle/>
           <a:p>
             <a:r>
-              <a:rPr lang="fr-FR" dirty="0" smtClean="0"/>
-              <a:t>Structure de la base</a:t>
-            </a:r>
-            <a:endParaRPr lang="fr-FR" dirty="0"/>
-          </a:p>
-        </p:txBody>
-      </p:sp>
-      <p:sp>
-        <p:nvSpPr>
-          <p:cNvPr id="3" name="Espace réservé du contenu 2"/>
+              <a:rPr lang="fr-FR" dirty="0"/>
+              <a:t>Accès par colonne</a:t>
+            </a:r>
+          </a:p>
+        </p:txBody>
+      </p:sp>
+      <p:sp>
+        <p:nvSpPr>
+          <p:cNvPr id="3" name="Espace réservé du contenu 2">
+            <a:extLst>
+              <a:ext uri="{FF2B5EF4-FFF2-40B4-BE49-F238E27FC236}">
+                <a16:creationId xmlns:a16="http://schemas.microsoft.com/office/drawing/2014/main" id="{31F86E59-1A0B-2A63-7605-85C7CDE02F17}"/>
+              </a:ext>
+            </a:extLst>
+          </p:cNvPr>
           <p:cNvSpPr>
             <a:spLocks noGrp="1"/>
           </p:cNvSpPr>
@@ -3862,179 +3862,26 @@
           <a:lstStyle/>
           <a:p>
             <a:r>
-              <a:rPr lang="fr-FR" sz="2000" dirty="0" err="1" smtClean="0"/>
-              <a:t>Wdbc.data</a:t>
-            </a:r>
-            <a:endParaRPr lang="fr-FR" sz="2000" dirty="0" smtClean="0"/>
-          </a:p>
-          <a:p>
-            <a:pPr lvl="1"/>
-            <a:r>
-              <a:rPr lang="fr-FR" sz="1800" dirty="0" smtClean="0"/>
-              <a:t>Id</a:t>
-            </a:r>
-          </a:p>
-          <a:p>
-            <a:pPr lvl="1"/>
-            <a:r>
-              <a:rPr lang="fr-FR" sz="1800" dirty="0" smtClean="0"/>
-              <a:t>Diagnostique M = Maligne, B = </a:t>
-            </a:r>
-            <a:r>
-              <a:rPr lang="fr-FR" sz="1800" dirty="0" err="1" smtClean="0"/>
-              <a:t>Benigne</a:t>
-            </a:r>
-            <a:endParaRPr lang="fr-FR" sz="1800" dirty="0" smtClean="0"/>
-          </a:p>
-          <a:p>
-            <a:r>
-              <a:rPr lang="fr-FR" sz="2000" dirty="0" smtClean="0"/>
-              <a:t>Les données biologique sont interprétés depuis l’image de la tumeur</a:t>
-            </a:r>
-          </a:p>
-          <a:p>
-            <a:pPr lvl="1"/>
-            <a:r>
-              <a:rPr lang="fr-FR" sz="1800" dirty="0" smtClean="0"/>
-              <a:t>Rayon</a:t>
-            </a:r>
-          </a:p>
-          <a:p>
-            <a:pPr lvl="1"/>
-            <a:r>
-              <a:rPr lang="fr-FR" sz="1800" dirty="0" smtClean="0"/>
-              <a:t>Texture (</a:t>
-            </a:r>
-            <a:r>
-              <a:rPr lang="en-US" sz="1800" dirty="0"/>
-              <a:t>standard deviation of gray-scale </a:t>
-            </a:r>
-            <a:r>
-              <a:rPr lang="en-US" sz="1800" dirty="0" smtClean="0"/>
-              <a:t>values)</a:t>
-            </a:r>
-          </a:p>
-          <a:p>
-            <a:pPr lvl="1"/>
-            <a:r>
-              <a:rPr lang="en-US" sz="1800" dirty="0" err="1" smtClean="0"/>
-              <a:t>Périmetre</a:t>
-            </a:r>
-            <a:endParaRPr lang="en-US" sz="1800" dirty="0" smtClean="0"/>
-          </a:p>
-          <a:p>
-            <a:pPr lvl="1"/>
-            <a:r>
-              <a:rPr lang="en-US" sz="1800" dirty="0" err="1" smtClean="0"/>
-              <a:t>Superficie</a:t>
-            </a:r>
-            <a:endParaRPr lang="en-US" sz="1800" dirty="0" smtClean="0"/>
-          </a:p>
-          <a:p>
-            <a:pPr lvl="1"/>
-            <a:r>
-              <a:rPr lang="en-US" sz="1800" dirty="0" smtClean="0"/>
-              <a:t>Smoothness (variation du rayon)</a:t>
-            </a:r>
-          </a:p>
-          <a:p>
-            <a:pPr lvl="1"/>
-            <a:r>
-              <a:rPr lang="en-US" sz="1800" dirty="0" err="1" smtClean="0"/>
-              <a:t>Compacité</a:t>
-            </a:r>
-            <a:r>
-              <a:rPr lang="en-US" sz="1800" dirty="0" smtClean="0"/>
-              <a:t> (perimeter**2 / </a:t>
-            </a:r>
-            <a:r>
-              <a:rPr lang="en-US" sz="1800" dirty="0" err="1" smtClean="0"/>
-              <a:t>superficie</a:t>
-            </a:r>
-            <a:r>
-              <a:rPr lang="en-US" sz="1800" dirty="0" smtClean="0"/>
-              <a:t> – 1)</a:t>
-            </a:r>
-          </a:p>
-          <a:p>
-            <a:pPr lvl="1"/>
-            <a:r>
-              <a:rPr lang="en-US" sz="1800" dirty="0" err="1" smtClean="0"/>
-              <a:t>Concavité</a:t>
-            </a:r>
-            <a:r>
-              <a:rPr lang="en-US" sz="1800" dirty="0" smtClean="0"/>
-              <a:t> (</a:t>
-            </a:r>
-            <a:r>
-              <a:rPr lang="en-US" sz="1800" dirty="0"/>
-              <a:t>severity of concave portions of the </a:t>
-            </a:r>
-            <a:r>
-              <a:rPr lang="en-US" sz="1800" dirty="0" smtClean="0"/>
-              <a:t>contour)</a:t>
-            </a:r>
-          </a:p>
-          <a:p>
-            <a:pPr lvl="1"/>
-            <a:r>
-              <a:rPr lang="en-US" sz="1800" dirty="0" smtClean="0"/>
-              <a:t>Points concaves (</a:t>
-            </a:r>
-            <a:r>
-              <a:rPr lang="en-US" sz="1800" dirty="0" err="1" smtClean="0"/>
-              <a:t>nombre</a:t>
-            </a:r>
-            <a:r>
-              <a:rPr lang="en-US" sz="1800" dirty="0" smtClean="0"/>
-              <a:t> de portion concave)</a:t>
-            </a:r>
-          </a:p>
-          <a:p>
-            <a:pPr lvl="1"/>
-            <a:r>
-              <a:rPr lang="en-US" sz="1800" dirty="0" err="1" smtClean="0"/>
-              <a:t>Symetrie</a:t>
-            </a:r>
-            <a:endParaRPr lang="en-US" sz="1800" dirty="0" smtClean="0"/>
-          </a:p>
-          <a:p>
-            <a:pPr lvl="1"/>
-            <a:r>
-              <a:rPr lang="en-US" sz="1800" dirty="0" smtClean="0"/>
-              <a:t>Dimension </a:t>
-            </a:r>
-            <a:r>
-              <a:rPr lang="en-US" sz="1800" dirty="0" err="1" smtClean="0"/>
-              <a:t>Fractale</a:t>
-            </a:r>
-            <a:r>
-              <a:rPr lang="en-US" sz="1800" dirty="0" smtClean="0"/>
-              <a:t> (</a:t>
-            </a:r>
-            <a:r>
-              <a:rPr lang="fr-FR" sz="1800" dirty="0"/>
-              <a:t>"</a:t>
-            </a:r>
-            <a:r>
-              <a:rPr lang="fr-FR" sz="1800" dirty="0" err="1"/>
-              <a:t>coastline</a:t>
-            </a:r>
-            <a:r>
-              <a:rPr lang="fr-FR" sz="1800" dirty="0"/>
-              <a:t> approximation" </a:t>
-            </a:r>
-            <a:r>
-              <a:rPr lang="fr-FR" sz="1800" dirty="0" smtClean="0"/>
-              <a:t>– 1)</a:t>
-            </a:r>
-            <a:endParaRPr lang="en-US" sz="1800" dirty="0" smtClean="0"/>
+              <a:rPr lang="fr-FR" dirty="0"/>
+              <a:t>C'est du </a:t>
+            </a:r>
+            <a:r>
+              <a:rPr lang="fr-FR" dirty="0" err="1"/>
+              <a:t>numpy</a:t>
+            </a:r>
+            <a:endParaRPr lang="fr-FR" dirty="0"/>
           </a:p>
         </p:txBody>
       </p:sp>
       <p:pic>
         <p:nvPicPr>
-          <p:cNvPr id="4" name="Image 3"/>
+          <p:cNvPr id="5" name="Image 4">
+            <a:extLst>
+              <a:ext uri="{FF2B5EF4-FFF2-40B4-BE49-F238E27FC236}">
+                <a16:creationId xmlns:a16="http://schemas.microsoft.com/office/drawing/2014/main" id="{855A1048-EF23-FFF6-597A-F55D8EBE75A2}"/>
+              </a:ext>
+            </a:extLst>
+          </p:cNvPr>
           <p:cNvPicPr>
             <a:picLocks noChangeAspect="1"/>
           </p:cNvPicPr>
@@ -4048,8 +3895,8 @@
         </p:blipFill>
         <p:spPr>
           <a:xfrm>
-            <a:off x="6528998" y="2852936"/>
-            <a:ext cx="2448272" cy="2378321"/>
+            <a:off x="0" y="1412776"/>
+            <a:ext cx="9144000" cy="5659729"/>
           </a:xfrm>
           <a:prstGeom prst="rect">
             <a:avLst/>
@@ -4059,20 +3906,13 @@
     </p:spTree>
     <p:extLst>
       <p:ext uri="{BB962C8B-B14F-4D97-AF65-F5344CB8AC3E}">
-        <p14:creationId xmlns:p14="http://schemas.microsoft.com/office/powerpoint/2010/main" val="3101526758"/>
+        <p14:creationId xmlns:p14="http://schemas.microsoft.com/office/powerpoint/2010/main" val="1703382201"/>
       </p:ext>
     </p:extLst>
   </p:cSld>
   <p:clrMapOvr>
     <a:masterClrMapping/>
   </p:clrMapOvr>
-  <p:timing>
-    <p:tnLst>
-      <p:par>
-        <p:cTn id="1" dur="indefinite" restart="never" nodeType="tmRoot"/>
-      </p:par>
-    </p:tnLst>
-  </p:timing>
 </p:sld>
 </file>
 
@@ -4095,7 +3935,13 @@
       </p:grpSpPr>
       <p:sp>
         <p:nvSpPr>
-          <p:cNvPr id="2" name="Titre 1"/>
+          <p:cNvPr id="2" name="Titre 1">
+            <a:extLst>
+              <a:ext uri="{FF2B5EF4-FFF2-40B4-BE49-F238E27FC236}">
+                <a16:creationId xmlns:a16="http://schemas.microsoft.com/office/drawing/2014/main" id="{758179BB-07DE-C2D6-3573-7EA4CF98D55E}"/>
+              </a:ext>
+            </a:extLst>
+          </p:cNvPr>
           <p:cNvSpPr>
             <a:spLocks noGrp="1"/>
           </p:cNvSpPr>
@@ -4109,16 +3955,21 @@
           <a:lstStyle/>
           <a:p>
             <a:r>
-              <a:rPr lang="fr-FR" dirty="0" smtClean="0"/>
-              <a:t>MNIST</a:t>
-            </a:r>
-            <a:endParaRPr lang="fr-FR" dirty="0"/>
-          </a:p>
-        </p:txBody>
-      </p:sp>
-      <p:sp>
-        <p:nvSpPr>
-          <p:cNvPr id="3" name="Espace réservé du contenu 2"/>
+              <a:rPr lang="fr-FR" dirty="0"/>
+              <a:t>Accès par lignes</a:t>
+            </a:r>
+          </a:p>
+        </p:txBody>
+      </p:sp>
+      <p:sp>
+        <p:nvSpPr>
+          <p:cNvPr id="3" name="Espace réservé du contenu 2">
+            <a:extLst>
+              <a:ext uri="{FF2B5EF4-FFF2-40B4-BE49-F238E27FC236}">
+                <a16:creationId xmlns:a16="http://schemas.microsoft.com/office/drawing/2014/main" id="{5E6271CF-1EE7-0B8A-3ACE-EC1F4FCD0033}"/>
+              </a:ext>
+            </a:extLst>
+          </p:cNvPr>
           <p:cNvSpPr>
             <a:spLocks noGrp="1"/>
           </p:cNvSpPr>
@@ -4132,81 +3983,42 @@
           <a:lstStyle/>
           <a:p>
             <a:r>
-              <a:rPr lang="fr-FR" dirty="0" smtClean="0"/>
-              <a:t>Banque de données</a:t>
-            </a:r>
+              <a:rPr lang="fr-FR" dirty="0"/>
+              <a:t>Si on connait le numéro de ligne : </a:t>
+            </a:r>
+            <a:r>
+              <a:rPr lang="fr-FR" dirty="0" err="1"/>
+              <a:t>iloc</a:t>
+            </a:r>
+            <a:endParaRPr lang="fr-FR" dirty="0"/>
           </a:p>
           <a:p>
             <a:pPr lvl="1"/>
             <a:r>
-              <a:rPr lang="fr-FR" dirty="0" smtClean="0"/>
-              <a:t>Ici des chiffres manuscrits 24x24 en 16 niveaux de gris</a:t>
-            </a:r>
-          </a:p>
-          <a:p>
-            <a:pPr lvl="1"/>
-            <a:endParaRPr lang="fr-FR" dirty="0"/>
-          </a:p>
-        </p:txBody>
-      </p:sp>
-      <p:pic>
-        <p:nvPicPr>
-          <p:cNvPr id="4098" name="Picture 2" descr="Résultat de recherche d'images pour &quot;mnist&quot;"/>
-          <p:cNvPicPr>
-            <a:picLocks noChangeAspect="1" noChangeArrowheads="1"/>
-          </p:cNvPicPr>
-          <p:nvPr/>
-        </p:nvPicPr>
-        <p:blipFill>
-          <a:blip r:embed="rId2">
-            <a:extLst>
-              <a:ext uri="{28A0092B-C50C-407E-A947-70E740481C1C}">
-                <a14:useLocalDpi xmlns:a14="http://schemas.microsoft.com/office/drawing/2010/main" val="0"/>
-              </a:ext>
-            </a:extLst>
-          </a:blip>
-          <a:srcRect/>
-          <a:stretch>
-            <a:fillRect/>
-          </a:stretch>
-        </p:blipFill>
-        <p:spPr bwMode="auto">
-          <a:xfrm>
-            <a:off x="1169296" y="2780928"/>
-            <a:ext cx="6969149" cy="3430129"/>
-          </a:xfrm>
-          <a:prstGeom prst="rect">
-            <a:avLst/>
-          </a:prstGeom>
-          <a:noFill/>
-          <a:extLst>
-            <a:ext uri="{909E8E84-426E-40DD-AFC4-6F175D3DCCD1}">
-              <a14:hiddenFill xmlns:a14="http://schemas.microsoft.com/office/drawing/2010/main">
-                <a:solidFill>
-                  <a:srgbClr val="FFFFFF"/>
-                </a:solidFill>
-              </a14:hiddenFill>
-            </a:ext>
-          </a:extLst>
-        </p:spPr>
-      </p:pic>
+              <a:rPr lang="fr-FR" dirty="0"/>
+              <a:t>Fonctionne comme </a:t>
+            </a:r>
+            <a:r>
+              <a:rPr lang="fr-FR" dirty="0" err="1"/>
+              <a:t>loc</a:t>
+            </a:r>
+            <a:r>
+              <a:rPr lang="fr-FR" dirty="0"/>
+              <a:t>() mais avec un numéro de ligne</a:t>
+            </a:r>
+          </a:p>
+        </p:txBody>
+      </p:sp>
     </p:spTree>
     <p:extLst>
       <p:ext uri="{BB962C8B-B14F-4D97-AF65-F5344CB8AC3E}">
-        <p14:creationId xmlns:p14="http://schemas.microsoft.com/office/powerpoint/2010/main" val="3666731918"/>
+        <p14:creationId xmlns:p14="http://schemas.microsoft.com/office/powerpoint/2010/main" val="3677338735"/>
       </p:ext>
     </p:extLst>
   </p:cSld>
   <p:clrMapOvr>
     <a:masterClrMapping/>
   </p:clrMapOvr>
-  <p:timing>
-    <p:tnLst>
-      <p:par>
-        <p:cTn id="1" dur="indefinite" restart="never" nodeType="tmRoot"/>
-      </p:par>
-    </p:tnLst>
-  </p:timing>
 </p:sld>
 </file>
 
@@ -4229,7 +4041,13 @@
       </p:grpSpPr>
       <p:sp>
         <p:nvSpPr>
-          <p:cNvPr id="2" name="Titre 1"/>
+          <p:cNvPr id="2" name="Titre 1">
+            <a:extLst>
+              <a:ext uri="{FF2B5EF4-FFF2-40B4-BE49-F238E27FC236}">
+                <a16:creationId xmlns:a16="http://schemas.microsoft.com/office/drawing/2014/main" id="{24956A91-4F66-46CD-A8A1-53898EF00548}"/>
+              </a:ext>
+            </a:extLst>
+          </p:cNvPr>
           <p:cNvSpPr>
             <a:spLocks noGrp="1"/>
           </p:cNvSpPr>
@@ -4243,8 +4061,8 @@
           <a:lstStyle/>
           <a:p>
             <a:r>
-              <a:rPr lang="fr-FR" dirty="0" smtClean="0"/>
-              <a:t>MNIST</a:t>
+              <a:rPr lang="fr-FR" dirty="0" err="1"/>
+              <a:t>Describe</a:t>
             </a:r>
             <a:endParaRPr lang="fr-FR" dirty="0"/>
           </a:p>
@@ -4252,7 +4070,13 @@
       </p:sp>
       <p:sp>
         <p:nvSpPr>
-          <p:cNvPr id="3" name="Espace réservé du contenu 2"/>
+          <p:cNvPr id="3" name="Espace réservé du contenu 2">
+            <a:extLst>
+              <a:ext uri="{FF2B5EF4-FFF2-40B4-BE49-F238E27FC236}">
+                <a16:creationId xmlns:a16="http://schemas.microsoft.com/office/drawing/2014/main" id="{D3BD2517-F64F-4502-9320-C748206CCA83}"/>
+              </a:ext>
+            </a:extLst>
+          </p:cNvPr>
           <p:cNvSpPr>
             <a:spLocks noGrp="1"/>
           </p:cNvSpPr>
@@ -4266,133 +4090,1021 @@
           <a:lstStyle/>
           <a:p>
             <a:r>
-              <a:rPr lang="fr-FR" dirty="0" smtClean="0"/>
-              <a:t>Chargement des données</a:t>
-            </a:r>
-          </a:p>
-          <a:p>
-            <a:pPr lvl="1"/>
-            <a:r>
-              <a:rPr lang="fr-FR" dirty="0" err="1">
-                <a:latin typeface="Courier New" panose="02070309020205020404" pitchFamily="49" charset="0"/>
-                <a:cs typeface="Courier New" panose="02070309020205020404" pitchFamily="49" charset="0"/>
-              </a:rPr>
-              <a:t>mnist</a:t>
-            </a:r>
-            <a:r>
-              <a:rPr lang="fr-FR" dirty="0">
-                <a:latin typeface="Courier New" panose="02070309020205020404" pitchFamily="49" charset="0"/>
-                <a:cs typeface="Courier New" panose="02070309020205020404" pitchFamily="49" charset="0"/>
-              </a:rPr>
-              <a:t> = </a:t>
-            </a:r>
-            <a:r>
-              <a:rPr lang="fr-FR" dirty="0" err="1">
-                <a:latin typeface="Courier New" panose="02070309020205020404" pitchFamily="49" charset="0"/>
-                <a:cs typeface="Courier New" panose="02070309020205020404" pitchFamily="49" charset="0"/>
-              </a:rPr>
-              <a:t>ds.fetch_mldata</a:t>
-            </a:r>
-            <a:r>
-              <a:rPr lang="fr-FR" dirty="0">
-                <a:latin typeface="Courier New" panose="02070309020205020404" pitchFamily="49" charset="0"/>
-                <a:cs typeface="Courier New" panose="02070309020205020404" pitchFamily="49" charset="0"/>
-              </a:rPr>
-              <a:t>('MNIST original',</a:t>
-            </a:r>
-            <a:r>
-              <a:rPr lang="fr-FR" dirty="0" err="1">
-                <a:latin typeface="Courier New" panose="02070309020205020404" pitchFamily="49" charset="0"/>
-                <a:cs typeface="Courier New" panose="02070309020205020404" pitchFamily="49" charset="0"/>
-              </a:rPr>
-              <a:t>data_home</a:t>
-            </a:r>
-            <a:r>
-              <a:rPr lang="fr-FR" dirty="0">
-                <a:latin typeface="Courier New" panose="02070309020205020404" pitchFamily="49" charset="0"/>
-                <a:cs typeface="Courier New" panose="02070309020205020404" pitchFamily="49" charset="0"/>
-              </a:rPr>
-              <a:t>='./</a:t>
-            </a:r>
-            <a:r>
-              <a:rPr lang="fr-FR" dirty="0" err="1">
-                <a:latin typeface="Courier New" panose="02070309020205020404" pitchFamily="49" charset="0"/>
-                <a:cs typeface="Courier New" panose="02070309020205020404" pitchFamily="49" charset="0"/>
-              </a:rPr>
-              <a:t>mnist</a:t>
-            </a:r>
-            <a:r>
-              <a:rPr lang="fr-FR" dirty="0" smtClean="0">
-                <a:latin typeface="Courier New" panose="02070309020205020404" pitchFamily="49" charset="0"/>
-                <a:cs typeface="Courier New" panose="02070309020205020404" pitchFamily="49" charset="0"/>
-              </a:rPr>
-              <a:t>/')</a:t>
-            </a:r>
-          </a:p>
-          <a:p>
-            <a:pPr lvl="1"/>
-            <a:r>
-              <a:rPr lang="fr-FR" dirty="0" err="1" smtClean="0">
-                <a:latin typeface="Courier New" panose="02070309020205020404" pitchFamily="49" charset="0"/>
-                <a:cs typeface="Courier New" panose="02070309020205020404" pitchFamily="49" charset="0"/>
-              </a:rPr>
-              <a:t>mnist.data</a:t>
-            </a:r>
-            <a:r>
-              <a:rPr lang="fr-FR" dirty="0" smtClean="0">
-                <a:latin typeface="Courier New" panose="02070309020205020404" pitchFamily="49" charset="0"/>
-                <a:cs typeface="Courier New" panose="02070309020205020404" pitchFamily="49" charset="0"/>
-              </a:rPr>
-              <a:t> contient les images (70000)</a:t>
-            </a:r>
-          </a:p>
-          <a:p>
-            <a:pPr lvl="1"/>
-            <a:r>
-              <a:rPr lang="fr-FR" dirty="0" err="1">
-                <a:latin typeface="Courier New" panose="02070309020205020404" pitchFamily="49" charset="0"/>
-                <a:cs typeface="Courier New" panose="02070309020205020404" pitchFamily="49" charset="0"/>
-              </a:rPr>
-              <a:t>m</a:t>
-            </a:r>
-            <a:r>
-              <a:rPr lang="fr-FR" dirty="0" err="1" smtClean="0">
-                <a:latin typeface="Courier New" panose="02070309020205020404" pitchFamily="49" charset="0"/>
-                <a:cs typeface="Courier New" panose="02070309020205020404" pitchFamily="49" charset="0"/>
-              </a:rPr>
-              <a:t>nist.target</a:t>
-            </a:r>
-            <a:r>
-              <a:rPr lang="fr-FR" dirty="0" smtClean="0">
-                <a:latin typeface="Courier New" panose="02070309020205020404" pitchFamily="49" charset="0"/>
-                <a:cs typeface="Courier New" panose="02070309020205020404" pitchFamily="49" charset="0"/>
-              </a:rPr>
-              <a:t> contient les chiffres</a:t>
-            </a:r>
-          </a:p>
-          <a:p>
-            <a:pPr lvl="1"/>
+              <a:rPr lang="fr-FR" dirty="0" err="1"/>
+              <a:t>Describe</a:t>
+            </a:r>
+            <a:r>
+              <a:rPr lang="fr-FR" dirty="0"/>
+              <a:t> permet de calculer les données de bases de chaque colonne</a:t>
+            </a:r>
+          </a:p>
+          <a:p>
             <a:endParaRPr lang="fr-FR" dirty="0"/>
           </a:p>
         </p:txBody>
       </p:sp>
+      <p:pic>
+        <p:nvPicPr>
+          <p:cNvPr id="5" name="Image 4">
+            <a:extLst>
+              <a:ext uri="{FF2B5EF4-FFF2-40B4-BE49-F238E27FC236}">
+                <a16:creationId xmlns:a16="http://schemas.microsoft.com/office/drawing/2014/main" id="{4E8BBD6F-ED22-4F1F-B0DB-F1243EDC1160}"/>
+              </a:ext>
+            </a:extLst>
+          </p:cNvPr>
+          <p:cNvPicPr>
+            <a:picLocks noChangeAspect="1"/>
+          </p:cNvPicPr>
+          <p:nvPr/>
+        </p:nvPicPr>
+        <p:blipFill>
+          <a:blip r:embed="rId2"/>
+          <a:stretch>
+            <a:fillRect/>
+          </a:stretch>
+        </p:blipFill>
+        <p:spPr>
+          <a:xfrm>
+            <a:off x="852487" y="3058309"/>
+            <a:ext cx="7439025" cy="2371725"/>
+          </a:xfrm>
+          <a:prstGeom prst="rect">
+            <a:avLst/>
+          </a:prstGeom>
+        </p:spPr>
+      </p:pic>
     </p:spTree>
     <p:extLst>
       <p:ext uri="{BB962C8B-B14F-4D97-AF65-F5344CB8AC3E}">
-        <p14:creationId xmlns:p14="http://schemas.microsoft.com/office/powerpoint/2010/main" val="3227662392"/>
+        <p14:creationId xmlns:p14="http://schemas.microsoft.com/office/powerpoint/2010/main" val="325946070"/>
       </p:ext>
     </p:extLst>
   </p:cSld>
   <p:clrMapOvr>
     <a:masterClrMapping/>
   </p:clrMapOvr>
-  <p:timing>
-    <p:tnLst>
-      <p:par>
-        <p:cTn id="1" dur="indefinite" restart="never" nodeType="tmRoot"/>
-      </p:par>
-    </p:tnLst>
-  </p:timing>
+</p:sld>
+</file>
+
+<file path=ppt/slides/slide13.xml><?xml version="1.0" encoding="utf-8"?>
+<p:sld xmlns:a="http://schemas.openxmlformats.org/drawingml/2006/main" xmlns:r="http://schemas.openxmlformats.org/officeDocument/2006/relationships" xmlns:p="http://schemas.openxmlformats.org/presentationml/2006/main">
+  <p:cSld>
+    <p:spTree>
+      <p:nvGrpSpPr>
+        <p:cNvPr id="1" name=""/>
+        <p:cNvGrpSpPr/>
+        <p:nvPr/>
+      </p:nvGrpSpPr>
+      <p:grpSpPr>
+        <a:xfrm>
+          <a:off x="0" y="0"/>
+          <a:ext cx="0" cy="0"/>
+          <a:chOff x="0" y="0"/>
+          <a:chExt cx="0" cy="0"/>
+        </a:xfrm>
+      </p:grpSpPr>
+      <p:sp>
+        <p:nvSpPr>
+          <p:cNvPr id="2" name="Titre 1">
+            <a:extLst>
+              <a:ext uri="{FF2B5EF4-FFF2-40B4-BE49-F238E27FC236}">
+                <a16:creationId xmlns:a16="http://schemas.microsoft.com/office/drawing/2014/main" id="{36EA8E48-E60D-3F2F-8762-A6E3EBEAC652}"/>
+              </a:ext>
+            </a:extLst>
+          </p:cNvPr>
+          <p:cNvSpPr>
+            <a:spLocks noGrp="1"/>
+          </p:cNvSpPr>
+          <p:nvPr>
+            <p:ph type="title"/>
+          </p:nvPr>
+        </p:nvSpPr>
+        <p:spPr/>
+        <p:txBody>
+          <a:bodyPr/>
+          <a:lstStyle/>
+          <a:p>
+            <a:r>
+              <a:rPr lang="fr-FR" dirty="0"/>
+              <a:t>Les séries</a:t>
+            </a:r>
+          </a:p>
+        </p:txBody>
+      </p:sp>
+      <p:sp>
+        <p:nvSpPr>
+          <p:cNvPr id="3" name="Espace réservé du contenu 2">
+            <a:extLst>
+              <a:ext uri="{FF2B5EF4-FFF2-40B4-BE49-F238E27FC236}">
+                <a16:creationId xmlns:a16="http://schemas.microsoft.com/office/drawing/2014/main" id="{489AB15B-3DC6-E64F-94BF-FBFD4AA62C39}"/>
+              </a:ext>
+            </a:extLst>
+          </p:cNvPr>
+          <p:cNvSpPr>
+            <a:spLocks noGrp="1"/>
+          </p:cNvSpPr>
+          <p:nvPr>
+            <p:ph idx="1"/>
+          </p:nvPr>
+        </p:nvSpPr>
+        <p:spPr/>
+        <p:txBody>
+          <a:bodyPr/>
+          <a:lstStyle/>
+          <a:p>
+            <a:r>
+              <a:rPr lang="fr-FR" dirty="0"/>
+              <a:t>Il s'agit d'une colonne d'un </a:t>
+            </a:r>
+            <a:r>
+              <a:rPr lang="fr-FR" dirty="0" err="1"/>
+              <a:t>Dataframe</a:t>
+            </a:r>
+            <a:endParaRPr lang="fr-FR" dirty="0"/>
+          </a:p>
+          <a:p>
+            <a:r>
+              <a:rPr lang="fr-FR" dirty="0"/>
+              <a:t>Peut être créé par programmation</a:t>
+            </a:r>
+          </a:p>
+          <a:p>
+            <a:endParaRPr lang="fr-FR" dirty="0"/>
+          </a:p>
+        </p:txBody>
+      </p:sp>
+      <p:pic>
+        <p:nvPicPr>
+          <p:cNvPr id="5" name="Image 4">
+            <a:extLst>
+              <a:ext uri="{FF2B5EF4-FFF2-40B4-BE49-F238E27FC236}">
+                <a16:creationId xmlns:a16="http://schemas.microsoft.com/office/drawing/2014/main" id="{52CE7A8B-155D-DBB4-3509-F7C298E54C26}"/>
+              </a:ext>
+            </a:extLst>
+          </p:cNvPr>
+          <p:cNvPicPr>
+            <a:picLocks noChangeAspect="1"/>
+          </p:cNvPicPr>
+          <p:nvPr/>
+        </p:nvPicPr>
+        <p:blipFill>
+          <a:blip r:embed="rId2"/>
+          <a:stretch>
+            <a:fillRect/>
+          </a:stretch>
+        </p:blipFill>
+        <p:spPr>
+          <a:xfrm>
+            <a:off x="551952" y="3429000"/>
+            <a:ext cx="8021169" cy="1752845"/>
+          </a:xfrm>
+          <a:prstGeom prst="rect">
+            <a:avLst/>
+          </a:prstGeom>
+        </p:spPr>
+      </p:pic>
+    </p:spTree>
+    <p:extLst>
+      <p:ext uri="{BB962C8B-B14F-4D97-AF65-F5344CB8AC3E}">
+        <p14:creationId xmlns:p14="http://schemas.microsoft.com/office/powerpoint/2010/main" val="2671891717"/>
+      </p:ext>
+    </p:extLst>
+  </p:cSld>
+  <p:clrMapOvr>
+    <a:masterClrMapping/>
+  </p:clrMapOvr>
+</p:sld>
+</file>
+
+<file path=ppt/slides/slide14.xml><?xml version="1.0" encoding="utf-8"?>
+<p:sld xmlns:a="http://schemas.openxmlformats.org/drawingml/2006/main" xmlns:r="http://schemas.openxmlformats.org/officeDocument/2006/relationships" xmlns:p="http://schemas.openxmlformats.org/presentationml/2006/main">
+  <p:cSld>
+    <p:spTree>
+      <p:nvGrpSpPr>
+        <p:cNvPr id="1" name=""/>
+        <p:cNvGrpSpPr/>
+        <p:nvPr/>
+      </p:nvGrpSpPr>
+      <p:grpSpPr>
+        <a:xfrm>
+          <a:off x="0" y="0"/>
+          <a:ext cx="0" cy="0"/>
+          <a:chOff x="0" y="0"/>
+          <a:chExt cx="0" cy="0"/>
+        </a:xfrm>
+      </p:grpSpPr>
+      <p:sp>
+        <p:nvSpPr>
+          <p:cNvPr id="2" name="Titre 1">
+            <a:extLst>
+              <a:ext uri="{FF2B5EF4-FFF2-40B4-BE49-F238E27FC236}">
+                <a16:creationId xmlns:a16="http://schemas.microsoft.com/office/drawing/2014/main" id="{EBEB2620-6734-CB39-E8E3-D49A6E281E1E}"/>
+              </a:ext>
+            </a:extLst>
+          </p:cNvPr>
+          <p:cNvSpPr>
+            <a:spLocks noGrp="1"/>
+          </p:cNvSpPr>
+          <p:nvPr>
+            <p:ph type="title"/>
+          </p:nvPr>
+        </p:nvSpPr>
+        <p:spPr/>
+        <p:txBody>
+          <a:bodyPr/>
+          <a:lstStyle/>
+          <a:p>
+            <a:r>
+              <a:rPr lang="fr-FR" dirty="0"/>
+              <a:t>Filtrage</a:t>
+            </a:r>
+          </a:p>
+        </p:txBody>
+      </p:sp>
+      <p:sp>
+        <p:nvSpPr>
+          <p:cNvPr id="3" name="Espace réservé du contenu 2">
+            <a:extLst>
+              <a:ext uri="{FF2B5EF4-FFF2-40B4-BE49-F238E27FC236}">
+                <a16:creationId xmlns:a16="http://schemas.microsoft.com/office/drawing/2014/main" id="{59AE4EF6-33CC-DAED-D1E2-05F55B2AEE1A}"/>
+              </a:ext>
+            </a:extLst>
+          </p:cNvPr>
+          <p:cNvSpPr>
+            <a:spLocks noGrp="1"/>
+          </p:cNvSpPr>
+          <p:nvPr>
+            <p:ph idx="1"/>
+          </p:nvPr>
+        </p:nvSpPr>
+        <p:spPr/>
+        <p:txBody>
+          <a:bodyPr/>
+          <a:lstStyle/>
+          <a:p>
+            <a:r>
+              <a:rPr lang="fr-FR" dirty="0"/>
+              <a:t>L'opérateur [] permet de filtrer les lignes</a:t>
+            </a:r>
+          </a:p>
+        </p:txBody>
+      </p:sp>
+      <p:pic>
+        <p:nvPicPr>
+          <p:cNvPr id="5" name="Image 4">
+            <a:extLst>
+              <a:ext uri="{FF2B5EF4-FFF2-40B4-BE49-F238E27FC236}">
+                <a16:creationId xmlns:a16="http://schemas.microsoft.com/office/drawing/2014/main" id="{A22516B7-7F1F-1644-D761-48C0CD199AE2}"/>
+              </a:ext>
+            </a:extLst>
+          </p:cNvPr>
+          <p:cNvPicPr>
+            <a:picLocks noChangeAspect="1"/>
+          </p:cNvPicPr>
+          <p:nvPr/>
+        </p:nvPicPr>
+        <p:blipFill>
+          <a:blip r:embed="rId2"/>
+          <a:stretch>
+            <a:fillRect/>
+          </a:stretch>
+        </p:blipFill>
+        <p:spPr>
+          <a:xfrm>
+            <a:off x="0" y="1988840"/>
+            <a:ext cx="9144000" cy="4077381"/>
+          </a:xfrm>
+          <a:prstGeom prst="rect">
+            <a:avLst/>
+          </a:prstGeom>
+        </p:spPr>
+      </p:pic>
+    </p:spTree>
+    <p:extLst>
+      <p:ext uri="{BB962C8B-B14F-4D97-AF65-F5344CB8AC3E}">
+        <p14:creationId xmlns:p14="http://schemas.microsoft.com/office/powerpoint/2010/main" val="3661265508"/>
+      </p:ext>
+    </p:extLst>
+  </p:cSld>
+  <p:clrMapOvr>
+    <a:masterClrMapping/>
+  </p:clrMapOvr>
+</p:sld>
+</file>
+
+<file path=ppt/slides/slide15.xml><?xml version="1.0" encoding="utf-8"?>
+<p:sld xmlns:a="http://schemas.openxmlformats.org/drawingml/2006/main" xmlns:r="http://schemas.openxmlformats.org/officeDocument/2006/relationships" xmlns:p="http://schemas.openxmlformats.org/presentationml/2006/main">
+  <p:cSld>
+    <p:spTree>
+      <p:nvGrpSpPr>
+        <p:cNvPr id="1" name=""/>
+        <p:cNvGrpSpPr/>
+        <p:nvPr/>
+      </p:nvGrpSpPr>
+      <p:grpSpPr>
+        <a:xfrm>
+          <a:off x="0" y="0"/>
+          <a:ext cx="0" cy="0"/>
+          <a:chOff x="0" y="0"/>
+          <a:chExt cx="0" cy="0"/>
+        </a:xfrm>
+      </p:grpSpPr>
+      <p:sp>
+        <p:nvSpPr>
+          <p:cNvPr id="2" name="Titre 1">
+            <a:extLst>
+              <a:ext uri="{FF2B5EF4-FFF2-40B4-BE49-F238E27FC236}">
+                <a16:creationId xmlns:a16="http://schemas.microsoft.com/office/drawing/2014/main" id="{AC70E609-6F2C-72CC-CBC9-1FA46EBEFAD7}"/>
+              </a:ext>
+            </a:extLst>
+          </p:cNvPr>
+          <p:cNvSpPr>
+            <a:spLocks noGrp="1"/>
+          </p:cNvSpPr>
+          <p:nvPr>
+            <p:ph type="title"/>
+          </p:nvPr>
+        </p:nvSpPr>
+        <p:spPr/>
+        <p:txBody>
+          <a:bodyPr/>
+          <a:lstStyle/>
+          <a:p>
+            <a:r>
+              <a:rPr lang="fr-FR" dirty="0"/>
+              <a:t>Les masques</a:t>
+            </a:r>
+          </a:p>
+        </p:txBody>
+      </p:sp>
+      <p:sp>
+        <p:nvSpPr>
+          <p:cNvPr id="3" name="Espace réservé du contenu 2">
+            <a:extLst>
+              <a:ext uri="{FF2B5EF4-FFF2-40B4-BE49-F238E27FC236}">
+                <a16:creationId xmlns:a16="http://schemas.microsoft.com/office/drawing/2014/main" id="{A23549B5-69ED-87E8-EC1D-D81012B1CC5F}"/>
+              </a:ext>
+            </a:extLst>
+          </p:cNvPr>
+          <p:cNvSpPr>
+            <a:spLocks noGrp="1"/>
+          </p:cNvSpPr>
+          <p:nvPr>
+            <p:ph idx="1"/>
+          </p:nvPr>
+        </p:nvSpPr>
+        <p:spPr/>
+        <p:txBody>
+          <a:bodyPr/>
+          <a:lstStyle/>
+          <a:p>
+            <a:r>
+              <a:rPr lang="fr-FR" dirty="0"/>
+              <a:t>Il est possible de stocker la clause de filtre dans une variable masque</a:t>
+            </a:r>
+          </a:p>
+          <a:p>
+            <a:pPr lvl="1"/>
+            <a:r>
+              <a:rPr lang="fr-FR" dirty="0"/>
+              <a:t>Il s'agit d'n tableau de </a:t>
+            </a:r>
+            <a:r>
+              <a:rPr lang="fr-FR" dirty="0" err="1"/>
+              <a:t>bool</a:t>
+            </a:r>
+            <a:endParaRPr lang="fr-FR" dirty="0"/>
+          </a:p>
+          <a:p>
+            <a:pPr lvl="1"/>
+            <a:endParaRPr lang="fr-FR" dirty="0"/>
+          </a:p>
+        </p:txBody>
+      </p:sp>
+      <p:pic>
+        <p:nvPicPr>
+          <p:cNvPr id="5" name="Image 4">
+            <a:extLst>
+              <a:ext uri="{FF2B5EF4-FFF2-40B4-BE49-F238E27FC236}">
+                <a16:creationId xmlns:a16="http://schemas.microsoft.com/office/drawing/2014/main" id="{2236064A-D6D7-FA9A-D9E2-6075CCEC4A3B}"/>
+              </a:ext>
+            </a:extLst>
+          </p:cNvPr>
+          <p:cNvPicPr>
+            <a:picLocks noChangeAspect="1"/>
+          </p:cNvPicPr>
+          <p:nvPr/>
+        </p:nvPicPr>
+        <p:blipFill>
+          <a:blip r:embed="rId2"/>
+          <a:stretch>
+            <a:fillRect/>
+          </a:stretch>
+        </p:blipFill>
+        <p:spPr>
+          <a:xfrm>
+            <a:off x="1028205" y="2933631"/>
+            <a:ext cx="7087589" cy="990738"/>
+          </a:xfrm>
+          <a:prstGeom prst="rect">
+            <a:avLst/>
+          </a:prstGeom>
+        </p:spPr>
+      </p:pic>
+    </p:spTree>
+    <p:extLst>
+      <p:ext uri="{BB962C8B-B14F-4D97-AF65-F5344CB8AC3E}">
+        <p14:creationId xmlns:p14="http://schemas.microsoft.com/office/powerpoint/2010/main" val="3233156565"/>
+      </p:ext>
+    </p:extLst>
+  </p:cSld>
+  <p:clrMapOvr>
+    <a:masterClrMapping/>
+  </p:clrMapOvr>
+</p:sld>
+</file>
+
+<file path=ppt/slides/slide16.xml><?xml version="1.0" encoding="utf-8"?>
+<p:sld xmlns:a="http://schemas.openxmlformats.org/drawingml/2006/main" xmlns:r="http://schemas.openxmlformats.org/officeDocument/2006/relationships" xmlns:p="http://schemas.openxmlformats.org/presentationml/2006/main">
+  <p:cSld>
+    <p:spTree>
+      <p:nvGrpSpPr>
+        <p:cNvPr id="1" name=""/>
+        <p:cNvGrpSpPr/>
+        <p:nvPr/>
+      </p:nvGrpSpPr>
+      <p:grpSpPr>
+        <a:xfrm>
+          <a:off x="0" y="0"/>
+          <a:ext cx="0" cy="0"/>
+          <a:chOff x="0" y="0"/>
+          <a:chExt cx="0" cy="0"/>
+        </a:xfrm>
+      </p:grpSpPr>
+      <p:sp>
+        <p:nvSpPr>
+          <p:cNvPr id="2" name="Titre 1"/>
+          <p:cNvSpPr>
+            <a:spLocks noGrp="1"/>
+          </p:cNvSpPr>
+          <p:nvPr>
+            <p:ph type="title"/>
+          </p:nvPr>
+        </p:nvSpPr>
+        <p:spPr/>
+        <p:txBody>
+          <a:bodyPr/>
+          <a:lstStyle/>
+          <a:p>
+            <a:r>
+              <a:rPr lang="fr-FR" dirty="0"/>
+              <a:t>Filtrage</a:t>
+            </a:r>
+          </a:p>
+        </p:txBody>
+      </p:sp>
+      <p:sp>
+        <p:nvSpPr>
+          <p:cNvPr id="3" name="Espace réservé du contenu 2"/>
+          <p:cNvSpPr>
+            <a:spLocks noGrp="1"/>
+          </p:cNvSpPr>
+          <p:nvPr>
+            <p:ph idx="1"/>
+          </p:nvPr>
+        </p:nvSpPr>
+        <p:spPr/>
+        <p:txBody>
+          <a:bodyPr/>
+          <a:lstStyle/>
+          <a:p>
+            <a:r>
+              <a:rPr lang="fr-FR" dirty="0"/>
+              <a:t>Filtrage du </a:t>
+            </a:r>
+            <a:r>
+              <a:rPr lang="fr-FR" dirty="0" err="1"/>
+              <a:t>DataFrame</a:t>
+            </a:r>
+            <a:endParaRPr lang="fr-FR" dirty="0"/>
+          </a:p>
+          <a:p>
+            <a:pPr lvl="1"/>
+            <a:r>
+              <a:rPr lang="fr-FR" dirty="0" err="1"/>
+              <a:t>Dataframe</a:t>
+            </a:r>
+            <a:r>
+              <a:rPr lang="fr-FR" dirty="0"/>
+              <a:t> = </a:t>
+            </a:r>
+            <a:r>
+              <a:rPr lang="fr-FR" dirty="0" err="1"/>
+              <a:t>dataframe</a:t>
+            </a:r>
+            <a:r>
+              <a:rPr lang="fr-FR" dirty="0"/>
+              <a:t>[</a:t>
+            </a:r>
+            <a:r>
+              <a:rPr lang="fr-FR" dirty="0" err="1"/>
+              <a:t>dataframe</a:t>
+            </a:r>
+            <a:r>
+              <a:rPr lang="fr-FR" dirty="0"/>
+              <a:t>["surface"] &lt; 200]</a:t>
+            </a:r>
+          </a:p>
+          <a:p>
+            <a:r>
+              <a:rPr lang="fr-FR" dirty="0"/>
+              <a:t>Enlever une dimension</a:t>
+            </a:r>
+          </a:p>
+          <a:p>
+            <a:pPr lvl="1"/>
+            <a:r>
+              <a:rPr lang="fr-FR" dirty="0" err="1"/>
+              <a:t>Dataframe.drop</a:t>
+            </a:r>
+            <a:r>
+              <a:rPr lang="fr-FR" dirty="0"/>
+              <a:t>(‘Colonne’, axis=1)</a:t>
+            </a:r>
+          </a:p>
+          <a:p>
+            <a:r>
+              <a:rPr lang="fr-FR" dirty="0"/>
+              <a:t>Ajouter une colonne</a:t>
+            </a:r>
+          </a:p>
+          <a:p>
+            <a:pPr lvl="1"/>
+            <a:r>
+              <a:rPr lang="fr-FR" dirty="0" err="1"/>
+              <a:t>Dataframe</a:t>
+            </a:r>
+            <a:r>
+              <a:rPr lang="fr-FR" dirty="0"/>
+              <a:t>["Colonne"] = </a:t>
+            </a:r>
+            <a:r>
+              <a:rPr lang="fr-FR" dirty="0" err="1"/>
+              <a:t>series</a:t>
+            </a:r>
+            <a:endParaRPr lang="fr-FR" dirty="0"/>
+          </a:p>
+          <a:p>
+            <a:endParaRPr lang="fr-FR" dirty="0"/>
+          </a:p>
+        </p:txBody>
+      </p:sp>
+    </p:spTree>
+    <p:extLst>
+      <p:ext uri="{BB962C8B-B14F-4D97-AF65-F5344CB8AC3E}">
+        <p14:creationId xmlns:p14="http://schemas.microsoft.com/office/powerpoint/2010/main" val="3332384904"/>
+      </p:ext>
+    </p:extLst>
+  </p:cSld>
+  <p:clrMapOvr>
+    <a:masterClrMapping/>
+  </p:clrMapOvr>
+</p:sld>
+</file>
+
+<file path=ppt/slides/slide17.xml><?xml version="1.0" encoding="utf-8"?>
+<p:sld xmlns:a="http://schemas.openxmlformats.org/drawingml/2006/main" xmlns:r="http://schemas.openxmlformats.org/officeDocument/2006/relationships" xmlns:p="http://schemas.openxmlformats.org/presentationml/2006/main">
+  <p:cSld>
+    <p:spTree>
+      <p:nvGrpSpPr>
+        <p:cNvPr id="1" name=""/>
+        <p:cNvGrpSpPr/>
+        <p:nvPr/>
+      </p:nvGrpSpPr>
+      <p:grpSpPr>
+        <a:xfrm>
+          <a:off x="0" y="0"/>
+          <a:ext cx="0" cy="0"/>
+          <a:chOff x="0" y="0"/>
+          <a:chExt cx="0" cy="0"/>
+        </a:xfrm>
+      </p:grpSpPr>
+      <p:sp>
+        <p:nvSpPr>
+          <p:cNvPr id="2" name="Titre 1"/>
+          <p:cNvSpPr>
+            <a:spLocks noGrp="1"/>
+          </p:cNvSpPr>
+          <p:nvPr>
+            <p:ph type="title"/>
+          </p:nvPr>
+        </p:nvSpPr>
+        <p:spPr/>
+        <p:txBody>
+          <a:bodyPr/>
+          <a:lstStyle/>
+          <a:p>
+            <a:r>
+              <a:rPr lang="fr-FR" dirty="0"/>
+              <a:t>Filtrage</a:t>
+            </a:r>
+          </a:p>
+        </p:txBody>
+      </p:sp>
+      <p:sp>
+        <p:nvSpPr>
+          <p:cNvPr id="3" name="Espace réservé du contenu 2"/>
+          <p:cNvSpPr>
+            <a:spLocks noGrp="1"/>
+          </p:cNvSpPr>
+          <p:nvPr>
+            <p:ph idx="1"/>
+          </p:nvPr>
+        </p:nvSpPr>
+        <p:spPr/>
+        <p:txBody>
+          <a:bodyPr/>
+          <a:lstStyle/>
+          <a:p>
+            <a:r>
+              <a:rPr lang="fr-FR" dirty="0"/>
+              <a:t>Chargement des na values</a:t>
+            </a:r>
+          </a:p>
+          <a:p>
+            <a:pPr lvl="1"/>
+            <a:r>
+              <a:rPr lang="fr-FR" dirty="0"/>
+              <a:t>Attribut </a:t>
+            </a:r>
+            <a:r>
+              <a:rPr lang="fr-FR" dirty="0" err="1"/>
+              <a:t>na_values</a:t>
+            </a:r>
+            <a:r>
+              <a:rPr lang="fr-FR" dirty="0"/>
+              <a:t>="." dans </a:t>
+            </a:r>
+            <a:r>
+              <a:rPr lang="fr-FR" dirty="0" err="1"/>
+              <a:t>read_csv</a:t>
+            </a:r>
+            <a:endParaRPr lang="fr-FR" dirty="0"/>
+          </a:p>
+          <a:p>
+            <a:r>
+              <a:rPr lang="fr-FR" dirty="0"/>
+              <a:t>Remplacer les champs nuls</a:t>
+            </a:r>
+          </a:p>
+          <a:p>
+            <a:pPr lvl="1"/>
+            <a:r>
+              <a:rPr lang="fr-FR" dirty="0" err="1"/>
+              <a:t>dataframe.codePostal</a:t>
+            </a:r>
+            <a:r>
+              <a:rPr lang="fr-FR" dirty="0"/>
+              <a:t> = </a:t>
+            </a:r>
+            <a:r>
+              <a:rPr lang="fr-FR" dirty="0" err="1"/>
+              <a:t>dataframe.codePostal.fillna</a:t>
+            </a:r>
+            <a:r>
+              <a:rPr lang="fr-FR" dirty="0"/>
+              <a:t>('38000')</a:t>
+            </a:r>
+          </a:p>
+          <a:p>
+            <a:r>
+              <a:rPr lang="fr-FR" dirty="0"/>
+              <a:t>Effacer les lignes nuls</a:t>
+            </a:r>
+          </a:p>
+          <a:p>
+            <a:pPr lvl="1"/>
+            <a:r>
+              <a:rPr lang="fr-FR" dirty="0" err="1"/>
+              <a:t>dropna</a:t>
+            </a:r>
+            <a:r>
+              <a:rPr lang="fr-FR" dirty="0"/>
+              <a:t>()</a:t>
+            </a:r>
+          </a:p>
+          <a:p>
+            <a:r>
+              <a:rPr lang="fr-FR" dirty="0"/>
+              <a:t>Changement de valeurs</a:t>
+            </a:r>
+          </a:p>
+          <a:p>
+            <a:pPr lvl="1"/>
+            <a:r>
+              <a:rPr lang="fr-FR" dirty="0" err="1"/>
+              <a:t>dataframe.surface</a:t>
+            </a:r>
+            <a:r>
+              <a:rPr lang="fr-FR" dirty="0"/>
+              <a:t> = </a:t>
+            </a:r>
+            <a:r>
+              <a:rPr lang="fr-FR" dirty="0" err="1"/>
+              <a:t>dataframe</a:t>
+            </a:r>
+            <a:r>
+              <a:rPr lang="fr-FR" dirty="0"/>
+              <a:t>[‘surface'].replace(',', '.',</a:t>
+            </a:r>
+            <a:r>
+              <a:rPr lang="fr-FR" dirty="0" err="1"/>
+              <a:t>regex</a:t>
+            </a:r>
+            <a:r>
+              <a:rPr lang="fr-FR" dirty="0"/>
+              <a:t>=</a:t>
+            </a:r>
+            <a:r>
+              <a:rPr lang="fr-FR" dirty="0" err="1"/>
+              <a:t>True</a:t>
+            </a:r>
+            <a:r>
+              <a:rPr lang="fr-FR" dirty="0"/>
+              <a:t>).</a:t>
+            </a:r>
+            <a:r>
+              <a:rPr lang="fr-FR" dirty="0" err="1"/>
+              <a:t>astype</a:t>
+            </a:r>
+            <a:r>
+              <a:rPr lang="fr-FR" dirty="0"/>
+              <a:t>(</a:t>
+            </a:r>
+            <a:r>
+              <a:rPr lang="fr-FR" dirty="0" err="1"/>
+              <a:t>float</a:t>
+            </a:r>
+            <a:r>
+              <a:rPr lang="fr-FR" dirty="0"/>
+              <a:t>)</a:t>
+            </a:r>
+          </a:p>
+          <a:p>
+            <a:endParaRPr lang="fr-FR" dirty="0"/>
+          </a:p>
+        </p:txBody>
+      </p:sp>
+    </p:spTree>
+    <p:extLst>
+      <p:ext uri="{BB962C8B-B14F-4D97-AF65-F5344CB8AC3E}">
+        <p14:creationId xmlns:p14="http://schemas.microsoft.com/office/powerpoint/2010/main" val="2942252075"/>
+      </p:ext>
+    </p:extLst>
+  </p:cSld>
+  <p:clrMapOvr>
+    <a:masterClrMapping/>
+  </p:clrMapOvr>
+</p:sld>
+</file>
+
+<file path=ppt/slides/slide18.xml><?xml version="1.0" encoding="utf-8"?>
+<p:sld xmlns:a="http://schemas.openxmlformats.org/drawingml/2006/main" xmlns:r="http://schemas.openxmlformats.org/officeDocument/2006/relationships" xmlns:p="http://schemas.openxmlformats.org/presentationml/2006/main">
+  <p:cSld>
+    <p:spTree>
+      <p:nvGrpSpPr>
+        <p:cNvPr id="1" name=""/>
+        <p:cNvGrpSpPr/>
+        <p:nvPr/>
+      </p:nvGrpSpPr>
+      <p:grpSpPr>
+        <a:xfrm>
+          <a:off x="0" y="0"/>
+          <a:ext cx="0" cy="0"/>
+          <a:chOff x="0" y="0"/>
+          <a:chExt cx="0" cy="0"/>
+        </a:xfrm>
+      </p:grpSpPr>
+      <p:sp>
+        <p:nvSpPr>
+          <p:cNvPr id="2" name="Titre 1">
+            <a:extLst>
+              <a:ext uri="{FF2B5EF4-FFF2-40B4-BE49-F238E27FC236}">
+                <a16:creationId xmlns:a16="http://schemas.microsoft.com/office/drawing/2014/main" id="{AA09BC61-C093-2D88-B76D-C5EE4D49CB52}"/>
+              </a:ext>
+            </a:extLst>
+          </p:cNvPr>
+          <p:cNvSpPr>
+            <a:spLocks noGrp="1"/>
+          </p:cNvSpPr>
+          <p:nvPr>
+            <p:ph type="title"/>
+          </p:nvPr>
+        </p:nvSpPr>
+        <p:spPr/>
+        <p:txBody>
+          <a:bodyPr/>
+          <a:lstStyle/>
+          <a:p>
+            <a:r>
+              <a:rPr lang="fr-FR" dirty="0"/>
+              <a:t>Exemple</a:t>
+            </a:r>
+          </a:p>
+        </p:txBody>
+      </p:sp>
+      <p:sp>
+        <p:nvSpPr>
+          <p:cNvPr id="3" name="Espace réservé du contenu 2">
+            <a:extLst>
+              <a:ext uri="{FF2B5EF4-FFF2-40B4-BE49-F238E27FC236}">
+                <a16:creationId xmlns:a16="http://schemas.microsoft.com/office/drawing/2014/main" id="{CDC966DC-89F9-31C5-C605-5D6308477F6D}"/>
+              </a:ext>
+            </a:extLst>
+          </p:cNvPr>
+          <p:cNvSpPr>
+            <a:spLocks noGrp="1"/>
+          </p:cNvSpPr>
+          <p:nvPr>
+            <p:ph idx="1"/>
+          </p:nvPr>
+        </p:nvSpPr>
+        <p:spPr/>
+        <p:txBody>
+          <a:bodyPr/>
+          <a:lstStyle/>
+          <a:p>
+            <a:r>
+              <a:rPr lang="fr-FR" dirty="0"/>
+              <a:t>Trouver le nombre de NaN dans une </a:t>
+            </a:r>
+            <a:r>
+              <a:rPr lang="fr-FR" dirty="0" err="1"/>
+              <a:t>serie</a:t>
+            </a:r>
+            <a:endParaRPr lang="fr-FR" dirty="0"/>
+          </a:p>
+          <a:p>
+            <a:pPr lvl="1"/>
+            <a:r>
+              <a:rPr lang="fr-FR" dirty="0" err="1"/>
+              <a:t>dataframe.isnull</a:t>
+            </a:r>
+            <a:r>
+              <a:rPr lang="fr-FR" dirty="0"/>
+              <a:t>().</a:t>
+            </a:r>
+            <a:r>
+              <a:rPr lang="fr-FR" dirty="0" err="1"/>
+              <a:t>sum</a:t>
+            </a:r>
+            <a:r>
+              <a:rPr lang="fr-FR" dirty="0"/>
+              <a:t>()</a:t>
+            </a:r>
+          </a:p>
+          <a:p>
+            <a:r>
+              <a:rPr lang="fr-FR" dirty="0"/>
+              <a:t>Remplacer les valeurs nulles par un moyenne + du bruit</a:t>
+            </a:r>
+          </a:p>
+          <a:p>
+            <a:pPr lvl="1"/>
+            <a:endParaRPr lang="fr-FR" sz="1600" dirty="0"/>
+          </a:p>
+        </p:txBody>
+      </p:sp>
+    </p:spTree>
+    <p:extLst>
+      <p:ext uri="{BB962C8B-B14F-4D97-AF65-F5344CB8AC3E}">
+        <p14:creationId xmlns:p14="http://schemas.microsoft.com/office/powerpoint/2010/main" val="506944565"/>
+      </p:ext>
+    </p:extLst>
+  </p:cSld>
+  <p:clrMapOvr>
+    <a:masterClrMapping/>
+  </p:clrMapOvr>
+</p:sld>
+</file>
+
+<file path=ppt/slides/slide19.xml><?xml version="1.0" encoding="utf-8"?>
+<p:sld xmlns:a="http://schemas.openxmlformats.org/drawingml/2006/main" xmlns:r="http://schemas.openxmlformats.org/officeDocument/2006/relationships" xmlns:p="http://schemas.openxmlformats.org/presentationml/2006/main">
+  <p:cSld>
+    <p:spTree>
+      <p:nvGrpSpPr>
+        <p:cNvPr id="1" name=""/>
+        <p:cNvGrpSpPr/>
+        <p:nvPr/>
+      </p:nvGrpSpPr>
+      <p:grpSpPr>
+        <a:xfrm>
+          <a:off x="0" y="0"/>
+          <a:ext cx="0" cy="0"/>
+          <a:chOff x="0" y="0"/>
+          <a:chExt cx="0" cy="0"/>
+        </a:xfrm>
+      </p:grpSpPr>
+      <p:sp>
+        <p:nvSpPr>
+          <p:cNvPr id="2" name="Titre 1">
+            <a:extLst>
+              <a:ext uri="{FF2B5EF4-FFF2-40B4-BE49-F238E27FC236}">
+                <a16:creationId xmlns:a16="http://schemas.microsoft.com/office/drawing/2014/main" id="{13834E1E-A756-71C3-BFB2-51CF35A9D6C5}"/>
+              </a:ext>
+            </a:extLst>
+          </p:cNvPr>
+          <p:cNvSpPr>
+            <a:spLocks noGrp="1"/>
+          </p:cNvSpPr>
+          <p:nvPr>
+            <p:ph type="title"/>
+          </p:nvPr>
+        </p:nvSpPr>
+        <p:spPr/>
+        <p:txBody>
+          <a:bodyPr/>
+          <a:lstStyle/>
+          <a:p>
+            <a:r>
+              <a:rPr lang="fr-FR" dirty="0"/>
+              <a:t>Filtrage de texte</a:t>
+            </a:r>
+          </a:p>
+        </p:txBody>
+      </p:sp>
+      <p:sp>
+        <p:nvSpPr>
+          <p:cNvPr id="3" name="Espace réservé du contenu 2">
+            <a:extLst>
+              <a:ext uri="{FF2B5EF4-FFF2-40B4-BE49-F238E27FC236}">
+                <a16:creationId xmlns:a16="http://schemas.microsoft.com/office/drawing/2014/main" id="{F08FCB54-F5E9-CFF8-F57A-4283094E9869}"/>
+              </a:ext>
+            </a:extLst>
+          </p:cNvPr>
+          <p:cNvSpPr>
+            <a:spLocks noGrp="1"/>
+          </p:cNvSpPr>
+          <p:nvPr>
+            <p:ph idx="1"/>
+          </p:nvPr>
+        </p:nvSpPr>
+        <p:spPr/>
+        <p:txBody>
+          <a:bodyPr/>
+          <a:lstStyle/>
+          <a:p>
+            <a:r>
+              <a:rPr lang="fr-FR" dirty="0" err="1"/>
+              <a:t>filter</a:t>
+            </a:r>
+            <a:endParaRPr lang="fr-FR" dirty="0"/>
+          </a:p>
+          <a:p>
+            <a:endParaRPr lang="fr-FR" dirty="0"/>
+          </a:p>
+        </p:txBody>
+      </p:sp>
+      <p:pic>
+        <p:nvPicPr>
+          <p:cNvPr id="7" name="Image 6">
+            <a:extLst>
+              <a:ext uri="{FF2B5EF4-FFF2-40B4-BE49-F238E27FC236}">
+                <a16:creationId xmlns:a16="http://schemas.microsoft.com/office/drawing/2014/main" id="{9E10DED7-442E-EC9D-D0F2-EDB3AA59B4FC}"/>
+              </a:ext>
+            </a:extLst>
+          </p:cNvPr>
+          <p:cNvPicPr>
+            <a:picLocks noChangeAspect="1"/>
+          </p:cNvPicPr>
+          <p:nvPr/>
+        </p:nvPicPr>
+        <p:blipFill>
+          <a:blip r:embed="rId2"/>
+          <a:stretch>
+            <a:fillRect/>
+          </a:stretch>
+        </p:blipFill>
+        <p:spPr>
+          <a:xfrm>
+            <a:off x="0" y="1988840"/>
+            <a:ext cx="9144000" cy="4303585"/>
+          </a:xfrm>
+          <a:prstGeom prst="rect">
+            <a:avLst/>
+          </a:prstGeom>
+        </p:spPr>
+      </p:pic>
+    </p:spTree>
+    <p:extLst>
+      <p:ext uri="{BB962C8B-B14F-4D97-AF65-F5344CB8AC3E}">
+        <p14:creationId xmlns:p14="http://schemas.microsoft.com/office/powerpoint/2010/main" val="709380996"/>
+      </p:ext>
+    </p:extLst>
+  </p:cSld>
+  <p:clrMapOvr>
+    <a:masterClrMapping/>
+  </p:clrMapOvr>
 </p:sld>
 </file>
 
@@ -4429,10 +5141,9 @@
           <a:lstStyle/>
           <a:p>
             <a:r>
-              <a:rPr lang="fr-FR" dirty="0" smtClean="0"/>
+              <a:rPr lang="fr-FR" dirty="0"/>
               <a:t>Pandas</a:t>
             </a:r>
-            <a:endParaRPr lang="fr-FR" dirty="0"/>
           </a:p>
         </p:txBody>
       </p:sp>
@@ -4466,47 +5177,47 @@
           </a:p>
           <a:p>
             <a:r>
-              <a:rPr lang="fr-FR" dirty="0" smtClean="0"/>
+              <a:rPr lang="fr-FR" dirty="0"/>
               <a:t>Module Python</a:t>
             </a:r>
           </a:p>
           <a:p>
             <a:pPr lvl="1"/>
             <a:r>
-              <a:rPr lang="fr-FR" dirty="0" smtClean="0"/>
+              <a:rPr lang="fr-FR" dirty="0"/>
               <a:t>Disponible dans Anaconda</a:t>
             </a:r>
           </a:p>
           <a:p>
             <a:pPr lvl="1"/>
             <a:r>
-              <a:rPr lang="fr-FR" dirty="0" err="1" smtClean="0"/>
+              <a:rPr lang="fr-FR" dirty="0" err="1"/>
               <a:t>Pip</a:t>
             </a:r>
             <a:r>
-              <a:rPr lang="fr-FR" dirty="0" smtClean="0"/>
+              <a:rPr lang="fr-FR" dirty="0"/>
               <a:t> </a:t>
             </a:r>
             <a:r>
-              <a:rPr lang="fr-FR" dirty="0" err="1" smtClean="0"/>
+              <a:rPr lang="fr-FR" dirty="0" err="1"/>
               <a:t>install</a:t>
             </a:r>
             <a:r>
-              <a:rPr lang="fr-FR" dirty="0" smtClean="0"/>
+              <a:rPr lang="fr-FR" dirty="0"/>
               <a:t> pandas</a:t>
             </a:r>
           </a:p>
           <a:p>
             <a:pPr lvl="1"/>
             <a:r>
-              <a:rPr lang="fr-FR" dirty="0" smtClean="0"/>
+              <a:rPr lang="fr-FR" dirty="0"/>
               <a:t>import pandas as </a:t>
             </a:r>
             <a:r>
-              <a:rPr lang="fr-FR" dirty="0" err="1" smtClean="0"/>
+              <a:rPr lang="fr-FR" dirty="0" err="1"/>
               <a:t>pd</a:t>
             </a:r>
-            <a:endParaRPr lang="fr-FR" dirty="0" smtClean="0"/>
+            <a:endParaRPr lang="fr-FR" dirty="0"/>
           </a:p>
         </p:txBody>
       </p:sp>
@@ -4520,13 +5231,1087 @@
   <p:clrMapOvr>
     <a:masterClrMapping/>
   </p:clrMapOvr>
-  <p:timing>
-    <p:tnLst>
-      <p:par>
-        <p:cTn id="1" dur="indefinite" restart="never" nodeType="tmRoot"/>
-      </p:par>
-    </p:tnLst>
-  </p:timing>
+</p:sld>
+</file>
+
+<file path=ppt/slides/slide20.xml><?xml version="1.0" encoding="utf-8"?>
+<p:sld xmlns:a="http://schemas.openxmlformats.org/drawingml/2006/main" xmlns:r="http://schemas.openxmlformats.org/officeDocument/2006/relationships" xmlns:p="http://schemas.openxmlformats.org/presentationml/2006/main">
+  <p:cSld>
+    <p:spTree>
+      <p:nvGrpSpPr>
+        <p:cNvPr id="1" name=""/>
+        <p:cNvGrpSpPr/>
+        <p:nvPr/>
+      </p:nvGrpSpPr>
+      <p:grpSpPr>
+        <a:xfrm>
+          <a:off x="0" y="0"/>
+          <a:ext cx="0" cy="0"/>
+          <a:chOff x="0" y="0"/>
+          <a:chExt cx="0" cy="0"/>
+        </a:xfrm>
+      </p:grpSpPr>
+      <p:sp>
+        <p:nvSpPr>
+          <p:cNvPr id="2" name="Titre 1">
+            <a:extLst>
+              <a:ext uri="{FF2B5EF4-FFF2-40B4-BE49-F238E27FC236}">
+                <a16:creationId xmlns:a16="http://schemas.microsoft.com/office/drawing/2014/main" id="{5B42E9F1-8EC8-2E18-757C-15A5F2196D54}"/>
+              </a:ext>
+            </a:extLst>
+          </p:cNvPr>
+          <p:cNvSpPr>
+            <a:spLocks noGrp="1"/>
+          </p:cNvSpPr>
+          <p:nvPr>
+            <p:ph type="title"/>
+          </p:nvPr>
+        </p:nvSpPr>
+        <p:spPr/>
+        <p:txBody>
+          <a:bodyPr/>
+          <a:lstStyle/>
+          <a:p>
+            <a:r>
+              <a:rPr lang="fr-FR" dirty="0"/>
+              <a:t>Les axes</a:t>
+            </a:r>
+          </a:p>
+        </p:txBody>
+      </p:sp>
+      <p:sp>
+        <p:nvSpPr>
+          <p:cNvPr id="3" name="Espace réservé du contenu 2">
+            <a:extLst>
+              <a:ext uri="{FF2B5EF4-FFF2-40B4-BE49-F238E27FC236}">
+                <a16:creationId xmlns:a16="http://schemas.microsoft.com/office/drawing/2014/main" id="{E87AD5AF-6631-64C1-5C1B-21830F9CC4C9}"/>
+              </a:ext>
+            </a:extLst>
+          </p:cNvPr>
+          <p:cNvSpPr>
+            <a:spLocks noGrp="1"/>
+          </p:cNvSpPr>
+          <p:nvPr>
+            <p:ph idx="1"/>
+          </p:nvPr>
+        </p:nvSpPr>
+        <p:spPr/>
+        <p:txBody>
+          <a:bodyPr/>
+          <a:lstStyle/>
+          <a:p>
+            <a:r>
+              <a:rPr lang="fr-FR" dirty="0"/>
+              <a:t>Fonctionne comme dans </a:t>
+            </a:r>
+            <a:r>
+              <a:rPr lang="fr-FR" dirty="0" err="1"/>
+              <a:t>numpy</a:t>
+            </a:r>
+            <a:endParaRPr lang="fr-FR" dirty="0"/>
+          </a:p>
+          <a:p>
+            <a:pPr lvl="1"/>
+            <a:r>
+              <a:rPr lang="fr-FR" dirty="0"/>
+              <a:t>Ainsi pour supprimer une colonne la faction drop nécessite un axe = 1</a:t>
+            </a:r>
+          </a:p>
+        </p:txBody>
+      </p:sp>
+      <p:pic>
+        <p:nvPicPr>
+          <p:cNvPr id="5" name="Image 4">
+            <a:extLst>
+              <a:ext uri="{FF2B5EF4-FFF2-40B4-BE49-F238E27FC236}">
+                <a16:creationId xmlns:a16="http://schemas.microsoft.com/office/drawing/2014/main" id="{9E090560-9956-6A63-C2F9-AA58E07187DA}"/>
+              </a:ext>
+            </a:extLst>
+          </p:cNvPr>
+          <p:cNvPicPr>
+            <a:picLocks noChangeAspect="1"/>
+          </p:cNvPicPr>
+          <p:nvPr/>
+        </p:nvPicPr>
+        <p:blipFill>
+          <a:blip r:embed="rId2"/>
+          <a:stretch>
+            <a:fillRect/>
+          </a:stretch>
+        </p:blipFill>
+        <p:spPr>
+          <a:xfrm>
+            <a:off x="-9463" y="2996952"/>
+            <a:ext cx="9144000" cy="3061981"/>
+          </a:xfrm>
+          <a:prstGeom prst="rect">
+            <a:avLst/>
+          </a:prstGeom>
+        </p:spPr>
+      </p:pic>
+    </p:spTree>
+    <p:extLst>
+      <p:ext uri="{BB962C8B-B14F-4D97-AF65-F5344CB8AC3E}">
+        <p14:creationId xmlns:p14="http://schemas.microsoft.com/office/powerpoint/2010/main" val="3310847241"/>
+      </p:ext>
+    </p:extLst>
+  </p:cSld>
+  <p:clrMapOvr>
+    <a:masterClrMapping/>
+  </p:clrMapOvr>
+</p:sld>
+</file>
+
+<file path=ppt/slides/slide21.xml><?xml version="1.0" encoding="utf-8"?>
+<p:sld xmlns:a="http://schemas.openxmlformats.org/drawingml/2006/main" xmlns:r="http://schemas.openxmlformats.org/officeDocument/2006/relationships" xmlns:p="http://schemas.openxmlformats.org/presentationml/2006/main">
+  <p:cSld>
+    <p:spTree>
+      <p:nvGrpSpPr>
+        <p:cNvPr id="1" name=""/>
+        <p:cNvGrpSpPr/>
+        <p:nvPr/>
+      </p:nvGrpSpPr>
+      <p:grpSpPr>
+        <a:xfrm>
+          <a:off x="0" y="0"/>
+          <a:ext cx="0" cy="0"/>
+          <a:chOff x="0" y="0"/>
+          <a:chExt cx="0" cy="0"/>
+        </a:xfrm>
+      </p:grpSpPr>
+      <p:sp>
+        <p:nvSpPr>
+          <p:cNvPr id="2" name="Titre 1">
+            <a:extLst>
+              <a:ext uri="{FF2B5EF4-FFF2-40B4-BE49-F238E27FC236}">
+                <a16:creationId xmlns:a16="http://schemas.microsoft.com/office/drawing/2014/main" id="{F7A6F3D7-97B4-88FD-1E8B-3F96A386EEC2}"/>
+              </a:ext>
+            </a:extLst>
+          </p:cNvPr>
+          <p:cNvSpPr>
+            <a:spLocks noGrp="1"/>
+          </p:cNvSpPr>
+          <p:nvPr>
+            <p:ph type="title"/>
+          </p:nvPr>
+        </p:nvSpPr>
+        <p:spPr/>
+        <p:txBody>
+          <a:bodyPr/>
+          <a:lstStyle/>
+          <a:p>
+            <a:r>
+              <a:rPr lang="fr-FR" dirty="0"/>
+              <a:t>Group by</a:t>
+            </a:r>
+          </a:p>
+        </p:txBody>
+      </p:sp>
+      <p:sp>
+        <p:nvSpPr>
+          <p:cNvPr id="3" name="Espace réservé du contenu 2">
+            <a:extLst>
+              <a:ext uri="{FF2B5EF4-FFF2-40B4-BE49-F238E27FC236}">
+                <a16:creationId xmlns:a16="http://schemas.microsoft.com/office/drawing/2014/main" id="{EB9F3AF4-EB3E-C115-1B33-118B0AC084C9}"/>
+              </a:ext>
+            </a:extLst>
+          </p:cNvPr>
+          <p:cNvSpPr>
+            <a:spLocks noGrp="1"/>
+          </p:cNvSpPr>
+          <p:nvPr>
+            <p:ph idx="1"/>
+          </p:nvPr>
+        </p:nvSpPr>
+        <p:spPr/>
+        <p:txBody>
+          <a:bodyPr/>
+          <a:lstStyle/>
+          <a:p>
+            <a:r>
+              <a:rPr lang="fr-FR" dirty="0"/>
+              <a:t>Permet de regrouper de données et d'appliquer des fonctions de regroupement</a:t>
+            </a:r>
+          </a:p>
+        </p:txBody>
+      </p:sp>
+      <p:pic>
+        <p:nvPicPr>
+          <p:cNvPr id="5" name="Image 4">
+            <a:extLst>
+              <a:ext uri="{FF2B5EF4-FFF2-40B4-BE49-F238E27FC236}">
+                <a16:creationId xmlns:a16="http://schemas.microsoft.com/office/drawing/2014/main" id="{62ECD06E-E3B5-6C7E-8F1C-2D6849AD6A26}"/>
+              </a:ext>
+            </a:extLst>
+          </p:cNvPr>
+          <p:cNvPicPr>
+            <a:picLocks noChangeAspect="1"/>
+          </p:cNvPicPr>
+          <p:nvPr/>
+        </p:nvPicPr>
+        <p:blipFill>
+          <a:blip r:embed="rId2"/>
+          <a:stretch>
+            <a:fillRect/>
+          </a:stretch>
+        </p:blipFill>
+        <p:spPr>
+          <a:xfrm>
+            <a:off x="25896" y="2381142"/>
+            <a:ext cx="9144000" cy="4079767"/>
+          </a:xfrm>
+          <a:prstGeom prst="rect">
+            <a:avLst/>
+          </a:prstGeom>
+        </p:spPr>
+      </p:pic>
+    </p:spTree>
+    <p:extLst>
+      <p:ext uri="{BB962C8B-B14F-4D97-AF65-F5344CB8AC3E}">
+        <p14:creationId xmlns:p14="http://schemas.microsoft.com/office/powerpoint/2010/main" val="219192075"/>
+      </p:ext>
+    </p:extLst>
+  </p:cSld>
+  <p:clrMapOvr>
+    <a:masterClrMapping/>
+  </p:clrMapOvr>
+</p:sld>
+</file>
+
+<file path=ppt/slides/slide22.xml><?xml version="1.0" encoding="utf-8"?>
+<p:sld xmlns:a="http://schemas.openxmlformats.org/drawingml/2006/main" xmlns:r="http://schemas.openxmlformats.org/officeDocument/2006/relationships" xmlns:p="http://schemas.openxmlformats.org/presentationml/2006/main">
+  <p:cSld>
+    <p:spTree>
+      <p:nvGrpSpPr>
+        <p:cNvPr id="1" name=""/>
+        <p:cNvGrpSpPr/>
+        <p:nvPr/>
+      </p:nvGrpSpPr>
+      <p:grpSpPr>
+        <a:xfrm>
+          <a:off x="0" y="0"/>
+          <a:ext cx="0" cy="0"/>
+          <a:chOff x="0" y="0"/>
+          <a:chExt cx="0" cy="0"/>
+        </a:xfrm>
+      </p:grpSpPr>
+      <p:sp>
+        <p:nvSpPr>
+          <p:cNvPr id="2" name="Titre 1">
+            <a:extLst>
+              <a:ext uri="{FF2B5EF4-FFF2-40B4-BE49-F238E27FC236}">
+                <a16:creationId xmlns:a16="http://schemas.microsoft.com/office/drawing/2014/main" id="{DA5147BB-CD89-F1F3-3052-CC2C376E617F}"/>
+              </a:ext>
+            </a:extLst>
+          </p:cNvPr>
+          <p:cNvSpPr>
+            <a:spLocks noGrp="1"/>
+          </p:cNvSpPr>
+          <p:nvPr>
+            <p:ph type="title"/>
+          </p:nvPr>
+        </p:nvSpPr>
+        <p:spPr/>
+        <p:txBody>
+          <a:bodyPr/>
+          <a:lstStyle/>
+          <a:p>
+            <a:r>
+              <a:rPr lang="fr-FR" dirty="0" err="1"/>
+              <a:t>Concatenation</a:t>
+            </a:r>
+            <a:endParaRPr lang="fr-FR" dirty="0"/>
+          </a:p>
+        </p:txBody>
+      </p:sp>
+      <p:sp>
+        <p:nvSpPr>
+          <p:cNvPr id="3" name="Espace réservé du contenu 2">
+            <a:extLst>
+              <a:ext uri="{FF2B5EF4-FFF2-40B4-BE49-F238E27FC236}">
+                <a16:creationId xmlns:a16="http://schemas.microsoft.com/office/drawing/2014/main" id="{3A72FBBF-F649-C0C0-546F-7539346A34EE}"/>
+              </a:ext>
+            </a:extLst>
+          </p:cNvPr>
+          <p:cNvSpPr>
+            <a:spLocks noGrp="1"/>
+          </p:cNvSpPr>
+          <p:nvPr>
+            <p:ph idx="1"/>
+          </p:nvPr>
+        </p:nvSpPr>
+        <p:spPr/>
+        <p:txBody>
+          <a:bodyPr/>
+          <a:lstStyle/>
+          <a:p>
+            <a:endParaRPr lang="fr-FR"/>
+          </a:p>
+        </p:txBody>
+      </p:sp>
+      <p:pic>
+        <p:nvPicPr>
+          <p:cNvPr id="5" name="Image 4">
+            <a:extLst>
+              <a:ext uri="{FF2B5EF4-FFF2-40B4-BE49-F238E27FC236}">
+                <a16:creationId xmlns:a16="http://schemas.microsoft.com/office/drawing/2014/main" id="{C996B8EC-84F3-482F-BE41-CE4828F8FF17}"/>
+              </a:ext>
+            </a:extLst>
+          </p:cNvPr>
+          <p:cNvPicPr>
+            <a:picLocks noChangeAspect="1"/>
+          </p:cNvPicPr>
+          <p:nvPr/>
+        </p:nvPicPr>
+        <p:blipFill>
+          <a:blip r:embed="rId2"/>
+          <a:stretch>
+            <a:fillRect/>
+          </a:stretch>
+        </p:blipFill>
+        <p:spPr>
+          <a:xfrm>
+            <a:off x="0" y="1281739"/>
+            <a:ext cx="9144000" cy="4294521"/>
+          </a:xfrm>
+          <a:prstGeom prst="rect">
+            <a:avLst/>
+          </a:prstGeom>
+        </p:spPr>
+      </p:pic>
+    </p:spTree>
+    <p:extLst>
+      <p:ext uri="{BB962C8B-B14F-4D97-AF65-F5344CB8AC3E}">
+        <p14:creationId xmlns:p14="http://schemas.microsoft.com/office/powerpoint/2010/main" val="2378211222"/>
+      </p:ext>
+    </p:extLst>
+  </p:cSld>
+  <p:clrMapOvr>
+    <a:masterClrMapping/>
+  </p:clrMapOvr>
+</p:sld>
+</file>
+
+<file path=ppt/slides/slide23.xml><?xml version="1.0" encoding="utf-8"?>
+<p:sld xmlns:a="http://schemas.openxmlformats.org/drawingml/2006/main" xmlns:r="http://schemas.openxmlformats.org/officeDocument/2006/relationships" xmlns:p="http://schemas.openxmlformats.org/presentationml/2006/main">
+  <p:cSld>
+    <p:spTree>
+      <p:nvGrpSpPr>
+        <p:cNvPr id="1" name=""/>
+        <p:cNvGrpSpPr/>
+        <p:nvPr/>
+      </p:nvGrpSpPr>
+      <p:grpSpPr>
+        <a:xfrm>
+          <a:off x="0" y="0"/>
+          <a:ext cx="0" cy="0"/>
+          <a:chOff x="0" y="0"/>
+          <a:chExt cx="0" cy="0"/>
+        </a:xfrm>
+      </p:grpSpPr>
+      <p:sp>
+        <p:nvSpPr>
+          <p:cNvPr id="2" name="Titre 1">
+            <a:extLst>
+              <a:ext uri="{FF2B5EF4-FFF2-40B4-BE49-F238E27FC236}">
+                <a16:creationId xmlns:a16="http://schemas.microsoft.com/office/drawing/2014/main" id="{5DEB7506-0C00-CFD5-4BDB-C2743E84439E}"/>
+              </a:ext>
+            </a:extLst>
+          </p:cNvPr>
+          <p:cNvSpPr>
+            <a:spLocks noGrp="1"/>
+          </p:cNvSpPr>
+          <p:nvPr>
+            <p:ph type="title"/>
+          </p:nvPr>
+        </p:nvSpPr>
+        <p:spPr/>
+        <p:txBody>
+          <a:bodyPr/>
+          <a:lstStyle/>
+          <a:p>
+            <a:r>
+              <a:rPr lang="fr-FR" dirty="0"/>
+              <a:t>Jointure</a:t>
+            </a:r>
+          </a:p>
+        </p:txBody>
+      </p:sp>
+      <p:sp>
+        <p:nvSpPr>
+          <p:cNvPr id="3" name="Espace réservé du contenu 2">
+            <a:extLst>
+              <a:ext uri="{FF2B5EF4-FFF2-40B4-BE49-F238E27FC236}">
+                <a16:creationId xmlns:a16="http://schemas.microsoft.com/office/drawing/2014/main" id="{84D44093-DD58-9993-8848-14046F0A7D4A}"/>
+              </a:ext>
+            </a:extLst>
+          </p:cNvPr>
+          <p:cNvSpPr>
+            <a:spLocks noGrp="1"/>
+          </p:cNvSpPr>
+          <p:nvPr>
+            <p:ph idx="1"/>
+          </p:nvPr>
+        </p:nvSpPr>
+        <p:spPr/>
+        <p:txBody>
+          <a:bodyPr/>
+          <a:lstStyle/>
+          <a:p>
+            <a:r>
+              <a:rPr lang="fr-FR" dirty="0"/>
+              <a:t>Permet de joindre 2 </a:t>
+            </a:r>
+            <a:r>
+              <a:rPr lang="fr-FR" dirty="0" err="1"/>
+              <a:t>dataframes</a:t>
+            </a:r>
+            <a:r>
+              <a:rPr lang="fr-FR" dirty="0"/>
+              <a:t> avec une clé commune</a:t>
+            </a:r>
+          </a:p>
+          <a:p>
+            <a:pPr lvl="1"/>
+            <a:r>
+              <a:rPr lang="fr-FR" dirty="0"/>
+              <a:t>Jointure à gauche</a:t>
+            </a:r>
+          </a:p>
+        </p:txBody>
+      </p:sp>
+      <p:pic>
+        <p:nvPicPr>
+          <p:cNvPr id="5" name="Image 4">
+            <a:extLst>
+              <a:ext uri="{FF2B5EF4-FFF2-40B4-BE49-F238E27FC236}">
+                <a16:creationId xmlns:a16="http://schemas.microsoft.com/office/drawing/2014/main" id="{55D9DC26-57E2-BCA9-DF42-2E562C822B15}"/>
+              </a:ext>
+            </a:extLst>
+          </p:cNvPr>
+          <p:cNvPicPr>
+            <a:picLocks noChangeAspect="1"/>
+          </p:cNvPicPr>
+          <p:nvPr/>
+        </p:nvPicPr>
+        <p:blipFill>
+          <a:blip r:embed="rId2"/>
+          <a:stretch>
+            <a:fillRect/>
+          </a:stretch>
+        </p:blipFill>
+        <p:spPr>
+          <a:xfrm>
+            <a:off x="1876112" y="3429000"/>
+            <a:ext cx="5372850" cy="1952898"/>
+          </a:xfrm>
+          <a:prstGeom prst="rect">
+            <a:avLst/>
+          </a:prstGeom>
+        </p:spPr>
+      </p:pic>
+    </p:spTree>
+    <p:extLst>
+      <p:ext uri="{BB962C8B-B14F-4D97-AF65-F5344CB8AC3E}">
+        <p14:creationId xmlns:p14="http://schemas.microsoft.com/office/powerpoint/2010/main" val="2225388981"/>
+      </p:ext>
+    </p:extLst>
+  </p:cSld>
+  <p:clrMapOvr>
+    <a:masterClrMapping/>
+  </p:clrMapOvr>
+</p:sld>
+</file>
+
+<file path=ppt/slides/slide24.xml><?xml version="1.0" encoding="utf-8"?>
+<p:sld xmlns:a="http://schemas.openxmlformats.org/drawingml/2006/main" xmlns:r="http://schemas.openxmlformats.org/officeDocument/2006/relationships" xmlns:p="http://schemas.openxmlformats.org/presentationml/2006/main">
+  <p:cSld>
+    <p:spTree>
+      <p:nvGrpSpPr>
+        <p:cNvPr id="1" name=""/>
+        <p:cNvGrpSpPr/>
+        <p:nvPr/>
+      </p:nvGrpSpPr>
+      <p:grpSpPr>
+        <a:xfrm>
+          <a:off x="0" y="0"/>
+          <a:ext cx="0" cy="0"/>
+          <a:chOff x="0" y="0"/>
+          <a:chExt cx="0" cy="0"/>
+        </a:xfrm>
+      </p:grpSpPr>
+      <p:sp>
+        <p:nvSpPr>
+          <p:cNvPr id="2" name="Titre 1">
+            <a:extLst>
+              <a:ext uri="{FF2B5EF4-FFF2-40B4-BE49-F238E27FC236}">
+                <a16:creationId xmlns:a16="http://schemas.microsoft.com/office/drawing/2014/main" id="{C44A2971-0788-4AAB-B5EF-331620A52E00}"/>
+              </a:ext>
+            </a:extLst>
+          </p:cNvPr>
+          <p:cNvSpPr>
+            <a:spLocks noGrp="1"/>
+          </p:cNvSpPr>
+          <p:nvPr>
+            <p:ph type="title"/>
+          </p:nvPr>
+        </p:nvSpPr>
+        <p:spPr/>
+        <p:txBody>
+          <a:bodyPr/>
+          <a:lstStyle/>
+          <a:p>
+            <a:r>
+              <a:rPr lang="fr-FR" dirty="0"/>
+              <a:t>Autres jointures</a:t>
+            </a:r>
+          </a:p>
+        </p:txBody>
+      </p:sp>
+      <p:sp>
+        <p:nvSpPr>
+          <p:cNvPr id="3" name="Espace réservé du contenu 2">
+            <a:extLst>
+              <a:ext uri="{FF2B5EF4-FFF2-40B4-BE49-F238E27FC236}">
+                <a16:creationId xmlns:a16="http://schemas.microsoft.com/office/drawing/2014/main" id="{2767FB74-14A4-5F1A-E8E1-F7462E84E783}"/>
+              </a:ext>
+            </a:extLst>
+          </p:cNvPr>
+          <p:cNvSpPr>
+            <a:spLocks noGrp="1"/>
+          </p:cNvSpPr>
+          <p:nvPr>
+            <p:ph idx="1"/>
+          </p:nvPr>
+        </p:nvSpPr>
+        <p:spPr/>
+        <p:txBody>
+          <a:bodyPr/>
+          <a:lstStyle/>
+          <a:p>
+            <a:endParaRPr lang="fr-FR"/>
+          </a:p>
+        </p:txBody>
+      </p:sp>
+      <p:pic>
+        <p:nvPicPr>
+          <p:cNvPr id="5" name="Image 4">
+            <a:extLst>
+              <a:ext uri="{FF2B5EF4-FFF2-40B4-BE49-F238E27FC236}">
+                <a16:creationId xmlns:a16="http://schemas.microsoft.com/office/drawing/2014/main" id="{ED35A89D-8660-F8F8-F0E5-EAE541F824DE}"/>
+              </a:ext>
+            </a:extLst>
+          </p:cNvPr>
+          <p:cNvPicPr>
+            <a:picLocks noChangeAspect="1"/>
+          </p:cNvPicPr>
+          <p:nvPr/>
+        </p:nvPicPr>
+        <p:blipFill>
+          <a:blip r:embed="rId2"/>
+          <a:stretch>
+            <a:fillRect/>
+          </a:stretch>
+        </p:blipFill>
+        <p:spPr>
+          <a:xfrm>
+            <a:off x="0" y="2558924"/>
+            <a:ext cx="9144000" cy="1740151"/>
+          </a:xfrm>
+          <a:prstGeom prst="rect">
+            <a:avLst/>
+          </a:prstGeom>
+        </p:spPr>
+      </p:pic>
+    </p:spTree>
+    <p:extLst>
+      <p:ext uri="{BB962C8B-B14F-4D97-AF65-F5344CB8AC3E}">
+        <p14:creationId xmlns:p14="http://schemas.microsoft.com/office/powerpoint/2010/main" val="4107540987"/>
+      </p:ext>
+    </p:extLst>
+  </p:cSld>
+  <p:clrMapOvr>
+    <a:masterClrMapping/>
+  </p:clrMapOvr>
+</p:sld>
+</file>
+
+<file path=ppt/slides/slide25.xml><?xml version="1.0" encoding="utf-8"?>
+<p:sld xmlns:a="http://schemas.openxmlformats.org/drawingml/2006/main" xmlns:r="http://schemas.openxmlformats.org/officeDocument/2006/relationships" xmlns:p="http://schemas.openxmlformats.org/presentationml/2006/main">
+  <p:cSld>
+    <p:spTree>
+      <p:nvGrpSpPr>
+        <p:cNvPr id="1" name=""/>
+        <p:cNvGrpSpPr/>
+        <p:nvPr/>
+      </p:nvGrpSpPr>
+      <p:grpSpPr>
+        <a:xfrm>
+          <a:off x="0" y="0"/>
+          <a:ext cx="0" cy="0"/>
+          <a:chOff x="0" y="0"/>
+          <a:chExt cx="0" cy="0"/>
+        </a:xfrm>
+      </p:grpSpPr>
+      <p:sp>
+        <p:nvSpPr>
+          <p:cNvPr id="2" name="Titre 1">
+            <a:extLst>
+              <a:ext uri="{FF2B5EF4-FFF2-40B4-BE49-F238E27FC236}">
+                <a16:creationId xmlns:a16="http://schemas.microsoft.com/office/drawing/2014/main" id="{038A0E1B-989C-96C4-5C96-9C2C9CB651CA}"/>
+              </a:ext>
+            </a:extLst>
+          </p:cNvPr>
+          <p:cNvSpPr>
+            <a:spLocks noGrp="1"/>
+          </p:cNvSpPr>
+          <p:nvPr>
+            <p:ph type="title"/>
+          </p:nvPr>
+        </p:nvSpPr>
+        <p:spPr/>
+        <p:txBody>
+          <a:bodyPr/>
+          <a:lstStyle/>
+          <a:p>
+            <a:r>
+              <a:rPr lang="fr-FR" dirty="0" err="1"/>
+              <a:t>Sweetviz</a:t>
+            </a:r>
+            <a:endParaRPr lang="fr-FR" dirty="0"/>
+          </a:p>
+        </p:txBody>
+      </p:sp>
+      <p:sp>
+        <p:nvSpPr>
+          <p:cNvPr id="3" name="Espace réservé du contenu 2">
+            <a:extLst>
+              <a:ext uri="{FF2B5EF4-FFF2-40B4-BE49-F238E27FC236}">
+                <a16:creationId xmlns:a16="http://schemas.microsoft.com/office/drawing/2014/main" id="{7D317324-4A75-B7C4-1B0E-9B3ABA43E313}"/>
+              </a:ext>
+            </a:extLst>
+          </p:cNvPr>
+          <p:cNvSpPr>
+            <a:spLocks noGrp="1"/>
+          </p:cNvSpPr>
+          <p:nvPr>
+            <p:ph idx="1"/>
+          </p:nvPr>
+        </p:nvSpPr>
+        <p:spPr/>
+        <p:txBody>
+          <a:bodyPr/>
+          <a:lstStyle/>
+          <a:p>
+            <a:endParaRPr lang="fr-FR"/>
+          </a:p>
+        </p:txBody>
+      </p:sp>
+      <p:pic>
+        <p:nvPicPr>
+          <p:cNvPr id="5" name="Image 4">
+            <a:extLst>
+              <a:ext uri="{FF2B5EF4-FFF2-40B4-BE49-F238E27FC236}">
+                <a16:creationId xmlns:a16="http://schemas.microsoft.com/office/drawing/2014/main" id="{9A29E414-B019-EB86-BCE6-07678CC30106}"/>
+              </a:ext>
+            </a:extLst>
+          </p:cNvPr>
+          <p:cNvPicPr>
+            <a:picLocks noChangeAspect="1"/>
+          </p:cNvPicPr>
+          <p:nvPr/>
+        </p:nvPicPr>
+        <p:blipFill>
+          <a:blip r:embed="rId2"/>
+          <a:stretch>
+            <a:fillRect/>
+          </a:stretch>
+        </p:blipFill>
+        <p:spPr>
+          <a:xfrm>
+            <a:off x="0" y="1211179"/>
+            <a:ext cx="9144000" cy="4435642"/>
+          </a:xfrm>
+          <a:prstGeom prst="rect">
+            <a:avLst/>
+          </a:prstGeom>
+        </p:spPr>
+      </p:pic>
+    </p:spTree>
+    <p:extLst>
+      <p:ext uri="{BB962C8B-B14F-4D97-AF65-F5344CB8AC3E}">
+        <p14:creationId xmlns:p14="http://schemas.microsoft.com/office/powerpoint/2010/main" val="2713566712"/>
+      </p:ext>
+    </p:extLst>
+  </p:cSld>
+  <p:clrMapOvr>
+    <a:masterClrMapping/>
+  </p:clrMapOvr>
+</p:sld>
+</file>
+
+<file path=ppt/slides/slide26.xml><?xml version="1.0" encoding="utf-8"?>
+<p:sld xmlns:a="http://schemas.openxmlformats.org/drawingml/2006/main" xmlns:r="http://schemas.openxmlformats.org/officeDocument/2006/relationships" xmlns:p="http://schemas.openxmlformats.org/presentationml/2006/main">
+  <p:cSld>
+    <p:spTree>
+      <p:nvGrpSpPr>
+        <p:cNvPr id="1" name=""/>
+        <p:cNvGrpSpPr/>
+        <p:nvPr/>
+      </p:nvGrpSpPr>
+      <p:grpSpPr>
+        <a:xfrm>
+          <a:off x="0" y="0"/>
+          <a:ext cx="0" cy="0"/>
+          <a:chOff x="0" y="0"/>
+          <a:chExt cx="0" cy="0"/>
+        </a:xfrm>
+      </p:grpSpPr>
+      <p:sp>
+        <p:nvSpPr>
+          <p:cNvPr id="2" name="Titre 1">
+            <a:extLst>
+              <a:ext uri="{FF2B5EF4-FFF2-40B4-BE49-F238E27FC236}">
+                <a16:creationId xmlns:a16="http://schemas.microsoft.com/office/drawing/2014/main" id="{ECF2046E-B7D6-B69A-B18F-7970DEE68E6D}"/>
+              </a:ext>
+            </a:extLst>
+          </p:cNvPr>
+          <p:cNvSpPr>
+            <a:spLocks noGrp="1"/>
+          </p:cNvSpPr>
+          <p:nvPr>
+            <p:ph type="title"/>
+          </p:nvPr>
+        </p:nvSpPr>
+        <p:spPr/>
+        <p:txBody>
+          <a:bodyPr/>
+          <a:lstStyle/>
+          <a:p>
+            <a:r>
+              <a:rPr lang="fr-FR" dirty="0"/>
+              <a:t>Séries temporelles</a:t>
+            </a:r>
+          </a:p>
+        </p:txBody>
+      </p:sp>
+      <p:sp>
+        <p:nvSpPr>
+          <p:cNvPr id="3" name="Espace réservé du contenu 2">
+            <a:extLst>
+              <a:ext uri="{FF2B5EF4-FFF2-40B4-BE49-F238E27FC236}">
+                <a16:creationId xmlns:a16="http://schemas.microsoft.com/office/drawing/2014/main" id="{0ED3F165-FE9A-BC33-9D97-03D34652D44F}"/>
+              </a:ext>
+            </a:extLst>
+          </p:cNvPr>
+          <p:cNvSpPr>
+            <a:spLocks noGrp="1"/>
+          </p:cNvSpPr>
+          <p:nvPr>
+            <p:ph idx="1"/>
+          </p:nvPr>
+        </p:nvSpPr>
+        <p:spPr/>
+        <p:txBody>
+          <a:bodyPr/>
+          <a:lstStyle/>
+          <a:p>
+            <a:r>
+              <a:rPr lang="fr-FR" dirty="0"/>
+              <a:t>Dans les séries temporelles, la date, la time, la </a:t>
+            </a:r>
+            <a:r>
+              <a:rPr lang="fr-FR" dirty="0" err="1"/>
+              <a:t>datetime</a:t>
+            </a:r>
+            <a:r>
+              <a:rPr lang="fr-FR" dirty="0"/>
+              <a:t> ou l'index de temps est souvent l'index du </a:t>
+            </a:r>
+            <a:r>
+              <a:rPr lang="fr-FR" dirty="0" err="1"/>
+              <a:t>dataframe</a:t>
+            </a:r>
+            <a:endParaRPr lang="fr-FR" dirty="0"/>
+          </a:p>
+          <a:p>
+            <a:pPr lvl="1"/>
+            <a:r>
+              <a:rPr lang="fr-FR" dirty="0" err="1"/>
+              <a:t>index_col</a:t>
+            </a:r>
+            <a:endParaRPr lang="fr-FR" dirty="0"/>
+          </a:p>
+          <a:p>
+            <a:r>
+              <a:rPr lang="fr-FR" dirty="0"/>
+              <a:t>La </a:t>
+            </a:r>
+            <a:r>
+              <a:rPr lang="fr-FR" dirty="0" err="1"/>
+              <a:t>datetime</a:t>
+            </a:r>
+            <a:r>
+              <a:rPr lang="fr-FR" dirty="0"/>
+              <a:t> devrait être au format ISO</a:t>
+            </a:r>
+          </a:p>
+          <a:p>
+            <a:pPr lvl="1"/>
+            <a:r>
+              <a:rPr lang="fr-FR" dirty="0"/>
+              <a:t>Sinon utiliser </a:t>
+            </a:r>
+            <a:r>
+              <a:rPr lang="fr-FR" dirty="0" err="1"/>
+              <a:t>date_format</a:t>
+            </a:r>
+            <a:r>
+              <a:rPr lang="fr-FR" dirty="0"/>
+              <a:t> : "%d/%m/%Y"</a:t>
+            </a:r>
+          </a:p>
+        </p:txBody>
+      </p:sp>
+      <p:pic>
+        <p:nvPicPr>
+          <p:cNvPr id="5" name="Image 4">
+            <a:extLst>
+              <a:ext uri="{FF2B5EF4-FFF2-40B4-BE49-F238E27FC236}">
+                <a16:creationId xmlns:a16="http://schemas.microsoft.com/office/drawing/2014/main" id="{6139980F-B4B3-2ADA-33DE-554910D0CE0E}"/>
+              </a:ext>
+            </a:extLst>
+          </p:cNvPr>
+          <p:cNvPicPr>
+            <a:picLocks noChangeAspect="1"/>
+          </p:cNvPicPr>
+          <p:nvPr/>
+        </p:nvPicPr>
+        <p:blipFill>
+          <a:blip r:embed="rId2"/>
+          <a:stretch>
+            <a:fillRect/>
+          </a:stretch>
+        </p:blipFill>
+        <p:spPr>
+          <a:xfrm>
+            <a:off x="2051720" y="4581128"/>
+            <a:ext cx="5601482" cy="3953427"/>
+          </a:xfrm>
+          <a:prstGeom prst="rect">
+            <a:avLst/>
+          </a:prstGeom>
+        </p:spPr>
+      </p:pic>
+    </p:spTree>
+    <p:extLst>
+      <p:ext uri="{BB962C8B-B14F-4D97-AF65-F5344CB8AC3E}">
+        <p14:creationId xmlns:p14="http://schemas.microsoft.com/office/powerpoint/2010/main" val="1049257540"/>
+      </p:ext>
+    </p:extLst>
+  </p:cSld>
+  <p:clrMapOvr>
+    <a:masterClrMapping/>
+  </p:clrMapOvr>
+</p:sld>
+</file>
+
+<file path=ppt/slides/slide27.xml><?xml version="1.0" encoding="utf-8"?>
+<p:sld xmlns:a="http://schemas.openxmlformats.org/drawingml/2006/main" xmlns:r="http://schemas.openxmlformats.org/officeDocument/2006/relationships" xmlns:p="http://schemas.openxmlformats.org/presentationml/2006/main">
+  <p:cSld>
+    <p:spTree>
+      <p:nvGrpSpPr>
+        <p:cNvPr id="1" name=""/>
+        <p:cNvGrpSpPr/>
+        <p:nvPr/>
+      </p:nvGrpSpPr>
+      <p:grpSpPr>
+        <a:xfrm>
+          <a:off x="0" y="0"/>
+          <a:ext cx="0" cy="0"/>
+          <a:chOff x="0" y="0"/>
+          <a:chExt cx="0" cy="0"/>
+        </a:xfrm>
+      </p:grpSpPr>
+      <p:sp>
+        <p:nvSpPr>
+          <p:cNvPr id="2" name="Titre 1">
+            <a:extLst>
+              <a:ext uri="{FF2B5EF4-FFF2-40B4-BE49-F238E27FC236}">
+                <a16:creationId xmlns:a16="http://schemas.microsoft.com/office/drawing/2014/main" id="{5EE32230-5FBC-901C-8B5D-898D20B05C33}"/>
+              </a:ext>
+            </a:extLst>
+          </p:cNvPr>
+          <p:cNvSpPr>
+            <a:spLocks noGrp="1"/>
+          </p:cNvSpPr>
+          <p:nvPr>
+            <p:ph type="title"/>
+          </p:nvPr>
+        </p:nvSpPr>
+        <p:spPr/>
+        <p:txBody>
+          <a:bodyPr/>
+          <a:lstStyle/>
+          <a:p>
+            <a:r>
+              <a:rPr lang="fr-FR" dirty="0"/>
+              <a:t>Séries temporelles</a:t>
+            </a:r>
+          </a:p>
+        </p:txBody>
+      </p:sp>
+      <p:sp>
+        <p:nvSpPr>
+          <p:cNvPr id="3" name="Espace réservé du contenu 2">
+            <a:extLst>
+              <a:ext uri="{FF2B5EF4-FFF2-40B4-BE49-F238E27FC236}">
+                <a16:creationId xmlns:a16="http://schemas.microsoft.com/office/drawing/2014/main" id="{B24A3162-261C-1A84-0398-B335E34139CC}"/>
+              </a:ext>
+            </a:extLst>
+          </p:cNvPr>
+          <p:cNvSpPr>
+            <a:spLocks noGrp="1"/>
+          </p:cNvSpPr>
+          <p:nvPr>
+            <p:ph idx="1"/>
+          </p:nvPr>
+        </p:nvSpPr>
+        <p:spPr>
+          <a:xfrm>
+            <a:off x="179513" y="1412776"/>
+            <a:ext cx="3744416" cy="5040560"/>
+          </a:xfrm>
+        </p:spPr>
+        <p:txBody>
+          <a:bodyPr/>
+          <a:lstStyle/>
+          <a:p>
+            <a:r>
+              <a:rPr lang="fr-FR" sz="2400" dirty="0"/>
+              <a:t>Il est alors possible de sélectionner par date</a:t>
+            </a:r>
+          </a:p>
+          <a:p>
+            <a:r>
+              <a:rPr lang="fr-FR" sz="2400" dirty="0"/>
+              <a:t>Il est également possible de regrouper par date</a:t>
+            </a:r>
+          </a:p>
+          <a:p>
+            <a:endParaRPr lang="fr-FR" sz="2400" dirty="0"/>
+          </a:p>
+          <a:p>
+            <a:endParaRPr lang="fr-FR" sz="2400" dirty="0"/>
+          </a:p>
+          <a:p>
+            <a:r>
+              <a:rPr lang="fr-FR" sz="2400" dirty="0"/>
+              <a:t>Et d'effectuer des moyennes glissantes</a:t>
+            </a:r>
+          </a:p>
+        </p:txBody>
+      </p:sp>
+      <p:pic>
+        <p:nvPicPr>
+          <p:cNvPr id="5" name="Image 4">
+            <a:extLst>
+              <a:ext uri="{FF2B5EF4-FFF2-40B4-BE49-F238E27FC236}">
+                <a16:creationId xmlns:a16="http://schemas.microsoft.com/office/drawing/2014/main" id="{7EC4B0D0-6361-49EC-2736-1973739041C3}"/>
+              </a:ext>
+            </a:extLst>
+          </p:cNvPr>
+          <p:cNvPicPr>
+            <a:picLocks noChangeAspect="1"/>
+          </p:cNvPicPr>
+          <p:nvPr/>
+        </p:nvPicPr>
+        <p:blipFill>
+          <a:blip r:embed="rId2"/>
+          <a:stretch>
+            <a:fillRect/>
+          </a:stretch>
+        </p:blipFill>
+        <p:spPr>
+          <a:xfrm>
+            <a:off x="3923928" y="1277989"/>
+            <a:ext cx="5231261" cy="5580012"/>
+          </a:xfrm>
+          <a:prstGeom prst="rect">
+            <a:avLst/>
+          </a:prstGeom>
+        </p:spPr>
+      </p:pic>
+      <p:pic>
+        <p:nvPicPr>
+          <p:cNvPr id="7" name="Image 6">
+            <a:extLst>
+              <a:ext uri="{FF2B5EF4-FFF2-40B4-BE49-F238E27FC236}">
+                <a16:creationId xmlns:a16="http://schemas.microsoft.com/office/drawing/2014/main" id="{D837D74B-095C-A8FE-523B-78634525FDB6}"/>
+              </a:ext>
+            </a:extLst>
+          </p:cNvPr>
+          <p:cNvPicPr>
+            <a:picLocks noChangeAspect="1"/>
+          </p:cNvPicPr>
+          <p:nvPr/>
+        </p:nvPicPr>
+        <p:blipFill>
+          <a:blip r:embed="rId3"/>
+          <a:stretch>
+            <a:fillRect/>
+          </a:stretch>
+        </p:blipFill>
+        <p:spPr>
+          <a:xfrm>
+            <a:off x="179513" y="3656792"/>
+            <a:ext cx="3923927" cy="552527"/>
+          </a:xfrm>
+          <a:prstGeom prst="rect">
+            <a:avLst/>
+          </a:prstGeom>
+        </p:spPr>
+      </p:pic>
+      <p:pic>
+        <p:nvPicPr>
+          <p:cNvPr id="9" name="Image 8">
+            <a:extLst>
+              <a:ext uri="{FF2B5EF4-FFF2-40B4-BE49-F238E27FC236}">
+                <a16:creationId xmlns:a16="http://schemas.microsoft.com/office/drawing/2014/main" id="{7339C363-C4F6-6C7A-02CC-FE491961BBBD}"/>
+              </a:ext>
+            </a:extLst>
+          </p:cNvPr>
+          <p:cNvPicPr>
+            <a:picLocks noChangeAspect="1"/>
+          </p:cNvPicPr>
+          <p:nvPr/>
+        </p:nvPicPr>
+        <p:blipFill>
+          <a:blip r:embed="rId4"/>
+          <a:stretch>
+            <a:fillRect/>
+          </a:stretch>
+        </p:blipFill>
+        <p:spPr>
+          <a:xfrm>
+            <a:off x="539552" y="5371712"/>
+            <a:ext cx="2800741" cy="323895"/>
+          </a:xfrm>
+          <a:prstGeom prst="rect">
+            <a:avLst/>
+          </a:prstGeom>
+        </p:spPr>
+      </p:pic>
+    </p:spTree>
+    <p:extLst>
+      <p:ext uri="{BB962C8B-B14F-4D97-AF65-F5344CB8AC3E}">
+        <p14:creationId xmlns:p14="http://schemas.microsoft.com/office/powerpoint/2010/main" val="1353309942"/>
+      </p:ext>
+    </p:extLst>
+  </p:cSld>
+  <p:clrMapOvr>
+    <a:masterClrMapping/>
+  </p:clrMapOvr>
 </p:sld>
 </file>
 
@@ -4563,10 +6348,9 @@
           <a:lstStyle/>
           <a:p>
             <a:r>
-              <a:rPr lang="fr-FR" dirty="0" smtClean="0"/>
+              <a:rPr lang="fr-FR" dirty="0"/>
               <a:t>Les structures de données</a:t>
             </a:r>
-            <a:endParaRPr lang="fr-FR" dirty="0"/>
           </a:p>
         </p:txBody>
       </p:sp>
@@ -4586,101 +6370,65 @@
           <a:lstStyle/>
           <a:p>
             <a:r>
-              <a:rPr lang="fr-FR" dirty="0" smtClean="0"/>
-              <a:t>Pandas </a:t>
-            </a:r>
-            <a:r>
-              <a:rPr lang="fr-FR" dirty="0"/>
-              <a:t>fournit </a:t>
-            </a:r>
-            <a:r>
-              <a:rPr lang="fr-FR" dirty="0" smtClean="0"/>
-              <a:t>2 structures </a:t>
-            </a:r>
-            <a:r>
-              <a:rPr lang="fr-FR" dirty="0"/>
-              <a:t>de données </a:t>
-            </a:r>
-            <a:r>
-              <a:rPr lang="fr-FR" dirty="0" smtClean="0"/>
-              <a:t>fondamentales</a:t>
+              <a:rPr lang="fr-FR" dirty="0"/>
+              <a:t>Pandas fournit 2 structures de données fondamentales</a:t>
             </a:r>
           </a:p>
           <a:p>
             <a:pPr lvl="1"/>
             <a:r>
-              <a:rPr lang="fr-FR" dirty="0" smtClean="0"/>
+              <a:rPr lang="fr-FR" dirty="0"/>
               <a:t>la </a:t>
             </a:r>
             <a:r>
-              <a:rPr lang="fr-FR" dirty="0" err="1" smtClean="0"/>
+              <a:rPr lang="fr-FR" dirty="0" err="1"/>
               <a:t>Series</a:t>
             </a:r>
             <a:r>
-              <a:rPr lang="fr-FR" dirty="0" smtClean="0"/>
-              <a:t> </a:t>
-            </a:r>
-            <a:r>
-              <a:rPr lang="fr-FR" dirty="0"/>
-              <a:t>et le </a:t>
-            </a:r>
-            <a:r>
-              <a:rPr lang="fr-FR" dirty="0" err="1" smtClean="0"/>
+              <a:rPr lang="fr-FR" dirty="0"/>
+              <a:t> et le </a:t>
+            </a:r>
+            <a:r>
+              <a:rPr lang="fr-FR" dirty="0" err="1"/>
               <a:t>DataFrame</a:t>
             </a:r>
             <a:r>
-              <a:rPr lang="fr-FR" dirty="0" smtClean="0"/>
+              <a:rPr lang="fr-FR" dirty="0"/>
               <a:t> </a:t>
             </a:r>
           </a:p>
           <a:p>
             <a:pPr lvl="1"/>
             <a:r>
-              <a:rPr lang="fr-FR" dirty="0" smtClean="0"/>
-              <a:t>On </a:t>
-            </a:r>
-            <a:r>
-              <a:rPr lang="fr-FR" dirty="0"/>
-              <a:t>peut voir ces structures comme une généralisation des tableaux et des matrices de </a:t>
-            </a:r>
-            <a:r>
-              <a:rPr lang="fr-FR" dirty="0" err="1" smtClean="0"/>
-              <a:t>Numpy</a:t>
-            </a:r>
-            <a:endParaRPr lang="fr-FR" dirty="0" smtClean="0"/>
-          </a:p>
-          <a:p>
-            <a:pPr lvl="1"/>
-            <a:r>
-              <a:rPr lang="fr-FR" dirty="0" smtClean="0"/>
-              <a:t>La </a:t>
-            </a:r>
-            <a:r>
-              <a:rPr lang="fr-FR" dirty="0"/>
-              <a:t>différence fondamentale entre ces structures et les versions de </a:t>
+              <a:rPr lang="fr-FR" dirty="0"/>
+              <a:t>On peut voir ces structures comme une généralisation des tableaux et des matrices de </a:t>
             </a:r>
             <a:r>
               <a:rPr lang="fr-FR" dirty="0" err="1"/>
               <a:t>Numpy</a:t>
             </a:r>
-            <a:r>
-              <a:rPr lang="fr-FR" dirty="0"/>
-              <a:t> est que les objets Pandas possèdent des indices </a:t>
-            </a:r>
-            <a:r>
-              <a:rPr lang="fr-FR" dirty="0" smtClean="0"/>
-              <a:t>explicites</a:t>
-            </a:r>
+            <a:endParaRPr lang="fr-FR" dirty="0"/>
           </a:p>
           <a:p>
             <a:pPr lvl="1"/>
             <a:r>
-              <a:rPr lang="fr-FR" dirty="0" smtClean="0"/>
-              <a:t>Là </a:t>
-            </a:r>
-            <a:r>
-              <a:rPr lang="fr-FR" dirty="0"/>
-              <a:t>où on ne pouvait se référer à un élément d'un tableau </a:t>
+              <a:rPr lang="fr-FR" dirty="0"/>
+              <a:t>La différence fondamentale entre ces structures et les versions de </a:t>
+            </a:r>
+            <a:r>
+              <a:rPr lang="fr-FR" dirty="0" err="1"/>
+              <a:t>Numpy</a:t>
+            </a:r>
+            <a:r>
+              <a:rPr lang="fr-FR" dirty="0"/>
+              <a:t> est que les objets Pandas possèdent des indices explicites</a:t>
+            </a:r>
+          </a:p>
+          <a:p>
+            <a:pPr lvl="1"/>
+            <a:r>
+              <a:rPr lang="fr-FR" dirty="0"/>
+              <a:t>Là où on ne pouvait se référer à un élément d'un tableau </a:t>
             </a:r>
             <a:r>
               <a:rPr lang="fr-FR" dirty="0" err="1"/>
@@ -4719,13 +6467,6 @@
   <p:clrMapOvr>
     <a:masterClrMapping/>
   </p:clrMapOvr>
-  <p:timing>
-    <p:tnLst>
-      <p:par>
-        <p:cTn id="1" dur="indefinite" restart="never" nodeType="tmRoot"/>
-      </p:par>
-    </p:tnLst>
-  </p:timing>
 </p:sld>
 </file>
 
@@ -4748,7 +6489,13 @@
       </p:grpSpPr>
       <p:sp>
         <p:nvSpPr>
-          <p:cNvPr id="2" name="Titre 1"/>
+          <p:cNvPr id="2" name="Titre 1">
+            <a:extLst>
+              <a:ext uri="{FF2B5EF4-FFF2-40B4-BE49-F238E27FC236}">
+                <a16:creationId xmlns:a16="http://schemas.microsoft.com/office/drawing/2014/main" id="{011882B2-D869-4903-AEBE-0F44D6AFF222}"/>
+              </a:ext>
+            </a:extLst>
+          </p:cNvPr>
           <p:cNvSpPr>
             <a:spLocks noGrp="1"/>
           </p:cNvSpPr>
@@ -4762,205 +6509,77 @@
           <a:lstStyle/>
           <a:p>
             <a:r>
-              <a:rPr lang="fr-FR" dirty="0" smtClean="0"/>
-              <a:t>Import de données</a:t>
-            </a:r>
-            <a:endParaRPr lang="fr-FR" dirty="0"/>
-          </a:p>
-        </p:txBody>
-      </p:sp>
-      <p:sp>
-        <p:nvSpPr>
-          <p:cNvPr id="3" name="Espace réservé du contenu 2"/>
-          <p:cNvSpPr>
-            <a:spLocks noGrp="1"/>
-          </p:cNvSpPr>
+              <a:rPr lang="fr-FR" dirty="0"/>
+              <a:t>Import des données</a:t>
+            </a:r>
+          </a:p>
+        </p:txBody>
+      </p:sp>
+      <p:pic>
+        <p:nvPicPr>
+          <p:cNvPr id="5" name="Espace réservé du contenu 4">
+            <a:extLst>
+              <a:ext uri="{FF2B5EF4-FFF2-40B4-BE49-F238E27FC236}">
+                <a16:creationId xmlns:a16="http://schemas.microsoft.com/office/drawing/2014/main" id="{B2081F70-5BFA-5A39-D477-13CA3FE281B0}"/>
+              </a:ext>
+            </a:extLst>
+          </p:cNvPr>
+          <p:cNvPicPr>
+            <a:picLocks noGrp="1" noChangeAspect="1"/>
+          </p:cNvPicPr>
           <p:nvPr>
             <p:ph idx="1"/>
           </p:nvPr>
-        </p:nvSpPr>
-        <p:spPr/>
-        <p:txBody>
-          <a:bodyPr/>
-          <a:lstStyle/>
-          <a:p>
-            <a:r>
-              <a:rPr lang="fr-FR" dirty="0" smtClean="0"/>
-              <a:t>Pandas possède une librairie très puissante pour importer des données depuis n’importe quelle source</a:t>
-            </a:r>
-          </a:p>
-          <a:p>
-            <a:pPr lvl="1"/>
-            <a:r>
-              <a:rPr lang="fr-FR" dirty="0" smtClean="0"/>
-              <a:t>Puis les converti en </a:t>
-            </a:r>
-            <a:r>
-              <a:rPr lang="fr-FR" dirty="0" err="1" smtClean="0"/>
-              <a:t>DataFrame</a:t>
-            </a:r>
-            <a:endParaRPr lang="fr-FR" dirty="0" smtClean="0"/>
-          </a:p>
-          <a:p>
-            <a:r>
-              <a:rPr lang="fr-FR" dirty="0" smtClean="0"/>
-              <a:t>CSV</a:t>
-            </a:r>
-          </a:p>
-          <a:p>
-            <a:pPr marL="457200" lvl="1" indent="0">
-              <a:buNone/>
-            </a:pPr>
-            <a:r>
-              <a:rPr lang="fr-FR" sz="2000" dirty="0" err="1">
-                <a:latin typeface="Courier New" panose="02070309020205020404" pitchFamily="49" charset="0"/>
-                <a:cs typeface="Courier New" panose="02070309020205020404" pitchFamily="49" charset="0"/>
-              </a:rPr>
-              <a:t>house_data</a:t>
-            </a:r>
-            <a:r>
-              <a:rPr lang="fr-FR" sz="2000" dirty="0">
-                <a:latin typeface="Courier New" panose="02070309020205020404" pitchFamily="49" charset="0"/>
-                <a:cs typeface="Courier New" panose="02070309020205020404" pitchFamily="49" charset="0"/>
-              </a:rPr>
-              <a:t> = </a:t>
-            </a:r>
-            <a:r>
-              <a:rPr lang="fr-FR" sz="2000" dirty="0" err="1">
-                <a:latin typeface="Courier New" panose="02070309020205020404" pitchFamily="49" charset="0"/>
-                <a:cs typeface="Courier New" panose="02070309020205020404" pitchFamily="49" charset="0"/>
-              </a:rPr>
-              <a:t>pd.read_csv</a:t>
-            </a:r>
-            <a:r>
-              <a:rPr lang="fr-FR" sz="2000" dirty="0">
-                <a:latin typeface="Courier New" panose="02070309020205020404" pitchFamily="49" charset="0"/>
-                <a:cs typeface="Courier New" panose="02070309020205020404" pitchFamily="49" charset="0"/>
-              </a:rPr>
-              <a:t>('house.csv')</a:t>
-            </a:r>
-          </a:p>
-          <a:p>
-            <a:pPr marL="457200" lvl="1" indent="0">
-              <a:buNone/>
-            </a:pPr>
-            <a:r>
-              <a:rPr lang="fr-FR" sz="2000" dirty="0" err="1" smtClean="0">
-                <a:latin typeface="Courier New" panose="02070309020205020404" pitchFamily="49" charset="0"/>
-                <a:cs typeface="Courier New" panose="02070309020205020404" pitchFamily="49" charset="0"/>
-              </a:rPr>
-              <a:t>plt.plot</a:t>
-            </a:r>
-            <a:r>
-              <a:rPr lang="fr-FR" sz="2000" dirty="0" smtClean="0">
-                <a:latin typeface="Courier New" panose="02070309020205020404" pitchFamily="49" charset="0"/>
-                <a:cs typeface="Courier New" panose="02070309020205020404" pitchFamily="49" charset="0"/>
-              </a:rPr>
-              <a:t>(</a:t>
-            </a:r>
-            <a:r>
-              <a:rPr lang="fr-FR" sz="2000" dirty="0" err="1" smtClean="0">
-                <a:latin typeface="Courier New" panose="02070309020205020404" pitchFamily="49" charset="0"/>
-                <a:cs typeface="Courier New" panose="02070309020205020404" pitchFamily="49" charset="0"/>
-              </a:rPr>
-              <a:t>house_data</a:t>
-            </a:r>
-            <a:r>
-              <a:rPr lang="fr-FR" sz="2000" dirty="0">
-                <a:latin typeface="Courier New" panose="02070309020205020404" pitchFamily="49" charset="0"/>
-                <a:cs typeface="Courier New" panose="02070309020205020404" pitchFamily="49" charset="0"/>
-              </a:rPr>
-              <a:t>['surface'], </a:t>
-            </a:r>
-            <a:r>
-              <a:rPr lang="fr-FR" sz="2000" dirty="0" err="1">
-                <a:latin typeface="Courier New" panose="02070309020205020404" pitchFamily="49" charset="0"/>
-                <a:cs typeface="Courier New" panose="02070309020205020404" pitchFamily="49" charset="0"/>
-              </a:rPr>
-              <a:t>house_data</a:t>
-            </a:r>
-            <a:r>
-              <a:rPr lang="fr-FR" sz="2000" dirty="0">
-                <a:latin typeface="Courier New" panose="02070309020205020404" pitchFamily="49" charset="0"/>
-                <a:cs typeface="Courier New" panose="02070309020205020404" pitchFamily="49" charset="0"/>
-              </a:rPr>
-              <a:t>['loyer'], '</a:t>
-            </a:r>
-            <a:r>
-              <a:rPr lang="fr-FR" sz="2000" dirty="0" err="1">
-                <a:latin typeface="Courier New" panose="02070309020205020404" pitchFamily="49" charset="0"/>
-                <a:cs typeface="Courier New" panose="02070309020205020404" pitchFamily="49" charset="0"/>
-              </a:rPr>
-              <a:t>ro</a:t>
-            </a:r>
-            <a:r>
-              <a:rPr lang="fr-FR" sz="2000" dirty="0">
-                <a:latin typeface="Courier New" panose="02070309020205020404" pitchFamily="49" charset="0"/>
-                <a:cs typeface="Courier New" panose="02070309020205020404" pitchFamily="49" charset="0"/>
-              </a:rPr>
-              <a:t>', </a:t>
-            </a:r>
-            <a:r>
-              <a:rPr lang="fr-FR" sz="2000" dirty="0" err="1">
-                <a:latin typeface="Courier New" panose="02070309020205020404" pitchFamily="49" charset="0"/>
-                <a:cs typeface="Courier New" panose="02070309020205020404" pitchFamily="49" charset="0"/>
-              </a:rPr>
-              <a:t>markersize</a:t>
-            </a:r>
-            <a:r>
-              <a:rPr lang="fr-FR" sz="2000" dirty="0">
-                <a:latin typeface="Courier New" panose="02070309020205020404" pitchFamily="49" charset="0"/>
-                <a:cs typeface="Courier New" panose="02070309020205020404" pitchFamily="49" charset="0"/>
-              </a:rPr>
-              <a:t>=4)</a:t>
-            </a:r>
-          </a:p>
-          <a:p>
-            <a:pPr marL="457200" lvl="1" indent="0">
-              <a:buNone/>
-            </a:pPr>
-            <a:r>
-              <a:rPr lang="fr-FR" sz="2000" dirty="0" err="1">
-                <a:latin typeface="Courier New" panose="02070309020205020404" pitchFamily="49" charset="0"/>
-                <a:cs typeface="Courier New" panose="02070309020205020404" pitchFamily="49" charset="0"/>
-              </a:rPr>
-              <a:t>plt.show</a:t>
-            </a:r>
-            <a:r>
-              <a:rPr lang="fr-FR" sz="2000" dirty="0">
-                <a:latin typeface="Courier New" panose="02070309020205020404" pitchFamily="49" charset="0"/>
-                <a:cs typeface="Courier New" panose="02070309020205020404" pitchFamily="49" charset="0"/>
-              </a:rPr>
-              <a:t>()</a:t>
-            </a:r>
-            <a:endParaRPr lang="fr-FR" sz="2000" dirty="0" smtClean="0">
-              <a:latin typeface="Courier New" panose="02070309020205020404" pitchFamily="49" charset="0"/>
-              <a:cs typeface="Courier New" panose="02070309020205020404" pitchFamily="49" charset="0"/>
-            </a:endParaRPr>
-          </a:p>
-          <a:p>
-            <a:pPr lvl="1"/>
-            <a:endParaRPr lang="fr-FR" dirty="0"/>
-          </a:p>
-        </p:txBody>
-      </p:sp>
+        </p:nvPicPr>
+        <p:blipFill>
+          <a:blip r:embed="rId2"/>
+          <a:stretch>
+            <a:fillRect/>
+          </a:stretch>
+        </p:blipFill>
+        <p:spPr bwMode="auto">
+          <a:xfrm>
+            <a:off x="179388" y="2495798"/>
+            <a:ext cx="8766175" cy="2874467"/>
+          </a:xfrm>
+          <a:prstGeom prst="rect">
+            <a:avLst/>
+          </a:prstGeom>
+          <a:noFill/>
+          <a:ln>
+            <a:noFill/>
+          </a:ln>
+          <a:extLst>
+            <a:ext uri="{909E8E84-426E-40DD-AFC4-6F175D3DCCD1}">
+              <a14:hiddenFill xmlns:a14="http://schemas.microsoft.com/office/drawing/2010/main">
+                <a:solidFill>
+                  <a:srgbClr val="FFFFFF"/>
+                </a:solidFill>
+              </a14:hiddenFill>
+            </a:ext>
+            <a:ext uri="{91240B29-F687-4F45-9708-019B960494DF}">
+              <a14:hiddenLine xmlns:a14="http://schemas.microsoft.com/office/drawing/2010/main" w="9525">
+                <a:solidFill>
+                  <a:srgbClr val="000000"/>
+                </a:solidFill>
+                <a:miter lim="800000"/>
+                <a:headEnd/>
+                <a:tailEnd/>
+              </a14:hiddenLine>
+            </a:ext>
+          </a:extLst>
+        </p:spPr>
+      </p:pic>
     </p:spTree>
     <p:extLst>
       <p:ext uri="{BB962C8B-B14F-4D97-AF65-F5344CB8AC3E}">
-        <p14:creationId xmlns:p14="http://schemas.microsoft.com/office/powerpoint/2010/main" val="3356451382"/>
+        <p14:creationId xmlns:p14="http://schemas.microsoft.com/office/powerpoint/2010/main" val="1554909351"/>
       </p:ext>
     </p:extLst>
   </p:cSld>
   <p:clrMapOvr>
     <a:masterClrMapping/>
   </p:clrMapOvr>
-  <p:timing>
-    <p:tnLst>
-      <p:par>
-        <p:cTn id="1" dur="indefinite" restart="never" nodeType="tmRoot"/>
-      </p:par>
-    </p:tnLst>
-  </p:timing>
 </p:sld>
 </file>
 
@@ -4997,10 +6616,9 @@
           <a:lstStyle/>
           <a:p>
             <a:r>
-              <a:rPr lang="fr-FR" dirty="0" smtClean="0"/>
+              <a:rPr lang="fr-FR" dirty="0"/>
               <a:t>Import de données</a:t>
             </a:r>
-            <a:endParaRPr lang="fr-FR" dirty="0"/>
           </a:p>
         </p:txBody>
       </p:sp>
@@ -5020,8 +6638,26 @@
           <a:lstStyle/>
           <a:p>
             <a:r>
-              <a:rPr lang="fr-FR" dirty="0" smtClean="0"/>
-              <a:t>SQL</a:t>
+              <a:rPr lang="fr-FR" dirty="0"/>
+              <a:t>Pandas possède une librairie très puissante pour importer des données depuis n’importe quelle source</a:t>
+            </a:r>
+          </a:p>
+          <a:p>
+            <a:pPr lvl="1"/>
+            <a:r>
+              <a:rPr lang="fr-FR" dirty="0"/>
+              <a:t>Puis les converti en </a:t>
+            </a:r>
+            <a:r>
+              <a:rPr lang="fr-FR" dirty="0" err="1"/>
+              <a:t>DataFrame</a:t>
+            </a:r>
+            <a:endParaRPr lang="fr-FR" dirty="0"/>
+          </a:p>
+          <a:p>
+            <a:r>
+              <a:rPr lang="fr-FR" dirty="0"/>
+              <a:t>CSV</a:t>
             </a:r>
           </a:p>
           <a:p>
@@ -5029,144 +6665,11 @@
               <a:buNone/>
             </a:pPr>
             <a:r>
-              <a:rPr lang="en-US" sz="2000" dirty="0">
-                <a:latin typeface="Courier New" panose="02070309020205020404" pitchFamily="49" charset="0"/>
-                <a:cs typeface="Courier New" panose="02070309020205020404" pitchFamily="49" charset="0"/>
-              </a:rPr>
-              <a:t>with sqlite3.connect("house.db3") as conn:</a:t>
-            </a:r>
-          </a:p>
-          <a:p>
-            <a:pPr marL="457200" lvl="1" indent="0">
-              <a:buNone/>
-            </a:pPr>
-            <a:r>
-              <a:rPr lang="en-US" sz="2000" dirty="0">
-                <a:latin typeface="Courier New" panose="02070309020205020404" pitchFamily="49" charset="0"/>
-                <a:cs typeface="Courier New" panose="02070309020205020404" pitchFamily="49" charset="0"/>
-              </a:rPr>
-              <a:t>    </a:t>
-            </a:r>
-            <a:r>
-              <a:rPr lang="en-US" sz="2000" dirty="0" err="1">
+              <a:rPr lang="fr-FR" sz="2000" dirty="0" err="1">
                 <a:latin typeface="Courier New" panose="02070309020205020404" pitchFamily="49" charset="0"/>
                 <a:cs typeface="Courier New" panose="02070309020205020404" pitchFamily="49" charset="0"/>
               </a:rPr>
               <a:t>house_data</a:t>
-            </a:r>
-            <a:r>
-              <a:rPr lang="en-US" sz="2000" dirty="0">
-                <a:latin typeface="Courier New" panose="02070309020205020404" pitchFamily="49" charset="0"/>
-                <a:cs typeface="Courier New" panose="02070309020205020404" pitchFamily="49" charset="0"/>
-              </a:rPr>
-              <a:t> = </a:t>
-            </a:r>
-            <a:r>
-              <a:rPr lang="en-US" sz="2000" dirty="0" err="1">
-                <a:latin typeface="Courier New" panose="02070309020205020404" pitchFamily="49" charset="0"/>
-                <a:cs typeface="Courier New" panose="02070309020205020404" pitchFamily="49" charset="0"/>
-              </a:rPr>
-              <a:t>pd.read_sql</a:t>
-            </a:r>
-            <a:r>
-              <a:rPr lang="en-US" sz="2000" dirty="0">
-                <a:latin typeface="Courier New" panose="02070309020205020404" pitchFamily="49" charset="0"/>
-                <a:cs typeface="Courier New" panose="02070309020205020404" pitchFamily="49" charset="0"/>
-              </a:rPr>
-              <a:t>('select </a:t>
-            </a:r>
-            <a:r>
-              <a:rPr lang="en-US" sz="2000" dirty="0" err="1">
-                <a:latin typeface="Courier New" panose="02070309020205020404" pitchFamily="49" charset="0"/>
-                <a:cs typeface="Courier New" panose="02070309020205020404" pitchFamily="49" charset="0"/>
-              </a:rPr>
-              <a:t>loyer,surface</a:t>
-            </a:r>
-            <a:r>
-              <a:rPr lang="en-US" sz="2000" dirty="0">
-                <a:latin typeface="Courier New" panose="02070309020205020404" pitchFamily="49" charset="0"/>
-                <a:cs typeface="Courier New" panose="02070309020205020404" pitchFamily="49" charset="0"/>
-              </a:rPr>
-              <a:t> from house', conn</a:t>
-            </a:r>
-            <a:r>
-              <a:rPr lang="en-US" sz="2000" dirty="0" smtClean="0">
-                <a:latin typeface="Courier New" panose="02070309020205020404" pitchFamily="49" charset="0"/>
-                <a:cs typeface="Courier New" panose="02070309020205020404" pitchFamily="49" charset="0"/>
-              </a:rPr>
-              <a:t>)</a:t>
-            </a:r>
-          </a:p>
-          <a:p>
-            <a:r>
-              <a:rPr lang="fr-FR" dirty="0" smtClean="0"/>
-              <a:t>Mongo DB</a:t>
-            </a:r>
-          </a:p>
-          <a:p>
-            <a:pPr marL="457200" lvl="1" indent="0">
-              <a:buNone/>
-            </a:pPr>
-            <a:r>
-              <a:rPr lang="fr-FR" sz="2000" dirty="0" err="1">
-                <a:latin typeface="Courier New" panose="02070309020205020404" pitchFamily="49" charset="0"/>
-                <a:cs typeface="Courier New" panose="02070309020205020404" pitchFamily="49" charset="0"/>
-              </a:rPr>
-              <a:t>with</a:t>
-            </a:r>
-            <a:r>
-              <a:rPr lang="fr-FR" sz="2000" dirty="0">
-                <a:latin typeface="Courier New" panose="02070309020205020404" pitchFamily="49" charset="0"/>
-                <a:cs typeface="Courier New" panose="02070309020205020404" pitchFamily="49" charset="0"/>
-              </a:rPr>
-              <a:t> </a:t>
-            </a:r>
-            <a:r>
-              <a:rPr lang="fr-FR" sz="2000" dirty="0" err="1">
-                <a:latin typeface="Courier New" panose="02070309020205020404" pitchFamily="49" charset="0"/>
-                <a:cs typeface="Courier New" panose="02070309020205020404" pitchFamily="49" charset="0"/>
-              </a:rPr>
-              <a:t>pymongo.MongoClient</a:t>
-            </a:r>
-            <a:r>
-              <a:rPr lang="fr-FR" sz="2000" dirty="0">
-                <a:latin typeface="Courier New" panose="02070309020205020404" pitchFamily="49" charset="0"/>
-                <a:cs typeface="Courier New" panose="02070309020205020404" pitchFamily="49" charset="0"/>
-              </a:rPr>
-              <a:t>('</a:t>
-            </a:r>
-            <a:r>
-              <a:rPr lang="fr-FR" sz="2000" dirty="0" err="1">
-                <a:latin typeface="Courier New" panose="02070309020205020404" pitchFamily="49" charset="0"/>
-                <a:cs typeface="Courier New" panose="02070309020205020404" pitchFamily="49" charset="0"/>
-              </a:rPr>
-              <a:t>localhost</a:t>
-            </a:r>
-            <a:r>
-              <a:rPr lang="fr-FR" sz="2000" dirty="0">
-                <a:latin typeface="Courier New" panose="02070309020205020404" pitchFamily="49" charset="0"/>
-                <a:cs typeface="Courier New" panose="02070309020205020404" pitchFamily="49" charset="0"/>
-              </a:rPr>
-              <a:t>', 27017) as client:</a:t>
-            </a:r>
-          </a:p>
-          <a:p>
-            <a:pPr marL="457200" lvl="1" indent="0">
-              <a:buNone/>
-            </a:pPr>
-            <a:r>
-              <a:rPr lang="fr-FR" sz="2000" dirty="0">
-                <a:latin typeface="Courier New" panose="02070309020205020404" pitchFamily="49" charset="0"/>
-                <a:cs typeface="Courier New" panose="02070309020205020404" pitchFamily="49" charset="0"/>
-              </a:rPr>
-              <a:t>    </a:t>
-            </a:r>
-            <a:r>
-              <a:rPr lang="fr-FR" sz="2000" dirty="0" err="1">
-                <a:latin typeface="Courier New" panose="02070309020205020404" pitchFamily="49" charset="0"/>
-                <a:cs typeface="Courier New" panose="02070309020205020404" pitchFamily="49" charset="0"/>
-              </a:rPr>
-              <a:t>db</a:t>
             </a:r>
             <a:r>
               <a:rPr lang="fr-FR" sz="2000" dirty="0">
@@ -5180,44 +6683,101 @@
                 <a:latin typeface="Courier New" panose="02070309020205020404" pitchFamily="49" charset="0"/>
                 <a:cs typeface="Courier New" panose="02070309020205020404" pitchFamily="49" charset="0"/>
               </a:rPr>
-              <a:t>client.test</a:t>
-            </a:r>
-            <a:endParaRPr lang="fr-FR" sz="2000" dirty="0">
-              <a:latin typeface="Courier New" panose="02070309020205020404" pitchFamily="49" charset="0"/>
-              <a:cs typeface="Courier New" panose="02070309020205020404" pitchFamily="49" charset="0"/>
-            </a:endParaRPr>
-          </a:p>
-          <a:p>
-            <a:pPr marL="457200" lvl="1" indent="0">
-              <a:buNone/>
-            </a:pPr>
+              <a:t>pd.read_csv</a:t>
+            </a:r>
             <a:r>
               <a:rPr lang="fr-FR" sz="2000" dirty="0">
                 <a:latin typeface="Courier New" panose="02070309020205020404" pitchFamily="49" charset="0"/>
                 <a:cs typeface="Courier New" panose="02070309020205020404" pitchFamily="49" charset="0"/>
               </a:rPr>
-              <a:t>    </a:t>
-            </a:r>
+              <a:t>('house.csv')</a:t>
+            </a:r>
+          </a:p>
+          <a:p>
+            <a:pPr marL="457200" lvl="1" indent="0">
+              <a:buNone/>
+            </a:pPr>
             <a:r>
               <a:rPr lang="fr-FR" sz="2000" dirty="0" err="1">
                 <a:latin typeface="Courier New" panose="02070309020205020404" pitchFamily="49" charset="0"/>
                 <a:cs typeface="Courier New" panose="02070309020205020404" pitchFamily="49" charset="0"/>
               </a:rPr>
-              <a:t>cursor</a:t>
+              <a:t>plt.plot</a:t>
             </a:r>
             <a:r>
               <a:rPr lang="fr-FR" sz="2000" dirty="0">
                 <a:latin typeface="Courier New" panose="02070309020205020404" pitchFamily="49" charset="0"/>
                 <a:cs typeface="Courier New" panose="02070309020205020404" pitchFamily="49" charset="0"/>
               </a:rPr>
-              <a:t> = </a:t>
+              <a:t>(</a:t>
             </a:r>
             <a:r>
               <a:rPr lang="fr-FR" sz="2000" dirty="0" err="1">
                 <a:latin typeface="Courier New" panose="02070309020205020404" pitchFamily="49" charset="0"/>
                 <a:cs typeface="Courier New" panose="02070309020205020404" pitchFamily="49" charset="0"/>
               </a:rPr>
-              <a:t>db.house.find</a:t>
+              <a:t>house_data</a:t>
+            </a:r>
+            <a:r>
+              <a:rPr lang="fr-FR" sz="2000" dirty="0">
+                <a:latin typeface="Courier New" panose="02070309020205020404" pitchFamily="49" charset="0"/>
+                <a:cs typeface="Courier New" panose="02070309020205020404" pitchFamily="49" charset="0"/>
+              </a:rPr>
+              <a:t>['surface'], </a:t>
+            </a:r>
+            <a:r>
+              <a:rPr lang="fr-FR" sz="2000" dirty="0" err="1">
+                <a:latin typeface="Courier New" panose="02070309020205020404" pitchFamily="49" charset="0"/>
+                <a:cs typeface="Courier New" panose="02070309020205020404" pitchFamily="49" charset="0"/>
+              </a:rPr>
+              <a:t>house_data</a:t>
+            </a:r>
+            <a:r>
+              <a:rPr lang="fr-FR" sz="2000" dirty="0">
+                <a:latin typeface="Courier New" panose="02070309020205020404" pitchFamily="49" charset="0"/>
+                <a:cs typeface="Courier New" panose="02070309020205020404" pitchFamily="49" charset="0"/>
+              </a:rPr>
+              <a:t>['loyer'], '</a:t>
+            </a:r>
+            <a:r>
+              <a:rPr lang="fr-FR" sz="2000" dirty="0" err="1">
+                <a:latin typeface="Courier New" panose="02070309020205020404" pitchFamily="49" charset="0"/>
+                <a:cs typeface="Courier New" panose="02070309020205020404" pitchFamily="49" charset="0"/>
+              </a:rPr>
+              <a:t>ro</a:t>
+            </a:r>
+            <a:r>
+              <a:rPr lang="fr-FR" sz="2000" dirty="0">
+                <a:latin typeface="Courier New" panose="02070309020205020404" pitchFamily="49" charset="0"/>
+                <a:cs typeface="Courier New" panose="02070309020205020404" pitchFamily="49" charset="0"/>
+              </a:rPr>
+              <a:t>', </a:t>
+            </a:r>
+            <a:r>
+              <a:rPr lang="fr-FR" sz="2000" dirty="0" err="1">
+                <a:latin typeface="Courier New" panose="02070309020205020404" pitchFamily="49" charset="0"/>
+                <a:cs typeface="Courier New" panose="02070309020205020404" pitchFamily="49" charset="0"/>
+              </a:rPr>
+              <a:t>markersize</a:t>
+            </a:r>
+            <a:r>
+              <a:rPr lang="fr-FR" sz="2000" dirty="0">
+                <a:latin typeface="Courier New" panose="02070309020205020404" pitchFamily="49" charset="0"/>
+                <a:cs typeface="Courier New" panose="02070309020205020404" pitchFamily="49" charset="0"/>
+              </a:rPr>
+              <a:t>=4)</a:t>
+            </a:r>
+          </a:p>
+          <a:p>
+            <a:pPr marL="457200" lvl="1" indent="0">
+              <a:buNone/>
+            </a:pPr>
+            <a:r>
+              <a:rPr lang="fr-FR" sz="2000" dirty="0" err="1">
+                <a:latin typeface="Courier New" panose="02070309020205020404" pitchFamily="49" charset="0"/>
+                <a:cs typeface="Courier New" panose="02070309020205020404" pitchFamily="49" charset="0"/>
+              </a:rPr>
+              <a:t>plt.show</a:t>
             </a:r>
             <a:r>
               <a:rPr lang="fr-FR" sz="2000" dirty="0">
@@ -5228,101 +6788,21 @@
             </a:r>
           </a:p>
           <a:p>
-            <a:pPr marL="457200" lvl="1" indent="0">
-              <a:buNone/>
-            </a:pPr>
-            <a:r>
-              <a:rPr lang="fr-FR" sz="2000" dirty="0">
-                <a:latin typeface="Courier New" panose="02070309020205020404" pitchFamily="49" charset="0"/>
-                <a:cs typeface="Courier New" panose="02070309020205020404" pitchFamily="49" charset="0"/>
-              </a:rPr>
-              <a:t>    </a:t>
-            </a:r>
-            <a:r>
-              <a:rPr lang="fr-FR" sz="2000" dirty="0" err="1">
-                <a:latin typeface="Courier New" panose="02070309020205020404" pitchFamily="49" charset="0"/>
-                <a:cs typeface="Courier New" panose="02070309020205020404" pitchFamily="49" charset="0"/>
-              </a:rPr>
-              <a:t>house_data</a:t>
-            </a:r>
-            <a:r>
-              <a:rPr lang="fr-FR" sz="2000" dirty="0">
-                <a:latin typeface="Courier New" panose="02070309020205020404" pitchFamily="49" charset="0"/>
-                <a:cs typeface="Courier New" panose="02070309020205020404" pitchFamily="49" charset="0"/>
-              </a:rPr>
-              <a:t> = </a:t>
-            </a:r>
-            <a:r>
-              <a:rPr lang="fr-FR" sz="2000" dirty="0" err="1">
-                <a:latin typeface="Courier New" panose="02070309020205020404" pitchFamily="49" charset="0"/>
-                <a:cs typeface="Courier New" panose="02070309020205020404" pitchFamily="49" charset="0"/>
-              </a:rPr>
-              <a:t>pd.DataFrame</a:t>
-            </a:r>
-            <a:r>
-              <a:rPr lang="fr-FR" sz="2000" dirty="0">
-                <a:latin typeface="Courier New" panose="02070309020205020404" pitchFamily="49" charset="0"/>
-                <a:cs typeface="Courier New" panose="02070309020205020404" pitchFamily="49" charset="0"/>
-              </a:rPr>
-              <a:t>(</a:t>
-            </a:r>
-            <a:r>
-              <a:rPr lang="fr-FR" sz="2000" dirty="0" err="1">
-                <a:latin typeface="Courier New" panose="02070309020205020404" pitchFamily="49" charset="0"/>
-                <a:cs typeface="Courier New" panose="02070309020205020404" pitchFamily="49" charset="0"/>
-              </a:rPr>
-              <a:t>list</a:t>
-            </a:r>
-            <a:r>
-              <a:rPr lang="fr-FR" sz="2000" dirty="0">
-                <a:latin typeface="Courier New" panose="02070309020205020404" pitchFamily="49" charset="0"/>
-                <a:cs typeface="Courier New" panose="02070309020205020404" pitchFamily="49" charset="0"/>
-              </a:rPr>
-              <a:t>(</a:t>
-            </a:r>
-            <a:r>
-              <a:rPr lang="fr-FR" sz="2000" dirty="0" err="1">
-                <a:latin typeface="Courier New" panose="02070309020205020404" pitchFamily="49" charset="0"/>
-                <a:cs typeface="Courier New" panose="02070309020205020404" pitchFamily="49" charset="0"/>
-              </a:rPr>
-              <a:t>cursor</a:t>
-            </a:r>
-            <a:r>
-              <a:rPr lang="fr-FR" sz="2000" dirty="0">
-                <a:latin typeface="Courier New" panose="02070309020205020404" pitchFamily="49" charset="0"/>
-                <a:cs typeface="Courier New" panose="02070309020205020404" pitchFamily="49" charset="0"/>
-              </a:rPr>
-              <a:t>))</a:t>
-            </a:r>
-          </a:p>
-          <a:p>
-            <a:pPr marL="457200" lvl="1" indent="0">
-              <a:buNone/>
-            </a:pPr>
-            <a:endParaRPr lang="en-US" sz="2000" dirty="0" smtClean="0">
-              <a:latin typeface="Courier New" panose="02070309020205020404" pitchFamily="49" charset="0"/>
-              <a:cs typeface="Courier New" panose="02070309020205020404" pitchFamily="49" charset="0"/>
-            </a:endParaRPr>
+            <a:pPr lvl="1"/>
+            <a:endParaRPr lang="fr-FR" dirty="0"/>
           </a:p>
         </p:txBody>
       </p:sp>
     </p:spTree>
     <p:extLst>
       <p:ext uri="{BB962C8B-B14F-4D97-AF65-F5344CB8AC3E}">
-        <p14:creationId xmlns:p14="http://schemas.microsoft.com/office/powerpoint/2010/main" val="1488125564"/>
+        <p14:creationId xmlns:p14="http://schemas.microsoft.com/office/powerpoint/2010/main" val="3356451382"/>
       </p:ext>
     </p:extLst>
   </p:cSld>
   <p:clrMapOvr>
     <a:masterClrMapping/>
   </p:clrMapOvr>
-  <p:timing>
-    <p:tnLst>
-      <p:par>
-        <p:cTn id="1" dur="indefinite" restart="never" nodeType="tmRoot"/>
-      </p:par>
-    </p:tnLst>
-  </p:timing>
 </p:sld>
 </file>
 
@@ -5359,10 +6839,9 @@
           <a:lstStyle/>
           <a:p>
             <a:r>
-              <a:rPr lang="fr-FR" dirty="0" smtClean="0"/>
-              <a:t>Filtrage</a:t>
-            </a:r>
-            <a:endParaRPr lang="fr-FR" dirty="0"/>
+              <a:rPr lang="fr-FR" dirty="0"/>
+              <a:t>Import de données</a:t>
+            </a:r>
           </a:p>
         </p:txBody>
       </p:sp>
@@ -5382,83 +6861,295 @@
           <a:lstStyle/>
           <a:p>
             <a:r>
-              <a:rPr lang="fr-FR" dirty="0" smtClean="0"/>
-              <a:t>Il faut pouvoir enlever les données aberrante</a:t>
-            </a:r>
-          </a:p>
-          <a:p>
-            <a:r>
-              <a:rPr lang="fr-FR" dirty="0" smtClean="0"/>
-              <a:t>Ou les données non significatives</a:t>
-            </a:r>
-          </a:p>
-          <a:p>
-            <a:r>
-              <a:rPr lang="fr-FR" dirty="0" smtClean="0"/>
-              <a:t>Ou les données trop en dehors de l’écart type</a:t>
-            </a:r>
-            <a:endParaRPr lang="fr-FR" dirty="0"/>
-          </a:p>
-        </p:txBody>
-      </p:sp>
-      <p:pic>
-        <p:nvPicPr>
-          <p:cNvPr id="1026" name="Picture 2" descr="Comment détecter des événements rares comme le point rouge?"/>
-          <p:cNvPicPr>
-            <a:picLocks noChangeAspect="1" noChangeArrowheads="1"/>
-          </p:cNvPicPr>
-          <p:nvPr/>
-        </p:nvPicPr>
-        <p:blipFill>
-          <a:blip r:embed="rId2">
-            <a:extLst>
-              <a:ext uri="{28A0092B-C50C-407E-A947-70E740481C1C}">
-                <a14:useLocalDpi xmlns:a14="http://schemas.microsoft.com/office/drawing/2010/main" val="0"/>
-              </a:ext>
-            </a:extLst>
-          </a:blip>
-          <a:srcRect/>
-          <a:stretch>
-            <a:fillRect/>
-          </a:stretch>
-        </p:blipFill>
-        <p:spPr bwMode="auto">
-          <a:xfrm>
-            <a:off x="2195736" y="3284984"/>
-            <a:ext cx="4286250" cy="3000376"/>
-          </a:xfrm>
-          <a:prstGeom prst="rect">
-            <a:avLst/>
-          </a:prstGeom>
-          <a:noFill/>
-          <a:extLst>
-            <a:ext uri="{909E8E84-426E-40DD-AFC4-6F175D3DCCD1}">
-              <a14:hiddenFill xmlns:a14="http://schemas.microsoft.com/office/drawing/2010/main">
-                <a:solidFill>
-                  <a:srgbClr val="FFFFFF"/>
-                </a:solidFill>
-              </a14:hiddenFill>
-            </a:ext>
-          </a:extLst>
-        </p:spPr>
-      </p:pic>
+              <a:rPr lang="fr-FR" dirty="0"/>
+              <a:t>SQL</a:t>
+            </a:r>
+          </a:p>
+          <a:p>
+            <a:pPr marL="457200" lvl="1" indent="0">
+              <a:buNone/>
+            </a:pPr>
+            <a:r>
+              <a:rPr lang="en-US" sz="2000" dirty="0">
+                <a:latin typeface="Courier New" panose="02070309020205020404" pitchFamily="49" charset="0"/>
+                <a:cs typeface="Courier New" panose="02070309020205020404" pitchFamily="49" charset="0"/>
+              </a:rPr>
+              <a:t>with sqlite3.connect("house.db3") as conn:</a:t>
+            </a:r>
+          </a:p>
+          <a:p>
+            <a:pPr marL="457200" lvl="1" indent="0">
+              <a:buNone/>
+            </a:pPr>
+            <a:r>
+              <a:rPr lang="en-US" sz="2000" dirty="0">
+                <a:latin typeface="Courier New" panose="02070309020205020404" pitchFamily="49" charset="0"/>
+                <a:cs typeface="Courier New" panose="02070309020205020404" pitchFamily="49" charset="0"/>
+              </a:rPr>
+              <a:t>    </a:t>
+            </a:r>
+            <a:r>
+              <a:rPr lang="en-US" sz="2000" dirty="0" err="1">
+                <a:latin typeface="Courier New" panose="02070309020205020404" pitchFamily="49" charset="0"/>
+                <a:cs typeface="Courier New" panose="02070309020205020404" pitchFamily="49" charset="0"/>
+              </a:rPr>
+              <a:t>house_data</a:t>
+            </a:r>
+            <a:r>
+              <a:rPr lang="en-US" sz="2000" dirty="0">
+                <a:latin typeface="Courier New" panose="02070309020205020404" pitchFamily="49" charset="0"/>
+                <a:cs typeface="Courier New" panose="02070309020205020404" pitchFamily="49" charset="0"/>
+              </a:rPr>
+              <a:t> = </a:t>
+            </a:r>
+            <a:r>
+              <a:rPr lang="en-US" sz="2000" dirty="0" err="1">
+                <a:latin typeface="Courier New" panose="02070309020205020404" pitchFamily="49" charset="0"/>
+                <a:cs typeface="Courier New" panose="02070309020205020404" pitchFamily="49" charset="0"/>
+              </a:rPr>
+              <a:t>pd.read_sql</a:t>
+            </a:r>
+            <a:r>
+              <a:rPr lang="en-US" sz="2000" dirty="0">
+                <a:latin typeface="Courier New" panose="02070309020205020404" pitchFamily="49" charset="0"/>
+                <a:cs typeface="Courier New" panose="02070309020205020404" pitchFamily="49" charset="0"/>
+              </a:rPr>
+              <a:t>('select </a:t>
+            </a:r>
+            <a:r>
+              <a:rPr lang="en-US" sz="2000" dirty="0" err="1">
+                <a:latin typeface="Courier New" panose="02070309020205020404" pitchFamily="49" charset="0"/>
+                <a:cs typeface="Courier New" panose="02070309020205020404" pitchFamily="49" charset="0"/>
+              </a:rPr>
+              <a:t>loyer,surface</a:t>
+            </a:r>
+            <a:r>
+              <a:rPr lang="en-US" sz="2000" dirty="0">
+                <a:latin typeface="Courier New" panose="02070309020205020404" pitchFamily="49" charset="0"/>
+                <a:cs typeface="Courier New" panose="02070309020205020404" pitchFamily="49" charset="0"/>
+              </a:rPr>
+              <a:t> from house', conn)</a:t>
+            </a:r>
+          </a:p>
+          <a:p>
+            <a:r>
+              <a:rPr lang="fr-FR" dirty="0"/>
+              <a:t>Mongo DB</a:t>
+            </a:r>
+          </a:p>
+          <a:p>
+            <a:pPr marL="457200" lvl="1" indent="0">
+              <a:buNone/>
+            </a:pPr>
+            <a:r>
+              <a:rPr lang="fr-FR" sz="2000" dirty="0" err="1">
+                <a:latin typeface="Courier New" panose="02070309020205020404" pitchFamily="49" charset="0"/>
+                <a:cs typeface="Courier New" panose="02070309020205020404" pitchFamily="49" charset="0"/>
+              </a:rPr>
+              <a:t>with</a:t>
+            </a:r>
+            <a:r>
+              <a:rPr lang="fr-FR" sz="2000" dirty="0">
+                <a:latin typeface="Courier New" panose="02070309020205020404" pitchFamily="49" charset="0"/>
+                <a:cs typeface="Courier New" panose="02070309020205020404" pitchFamily="49" charset="0"/>
+              </a:rPr>
+              <a:t> </a:t>
+            </a:r>
+            <a:r>
+              <a:rPr lang="fr-FR" sz="2000" dirty="0" err="1">
+                <a:latin typeface="Courier New" panose="02070309020205020404" pitchFamily="49" charset="0"/>
+                <a:cs typeface="Courier New" panose="02070309020205020404" pitchFamily="49" charset="0"/>
+              </a:rPr>
+              <a:t>pymongo.MongoClient</a:t>
+            </a:r>
+            <a:r>
+              <a:rPr lang="fr-FR" sz="2000" dirty="0">
+                <a:latin typeface="Courier New" panose="02070309020205020404" pitchFamily="49" charset="0"/>
+                <a:cs typeface="Courier New" panose="02070309020205020404" pitchFamily="49" charset="0"/>
+              </a:rPr>
+              <a:t>('</a:t>
+            </a:r>
+            <a:r>
+              <a:rPr lang="fr-FR" sz="2000" dirty="0" err="1">
+                <a:latin typeface="Courier New" panose="02070309020205020404" pitchFamily="49" charset="0"/>
+                <a:cs typeface="Courier New" panose="02070309020205020404" pitchFamily="49" charset="0"/>
+              </a:rPr>
+              <a:t>localhost</a:t>
+            </a:r>
+            <a:r>
+              <a:rPr lang="fr-FR" sz="2000" dirty="0">
+                <a:latin typeface="Courier New" panose="02070309020205020404" pitchFamily="49" charset="0"/>
+                <a:cs typeface="Courier New" panose="02070309020205020404" pitchFamily="49" charset="0"/>
+              </a:rPr>
+              <a:t>', 27017) as client:</a:t>
+            </a:r>
+          </a:p>
+          <a:p>
+            <a:pPr marL="457200" lvl="1" indent="0">
+              <a:buNone/>
+            </a:pPr>
+            <a:r>
+              <a:rPr lang="fr-FR" sz="2000" dirty="0">
+                <a:latin typeface="Courier New" panose="02070309020205020404" pitchFamily="49" charset="0"/>
+                <a:cs typeface="Courier New" panose="02070309020205020404" pitchFamily="49" charset="0"/>
+              </a:rPr>
+              <a:t>    </a:t>
+            </a:r>
+            <a:r>
+              <a:rPr lang="fr-FR" sz="2000" dirty="0" err="1">
+                <a:latin typeface="Courier New" panose="02070309020205020404" pitchFamily="49" charset="0"/>
+                <a:cs typeface="Courier New" panose="02070309020205020404" pitchFamily="49" charset="0"/>
+              </a:rPr>
+              <a:t>db</a:t>
+            </a:r>
+            <a:r>
+              <a:rPr lang="fr-FR" sz="2000" dirty="0">
+                <a:latin typeface="Courier New" panose="02070309020205020404" pitchFamily="49" charset="0"/>
+                <a:cs typeface="Courier New" panose="02070309020205020404" pitchFamily="49" charset="0"/>
+              </a:rPr>
+              <a:t> = </a:t>
+            </a:r>
+            <a:r>
+              <a:rPr lang="fr-FR" sz="2000" dirty="0" err="1">
+                <a:latin typeface="Courier New" panose="02070309020205020404" pitchFamily="49" charset="0"/>
+                <a:cs typeface="Courier New" panose="02070309020205020404" pitchFamily="49" charset="0"/>
+              </a:rPr>
+              <a:t>client.test</a:t>
+            </a:r>
+            <a:endParaRPr lang="fr-FR" sz="2000" dirty="0">
+              <a:latin typeface="Courier New" panose="02070309020205020404" pitchFamily="49" charset="0"/>
+              <a:cs typeface="Courier New" panose="02070309020205020404" pitchFamily="49" charset="0"/>
+            </a:endParaRPr>
+          </a:p>
+          <a:p>
+            <a:pPr marL="457200" lvl="1" indent="0">
+              <a:buNone/>
+            </a:pPr>
+            <a:r>
+              <a:rPr lang="fr-FR" sz="2000" dirty="0">
+                <a:latin typeface="Courier New" panose="02070309020205020404" pitchFamily="49" charset="0"/>
+                <a:cs typeface="Courier New" panose="02070309020205020404" pitchFamily="49" charset="0"/>
+              </a:rPr>
+              <a:t>    </a:t>
+            </a:r>
+            <a:r>
+              <a:rPr lang="fr-FR" sz="2000" dirty="0" err="1">
+                <a:latin typeface="Courier New" panose="02070309020205020404" pitchFamily="49" charset="0"/>
+                <a:cs typeface="Courier New" panose="02070309020205020404" pitchFamily="49" charset="0"/>
+              </a:rPr>
+              <a:t>cursor</a:t>
+            </a:r>
+            <a:r>
+              <a:rPr lang="fr-FR" sz="2000" dirty="0">
+                <a:latin typeface="Courier New" panose="02070309020205020404" pitchFamily="49" charset="0"/>
+                <a:cs typeface="Courier New" panose="02070309020205020404" pitchFamily="49" charset="0"/>
+              </a:rPr>
+              <a:t> = </a:t>
+            </a:r>
+            <a:r>
+              <a:rPr lang="fr-FR" sz="2000" dirty="0" err="1">
+                <a:latin typeface="Courier New" panose="02070309020205020404" pitchFamily="49" charset="0"/>
+                <a:cs typeface="Courier New" panose="02070309020205020404" pitchFamily="49" charset="0"/>
+              </a:rPr>
+              <a:t>db.house.find</a:t>
+            </a:r>
+            <a:r>
+              <a:rPr lang="fr-FR" sz="2000" dirty="0">
+                <a:latin typeface="Courier New" panose="02070309020205020404" pitchFamily="49" charset="0"/>
+                <a:cs typeface="Courier New" panose="02070309020205020404" pitchFamily="49" charset="0"/>
+              </a:rPr>
+              <a:t>()</a:t>
+            </a:r>
+          </a:p>
+          <a:p>
+            <a:pPr marL="457200" lvl="1" indent="0">
+              <a:buNone/>
+            </a:pPr>
+            <a:r>
+              <a:rPr lang="fr-FR" sz="2000" dirty="0">
+                <a:latin typeface="Courier New" panose="02070309020205020404" pitchFamily="49" charset="0"/>
+                <a:cs typeface="Courier New" panose="02070309020205020404" pitchFamily="49" charset="0"/>
+              </a:rPr>
+              <a:t>    </a:t>
+            </a:r>
+            <a:r>
+              <a:rPr lang="fr-FR" sz="2000" dirty="0" err="1">
+                <a:latin typeface="Courier New" panose="02070309020205020404" pitchFamily="49" charset="0"/>
+                <a:cs typeface="Courier New" panose="02070309020205020404" pitchFamily="49" charset="0"/>
+              </a:rPr>
+              <a:t>house_data</a:t>
+            </a:r>
+            <a:r>
+              <a:rPr lang="fr-FR" sz="2000" dirty="0">
+                <a:latin typeface="Courier New" panose="02070309020205020404" pitchFamily="49" charset="0"/>
+                <a:cs typeface="Courier New" panose="02070309020205020404" pitchFamily="49" charset="0"/>
+              </a:rPr>
+              <a:t> = </a:t>
+            </a:r>
+            <a:r>
+              <a:rPr lang="fr-FR" sz="2000" dirty="0" err="1">
+                <a:latin typeface="Courier New" panose="02070309020205020404" pitchFamily="49" charset="0"/>
+                <a:cs typeface="Courier New" panose="02070309020205020404" pitchFamily="49" charset="0"/>
+              </a:rPr>
+              <a:t>pd.DataFrame</a:t>
+            </a:r>
+            <a:r>
+              <a:rPr lang="fr-FR" sz="2000" dirty="0">
+                <a:latin typeface="Courier New" panose="02070309020205020404" pitchFamily="49" charset="0"/>
+                <a:cs typeface="Courier New" panose="02070309020205020404" pitchFamily="49" charset="0"/>
+              </a:rPr>
+              <a:t>(</a:t>
+            </a:r>
+            <a:r>
+              <a:rPr lang="fr-FR" sz="2000" dirty="0" err="1">
+                <a:latin typeface="Courier New" panose="02070309020205020404" pitchFamily="49" charset="0"/>
+                <a:cs typeface="Courier New" panose="02070309020205020404" pitchFamily="49" charset="0"/>
+              </a:rPr>
+              <a:t>list</a:t>
+            </a:r>
+            <a:r>
+              <a:rPr lang="fr-FR" sz="2000" dirty="0">
+                <a:latin typeface="Courier New" panose="02070309020205020404" pitchFamily="49" charset="0"/>
+                <a:cs typeface="Courier New" panose="02070309020205020404" pitchFamily="49" charset="0"/>
+              </a:rPr>
+              <a:t>(</a:t>
+            </a:r>
+            <a:r>
+              <a:rPr lang="fr-FR" sz="2000" dirty="0" err="1">
+                <a:latin typeface="Courier New" panose="02070309020205020404" pitchFamily="49" charset="0"/>
+                <a:cs typeface="Courier New" panose="02070309020205020404" pitchFamily="49" charset="0"/>
+              </a:rPr>
+              <a:t>cursor</a:t>
+            </a:r>
+            <a:r>
+              <a:rPr lang="fr-FR" sz="2000" dirty="0">
+                <a:latin typeface="Courier New" panose="02070309020205020404" pitchFamily="49" charset="0"/>
+                <a:cs typeface="Courier New" panose="02070309020205020404" pitchFamily="49" charset="0"/>
+              </a:rPr>
+              <a:t>))</a:t>
+            </a:r>
+          </a:p>
+          <a:p>
+            <a:pPr marL="457200" lvl="1" indent="0">
+              <a:buNone/>
+            </a:pPr>
+            <a:endParaRPr lang="en-US" sz="2000" dirty="0">
+              <a:latin typeface="Courier New" panose="02070309020205020404" pitchFamily="49" charset="0"/>
+              <a:cs typeface="Courier New" panose="02070309020205020404" pitchFamily="49" charset="0"/>
+            </a:endParaRPr>
+          </a:p>
+        </p:txBody>
+      </p:sp>
     </p:spTree>
     <p:extLst>
       <p:ext uri="{BB962C8B-B14F-4D97-AF65-F5344CB8AC3E}">
-        <p14:creationId xmlns:p14="http://schemas.microsoft.com/office/powerpoint/2010/main" val="2986912245"/>
+        <p14:creationId xmlns:p14="http://schemas.microsoft.com/office/powerpoint/2010/main" val="1488125564"/>
       </p:ext>
     </p:extLst>
   </p:cSld>
   <p:clrMapOvr>
     <a:masterClrMapping/>
   </p:clrMapOvr>
-  <p:timing>
-    <p:tnLst>
-      <p:par>
-        <p:cTn id="1" dur="indefinite" restart="never" nodeType="tmRoot"/>
-      </p:par>
-    </p:tnLst>
-  </p:timing>
 </p:sld>
 </file>
 
@@ -5481,7 +7172,13 @@
       </p:grpSpPr>
       <p:sp>
         <p:nvSpPr>
-          <p:cNvPr id="2" name="Titre 1"/>
+          <p:cNvPr id="2" name="Titre 1">
+            <a:extLst>
+              <a:ext uri="{FF2B5EF4-FFF2-40B4-BE49-F238E27FC236}">
+                <a16:creationId xmlns:a16="http://schemas.microsoft.com/office/drawing/2014/main" id="{8069CE5A-992B-4582-F160-BAE23DC89E08}"/>
+              </a:ext>
+            </a:extLst>
+          </p:cNvPr>
           <p:cNvSpPr>
             <a:spLocks noGrp="1"/>
           </p:cNvSpPr>
@@ -5495,16 +7192,21 @@
           <a:lstStyle/>
           <a:p>
             <a:r>
-              <a:rPr lang="fr-FR" dirty="0" smtClean="0"/>
-              <a:t>Interprétation après filtrage</a:t>
-            </a:r>
-            <a:endParaRPr lang="fr-FR" dirty="0"/>
-          </a:p>
-        </p:txBody>
-      </p:sp>
-      <p:sp>
-        <p:nvSpPr>
-          <p:cNvPr id="3" name="Espace réservé du contenu 2"/>
+              <a:rPr lang="fr-FR" dirty="0"/>
+              <a:t>Comment accéder aux colonnes</a:t>
+            </a:r>
+          </a:p>
+        </p:txBody>
+      </p:sp>
+      <p:sp>
+        <p:nvSpPr>
+          <p:cNvPr id="3" name="Espace réservé du contenu 2">
+            <a:extLst>
+              <a:ext uri="{FF2B5EF4-FFF2-40B4-BE49-F238E27FC236}">
+                <a16:creationId xmlns:a16="http://schemas.microsoft.com/office/drawing/2014/main" id="{C474E9A5-3A03-ECD7-4CBD-01BABCBCC45A}"/>
+              </a:ext>
+            </a:extLst>
+          </p:cNvPr>
           <p:cNvSpPr>
             <a:spLocks noGrp="1"/>
           </p:cNvSpPr>
@@ -5518,60 +7220,51 @@
           <a:lstStyle/>
           <a:p>
             <a:r>
-              <a:rPr lang="fr-FR" dirty="0" smtClean="0"/>
-              <a:t>Nous pouvons filtrer les surfaces &gt; 300</a:t>
-            </a:r>
-          </a:p>
-          <a:p>
-            <a:r>
-              <a:rPr lang="fr-FR" dirty="0" smtClean="0"/>
-              <a:t>Avec </a:t>
-            </a:r>
+              <a:rPr lang="fr-FR" dirty="0"/>
+              <a:t>Comme un dictionnaire</a:t>
+            </a:r>
+          </a:p>
+          <a:p>
+            <a:pPr lvl="1"/>
             <a:r>
               <a:rPr lang="fr-FR" dirty="0" err="1"/>
-              <a:t>SciPy</a:t>
-            </a:r>
-            <a:r>
-              <a:rPr lang="fr-FR" dirty="0"/>
-              <a:t> nous obtenons</a:t>
+              <a:t>df</a:t>
+            </a:r>
+            <a:r>
+              <a:rPr lang="fr-FR" dirty="0"/>
+              <a:t>["</a:t>
+            </a:r>
+            <a:r>
+              <a:rPr lang="fr-FR" dirty="0" err="1"/>
+              <a:t>nom_colonne</a:t>
+            </a:r>
+            <a:r>
+              <a:rPr lang="fr-FR" dirty="0"/>
+              <a:t>"]</a:t>
             </a:r>
           </a:p>
           <a:p>
             <a:pPr lvl="1"/>
             <a:r>
-              <a:rPr lang="fr-FR" dirty="0"/>
-              <a:t>Loyer = </a:t>
-            </a:r>
-            <a:r>
-              <a:rPr lang="fr-FR" dirty="0" smtClean="0"/>
-              <a:t>34.Surface + 71</a:t>
-            </a:r>
-            <a:endParaRPr lang="fr-FR" dirty="0"/>
-          </a:p>
-          <a:p>
-            <a:pPr lvl="1"/>
-            <a:r>
-              <a:rPr lang="fr-FR" dirty="0"/>
-              <a:t>Corrélation = </a:t>
-            </a:r>
-            <a:r>
-              <a:rPr lang="fr-FR" dirty="0" smtClean="0"/>
-              <a:t>84.7% (En baisse)</a:t>
-            </a:r>
-            <a:endParaRPr lang="fr-FR" dirty="0"/>
-          </a:p>
-          <a:p>
-            <a:r>
-              <a:rPr lang="fr-FR" dirty="0" smtClean="0"/>
-              <a:t>Meilleur résultat</a:t>
-            </a:r>
-            <a:endParaRPr lang="fr-FR" dirty="0"/>
+              <a:rPr lang="fr-FR" dirty="0" err="1"/>
+              <a:t>df.nom_colonne</a:t>
+            </a:r>
+            <a:r>
+              <a:rPr lang="fr-FR" dirty="0"/>
+              <a:t> est plus rarement utilisé</a:t>
+            </a:r>
           </a:p>
         </p:txBody>
       </p:sp>
       <p:pic>
         <p:nvPicPr>
-          <p:cNvPr id="4" name="Image 3"/>
+          <p:cNvPr id="5" name="Image 4">
+            <a:extLst>
+              <a:ext uri="{FF2B5EF4-FFF2-40B4-BE49-F238E27FC236}">
+                <a16:creationId xmlns:a16="http://schemas.microsoft.com/office/drawing/2014/main" id="{EBC50FD7-927E-2CD1-E583-E7793588506C}"/>
+              </a:ext>
+            </a:extLst>
+          </p:cNvPr>
           <p:cNvPicPr>
             <a:picLocks noChangeAspect="1"/>
           </p:cNvPicPr>
@@ -5585,8 +7278,8 @@
         </p:blipFill>
         <p:spPr>
           <a:xfrm>
-            <a:off x="4211960" y="3412666"/>
-            <a:ext cx="4190237" cy="3040831"/>
+            <a:off x="216963" y="3068960"/>
+            <a:ext cx="8592749" cy="2229161"/>
           </a:xfrm>
           <a:prstGeom prst="rect">
             <a:avLst/>
@@ -5596,20 +7289,13 @@
     </p:spTree>
     <p:extLst>
       <p:ext uri="{BB962C8B-B14F-4D97-AF65-F5344CB8AC3E}">
-        <p14:creationId xmlns:p14="http://schemas.microsoft.com/office/powerpoint/2010/main" val="1127232265"/>
+        <p14:creationId xmlns:p14="http://schemas.microsoft.com/office/powerpoint/2010/main" val="1417597317"/>
       </p:ext>
     </p:extLst>
   </p:cSld>
   <p:clrMapOvr>
     <a:masterClrMapping/>
   </p:clrMapOvr>
-  <p:timing>
-    <p:tnLst>
-      <p:par>
-        <p:cTn id="1" dur="indefinite" restart="never" nodeType="tmRoot"/>
-      </p:par>
-    </p:tnLst>
-  </p:timing>
 </p:sld>
 </file>
 
@@ -5632,7 +7318,13 @@
       </p:grpSpPr>
       <p:sp>
         <p:nvSpPr>
-          <p:cNvPr id="2" name="Titre 1"/>
+          <p:cNvPr id="2" name="Titre 1">
+            <a:extLst>
+              <a:ext uri="{FF2B5EF4-FFF2-40B4-BE49-F238E27FC236}">
+                <a16:creationId xmlns:a16="http://schemas.microsoft.com/office/drawing/2014/main" id="{B570F431-0DDD-84DD-AB66-B93D62F1E276}"/>
+              </a:ext>
+            </a:extLst>
+          </p:cNvPr>
           <p:cNvSpPr>
             <a:spLocks noGrp="1"/>
           </p:cNvSpPr>
@@ -5646,16 +7338,21 @@
           <a:lstStyle/>
           <a:p>
             <a:r>
-              <a:rPr lang="fr-FR" dirty="0" smtClean="0"/>
-              <a:t>Filtrage</a:t>
-            </a:r>
-            <a:endParaRPr lang="fr-FR" dirty="0"/>
-          </a:p>
-        </p:txBody>
-      </p:sp>
-      <p:sp>
-        <p:nvSpPr>
-          <p:cNvPr id="3" name="Espace réservé du contenu 2"/>
+              <a:rPr lang="fr-FR" dirty="0"/>
+              <a:t>Indexation</a:t>
+            </a:r>
+          </a:p>
+        </p:txBody>
+      </p:sp>
+      <p:sp>
+        <p:nvSpPr>
+          <p:cNvPr id="3" name="Espace réservé du contenu 2">
+            <a:extLst>
+              <a:ext uri="{FF2B5EF4-FFF2-40B4-BE49-F238E27FC236}">
+                <a16:creationId xmlns:a16="http://schemas.microsoft.com/office/drawing/2014/main" id="{1DEE8336-F873-FB7D-E3E6-C33EFDB7059C}"/>
+              </a:ext>
+            </a:extLst>
+          </p:cNvPr>
           <p:cNvSpPr>
             <a:spLocks noGrp="1"/>
           </p:cNvSpPr>
@@ -5669,82 +7366,78 @@
           <a:lstStyle/>
           <a:p>
             <a:r>
-              <a:rPr lang="fr-FR" dirty="0" smtClean="0"/>
-              <a:t>Filtrage du </a:t>
-            </a:r>
-            <a:r>
-              <a:rPr lang="fr-FR" dirty="0" err="1" smtClean="0"/>
-              <a:t>DataFrame</a:t>
-            </a:r>
-            <a:endParaRPr lang="fr-FR" dirty="0" smtClean="0"/>
+              <a:rPr lang="fr-FR" dirty="0"/>
+              <a:t>Pandas va toujours créer une colonne d'index</a:t>
+            </a:r>
           </a:p>
           <a:p>
             <a:pPr lvl="1"/>
             <a:r>
-              <a:rPr lang="fr-FR" dirty="0" err="1" smtClean="0"/>
-              <a:t>Dataframe</a:t>
-            </a:r>
-            <a:r>
-              <a:rPr lang="fr-FR" dirty="0" smtClean="0"/>
-              <a:t> = </a:t>
-            </a:r>
-            <a:r>
-              <a:rPr lang="fr-FR" dirty="0" err="1" smtClean="0"/>
-              <a:t>dataframe</a:t>
-            </a:r>
-            <a:r>
-              <a:rPr lang="fr-FR" dirty="0" smtClean="0"/>
-              <a:t>[</a:t>
-            </a:r>
-            <a:r>
-              <a:rPr lang="fr-FR" dirty="0" err="1" smtClean="0"/>
-              <a:t>dataframe.surface</a:t>
-            </a:r>
-            <a:r>
-              <a:rPr lang="fr-FR" dirty="0" smtClean="0"/>
-              <a:t> &lt; 200]</a:t>
+              <a:rPr lang="fr-FR" dirty="0"/>
+              <a:t>Par défaut numéroté de 0 à n</a:t>
+            </a:r>
+          </a:p>
+          <a:p>
+            <a:pPr lvl="1"/>
+            <a:r>
+              <a:rPr lang="fr-FR" dirty="0"/>
+              <a:t>Possible d'en assigner une par </a:t>
+            </a:r>
+            <a:r>
+              <a:rPr lang="fr-FR" dirty="0" err="1"/>
+              <a:t>index_col</a:t>
             </a:r>
             <a:endParaRPr lang="fr-FR" dirty="0"/>
           </a:p>
           <a:p>
-            <a:r>
-              <a:rPr lang="fr-FR" dirty="0" smtClean="0"/>
-              <a:t>Enlever une dimension</a:t>
-            </a:r>
-          </a:p>
-          <a:p>
             <a:pPr lvl="1"/>
             <a:r>
-              <a:rPr lang="fr-FR" dirty="0" err="1" smtClean="0"/>
-              <a:t>Dataframe.drop</a:t>
-            </a:r>
-            <a:r>
-              <a:rPr lang="fr-FR" dirty="0" smtClean="0"/>
-              <a:t>(‘Colonne’,1)</a:t>
-            </a:r>
-          </a:p>
-          <a:p>
-            <a:endParaRPr lang="fr-FR" dirty="0" smtClean="0"/>
-          </a:p>
-        </p:txBody>
-      </p:sp>
+              <a:rPr lang="fr-FR" dirty="0"/>
+              <a:t>Possible d'en créer par code</a:t>
+            </a:r>
+          </a:p>
+        </p:txBody>
+      </p:sp>
+      <p:pic>
+        <p:nvPicPr>
+          <p:cNvPr id="5" name="Image 4">
+            <a:extLst>
+              <a:ext uri="{FF2B5EF4-FFF2-40B4-BE49-F238E27FC236}">
+                <a16:creationId xmlns:a16="http://schemas.microsoft.com/office/drawing/2014/main" id="{821B6969-53D8-C821-4D82-0E76A97FD44F}"/>
+              </a:ext>
+            </a:extLst>
+          </p:cNvPr>
+          <p:cNvPicPr>
+            <a:picLocks noChangeAspect="1"/>
+          </p:cNvPicPr>
+          <p:nvPr/>
+        </p:nvPicPr>
+        <p:blipFill>
+          <a:blip r:embed="rId2"/>
+          <a:stretch>
+            <a:fillRect/>
+          </a:stretch>
+        </p:blipFill>
+        <p:spPr>
+          <a:xfrm>
+            <a:off x="1644676" y="3170122"/>
+            <a:ext cx="5835722" cy="3707148"/>
+          </a:xfrm>
+          <a:prstGeom prst="rect">
+            <a:avLst/>
+          </a:prstGeom>
+        </p:spPr>
+      </p:pic>
     </p:spTree>
     <p:extLst>
       <p:ext uri="{BB962C8B-B14F-4D97-AF65-F5344CB8AC3E}">
-        <p14:creationId xmlns:p14="http://schemas.microsoft.com/office/powerpoint/2010/main" val="3332384904"/>
+        <p14:creationId xmlns:p14="http://schemas.microsoft.com/office/powerpoint/2010/main" val="1161215122"/>
       </p:ext>
     </p:extLst>
   </p:cSld>
   <p:clrMapOvr>
     <a:masterClrMapping/>
   </p:clrMapOvr>
-  <p:timing>
-    <p:tnLst>
-      <p:par>
-        <p:cTn id="1" dur="indefinite" restart="never" nodeType="tmRoot"/>
-      </p:par>
-    </p:tnLst>
-  </p:timing>
 </p:sld>
 </file>
 
@@ -5767,7 +7460,13 @@
       </p:grpSpPr>
       <p:sp>
         <p:nvSpPr>
-          <p:cNvPr id="2" name="Titre 1"/>
+          <p:cNvPr id="2" name="Titre 1">
+            <a:extLst>
+              <a:ext uri="{FF2B5EF4-FFF2-40B4-BE49-F238E27FC236}">
+                <a16:creationId xmlns:a16="http://schemas.microsoft.com/office/drawing/2014/main" id="{47BE4FE6-B100-FB19-A3F3-763B90E3AF91}"/>
+              </a:ext>
+            </a:extLst>
+          </p:cNvPr>
           <p:cNvSpPr>
             <a:spLocks noGrp="1"/>
           </p:cNvSpPr>
@@ -5781,16 +7480,21 @@
           <a:lstStyle/>
           <a:p>
             <a:r>
-              <a:rPr lang="fr-FR" dirty="0" smtClean="0"/>
-              <a:t>Filtrage</a:t>
-            </a:r>
-            <a:endParaRPr lang="fr-FR" dirty="0"/>
-          </a:p>
-        </p:txBody>
-      </p:sp>
-      <p:sp>
-        <p:nvSpPr>
-          <p:cNvPr id="3" name="Espace réservé du contenu 2"/>
+              <a:rPr lang="fr-FR" dirty="0"/>
+              <a:t>Comment accéder aux lignes</a:t>
+            </a:r>
+          </a:p>
+        </p:txBody>
+      </p:sp>
+      <p:sp>
+        <p:nvSpPr>
+          <p:cNvPr id="3" name="Espace réservé du contenu 2">
+            <a:extLst>
+              <a:ext uri="{FF2B5EF4-FFF2-40B4-BE49-F238E27FC236}">
+                <a16:creationId xmlns:a16="http://schemas.microsoft.com/office/drawing/2014/main" id="{3406C9CB-BF72-A560-0914-4B3E1F58998A}"/>
+              </a:ext>
+            </a:extLst>
+          </p:cNvPr>
           <p:cNvSpPr>
             <a:spLocks noGrp="1"/>
           </p:cNvSpPr>
@@ -5804,150 +7508,57 @@
           <a:lstStyle/>
           <a:p>
             <a:r>
-              <a:rPr lang="fr-FR" dirty="0" smtClean="0"/>
-              <a:t>Remplacer les champs nuls</a:t>
-            </a:r>
-          </a:p>
-          <a:p>
-            <a:pPr lvl="1"/>
-            <a:r>
-              <a:rPr lang="fr-FR" dirty="0" err="1" smtClean="0"/>
-              <a:t>dataframe.codePostal</a:t>
-            </a:r>
-            <a:r>
-              <a:rPr lang="fr-FR" dirty="0" smtClean="0"/>
-              <a:t> </a:t>
-            </a:r>
-            <a:r>
-              <a:rPr lang="fr-FR" dirty="0"/>
-              <a:t>= </a:t>
-            </a:r>
-            <a:r>
-              <a:rPr lang="fr-FR" dirty="0" err="1" smtClean="0"/>
-              <a:t>dataframe.codePostal.fillna</a:t>
-            </a:r>
-            <a:r>
-              <a:rPr lang="fr-FR" dirty="0"/>
-              <a:t>('38000</a:t>
-            </a:r>
-            <a:r>
-              <a:rPr lang="fr-FR" dirty="0" smtClean="0"/>
-              <a:t>')</a:t>
-            </a:r>
-          </a:p>
-          <a:p>
-            <a:r>
-              <a:rPr lang="fr-FR" dirty="0" smtClean="0"/>
-              <a:t>Effacer les lignes nuls</a:t>
-            </a:r>
-          </a:p>
-          <a:p>
-            <a:pPr lvl="1"/>
+              <a:rPr lang="fr-FR" dirty="0"/>
+              <a:t>Si vous connaissez l'index : </a:t>
+            </a:r>
             <a:r>
               <a:rPr lang="fr-FR" dirty="0" err="1"/>
-              <a:t>d</a:t>
-            </a:r>
-            <a:r>
-              <a:rPr lang="fr-FR" dirty="0" err="1" smtClean="0"/>
-              <a:t>ropna</a:t>
-            </a:r>
-            <a:r>
-              <a:rPr lang="fr-FR" dirty="0" smtClean="0"/>
-              <a:t>()</a:t>
-            </a:r>
-          </a:p>
-          <a:p>
-            <a:r>
-              <a:rPr lang="fr-FR" smtClean="0"/>
-              <a:t>Changement </a:t>
-            </a:r>
-            <a:r>
-              <a:rPr lang="fr-FR" dirty="0" smtClean="0"/>
-              <a:t>de valeurs</a:t>
-            </a:r>
-          </a:p>
-          <a:p>
-            <a:pPr lvl="1"/>
-            <a:r>
-              <a:rPr lang="fr-FR" dirty="0" err="1" smtClean="0"/>
-              <a:t>dataframe.surface</a:t>
-            </a:r>
-            <a:r>
-              <a:rPr lang="fr-FR" dirty="0" smtClean="0"/>
-              <a:t> </a:t>
-            </a:r>
-            <a:r>
-              <a:rPr lang="fr-FR" dirty="0"/>
-              <a:t>= </a:t>
-            </a:r>
-            <a:r>
-              <a:rPr lang="fr-FR" dirty="0" err="1" smtClean="0"/>
-              <a:t>dataframe</a:t>
-            </a:r>
-            <a:r>
-              <a:rPr lang="fr-FR" dirty="0" smtClean="0"/>
-              <a:t>[‘surface'].</a:t>
-            </a:r>
-            <a:r>
-              <a:rPr lang="fr-FR" dirty="0"/>
-              <a:t>replace(',', '.',</a:t>
-            </a:r>
-            <a:r>
-              <a:rPr lang="fr-FR" dirty="0" err="1"/>
-              <a:t>regex</a:t>
-            </a:r>
-            <a:r>
-              <a:rPr lang="fr-FR" dirty="0"/>
-              <a:t>=</a:t>
-            </a:r>
-            <a:r>
-              <a:rPr lang="fr-FR" dirty="0" err="1"/>
-              <a:t>True</a:t>
-            </a:r>
-            <a:r>
-              <a:rPr lang="fr-FR" dirty="0"/>
-              <a:t>).</a:t>
-            </a:r>
-            <a:r>
-              <a:rPr lang="fr-FR" dirty="0" err="1"/>
-              <a:t>astype</a:t>
-            </a:r>
-            <a:r>
-              <a:rPr lang="fr-FR" dirty="0"/>
-              <a:t>(</a:t>
-            </a:r>
-            <a:r>
-              <a:rPr lang="fr-FR" dirty="0" err="1"/>
-              <a:t>float</a:t>
-            </a:r>
-            <a:r>
-              <a:rPr lang="fr-FR" dirty="0" smtClean="0"/>
-              <a:t>)</a:t>
+              <a:t>loc</a:t>
             </a:r>
             <a:endParaRPr lang="fr-FR" dirty="0"/>
           </a:p>
-          <a:p>
-            <a:endParaRPr lang="fr-FR" dirty="0" smtClean="0"/>
-          </a:p>
-        </p:txBody>
-      </p:sp>
+        </p:txBody>
+      </p:sp>
+      <p:pic>
+        <p:nvPicPr>
+          <p:cNvPr id="5" name="Image 4">
+            <a:extLst>
+              <a:ext uri="{FF2B5EF4-FFF2-40B4-BE49-F238E27FC236}">
+                <a16:creationId xmlns:a16="http://schemas.microsoft.com/office/drawing/2014/main" id="{3131E942-F43A-4C3C-BC99-BAFBFFD2CD68}"/>
+              </a:ext>
+            </a:extLst>
+          </p:cNvPr>
+          <p:cNvPicPr>
+            <a:picLocks noChangeAspect="1"/>
+          </p:cNvPicPr>
+          <p:nvPr/>
+        </p:nvPicPr>
+        <p:blipFill>
+          <a:blip r:embed="rId2"/>
+          <a:stretch>
+            <a:fillRect/>
+          </a:stretch>
+        </p:blipFill>
+        <p:spPr>
+          <a:xfrm>
+            <a:off x="1907704" y="2780928"/>
+            <a:ext cx="5753903" cy="2867425"/>
+          </a:xfrm>
+          <a:prstGeom prst="rect">
+            <a:avLst/>
+          </a:prstGeom>
+        </p:spPr>
+      </p:pic>
     </p:spTree>
     <p:extLst>
       <p:ext uri="{BB962C8B-B14F-4D97-AF65-F5344CB8AC3E}">
-        <p14:creationId xmlns:p14="http://schemas.microsoft.com/office/powerpoint/2010/main" val="2942252075"/>
+        <p14:creationId xmlns:p14="http://schemas.microsoft.com/office/powerpoint/2010/main" val="1141999437"/>
       </p:ext>
     </p:extLst>
   </p:cSld>
   <p:clrMapOvr>
     <a:masterClrMapping/>
   </p:clrMapOvr>
-  <p:timing>
-    <p:tnLst>
-      <p:par>
-        <p:cTn id="1" dur="indefinite" restart="never" nodeType="tmRoot"/>
-      </p:par>
-    </p:tnLst>
-  </p:timing>
 </p:sld>
 </file>
 
